--- a/lecons/LSA/Geomorphology/16_LSA_GEOMO_L14_Erosional_Processes_and_the_Fluvial_System.pptx
+++ b/lecons/LSA/Geomorphology/16_LSA_GEOMO_L14_Erosional_Processes_and_the_Fluvial_System.pptx
@@ -62,9 +62,11 @@
     <p:sldId id="310" r:id="rId56"/>
     <p:sldId id="311" r:id="rId57"/>
     <p:sldId id="312" r:id="rId58"/>
+    <p:sldId id="313" r:id="rId59"/>
+    <p:sldId id="314" r:id="rId60"/>
   </p:sldIdLst>
   <p:notesMasterIdLst>
-    <p:notesMasterId r:id="rId59"/>
+    <p:notesMasterId r:id="rId61"/>
   </p:notesMasterIdLst>
   <p:sldSz cx="12192000" cy="6858000"/>
   <p:notesSz cx="6858000" cy="12192000"/>
@@ -646,7 +648,7 @@
           <a:p>
             <a:r>
               <a:rPr lang="en-US" dirty="0"/>
-              <a:t>Question 1: What is the problem in the situation? Think for a moment, then raise your hand to answer.</a:t>
+              <a:t>Take your time to copy this part; we will continue together.</a:t>
             </a:r>
             <a:endParaRPr lang="en-US" dirty="0"/>
           </a:p>
@@ -734,7 +736,7 @@
           <a:p>
             <a:r>
               <a:rPr lang="en-US" dirty="0"/>
-              <a:t>Good. We want to know why the river carries more in August.</a:t>
+              <a:t>Listen carefully to this situation from real life. In the rainy season, you stand on the bridge of Garoua and look at the Benue: it is wide, fast and brown, carrying soil, branches and debris. In the dry season, from the same place, the river is low, slow and clearer, and huge sandbanks appear where deep water flowed before. You ask: "Where did all the brown mud go, and where did this new sand come from?" Think about it, because I am going to ask you some questions.</a:t>
             </a:r>
             <a:endParaRPr lang="en-US" dirty="0"/>
           </a:p>
@@ -822,7 +824,7 @@
           <a:p>
             <a:r>
               <a:rPr lang="en-US" dirty="0"/>
-              <a:t>Question 2: What does the river carry? Think for a moment, then raise your hand to answer.</a:t>
+              <a:t>Question 1: What is the problem in the situation? Think for a moment, then raise your hand to answer.</a:t>
             </a:r>
             <a:endParaRPr lang="en-US" dirty="0"/>
           </a:p>
@@ -910,7 +912,7 @@
           <a:p>
             <a:r>
               <a:rPr lang="en-US" dirty="0"/>
-              <a:t>Good. Mud, sand and branches (its load).</a:t>
+              <a:t>Good. The learner does not know how a river erodes, carries and deposits material.</a:t>
             </a:r>
             <a:endParaRPr lang="en-US" dirty="0"/>
           </a:p>
@@ -998,7 +1000,7 @@
           <a:p>
             <a:r>
               <a:rPr lang="en-US" dirty="0"/>
-              <a:t>Question 3: Why are there sandbanks in March? Think for a moment, then raise your hand to answer.</a:t>
+              <a:t>Question 2: What is the river doing in the rainy season? Think for a moment, then raise your hand to answer.</a:t>
             </a:r>
             <a:endParaRPr lang="en-US" dirty="0"/>
           </a:p>
@@ -1086,7 +1088,7 @@
           <a:p>
             <a:r>
               <a:rPr lang="en-US" dirty="0"/>
-              <a:t>Good. The slow water drops its load.</a:t>
+              <a:t>Good. Eroding its banks and transporting a large load.</a:t>
             </a:r>
             <a:endParaRPr lang="en-US" dirty="0"/>
           </a:p>
@@ -1174,7 +1176,7 @@
           <a:p>
             <a:r>
               <a:rPr lang="en-US" dirty="0"/>
-              <a:t>From this situation, the action we are working towards in this lesson is the following: understand river processes to manage rivers and prevent erosion and floods.</a:t>
+              <a:t>Question 3: Why do sandbanks appear in the dry season? Think for a moment, then raise your hand to answer.</a:t>
             </a:r>
             <a:endParaRPr lang="en-US" dirty="0"/>
           </a:p>
@@ -1262,7 +1264,7 @@
           <a:p>
             <a:r>
               <a:rPr lang="en-US" dirty="0"/>
-              <a:t>Why is this lesson important for you? This lesson helps us to understand the work of rivers.</a:t>
+              <a:t>Good. The river slows down, loses energy and deposits its load.</a:t>
             </a:r>
             <a:endParaRPr lang="en-US" dirty="0"/>
           </a:p>
@@ -1350,7 +1352,7 @@
           <a:p>
             <a:r>
               <a:rPr lang="en-US" dirty="0"/>
-              <a:t>Activity 1. Look carefully at this diagram: the four processes of river erosion. Observe every detail before I ask the question.</a:t>
+              <a:t>From this situation, the action we are working towards in this lesson is the following: protect river banks with vegetation and avoid building on unstable banks.</a:t>
             </a:r>
             <a:endParaRPr lang="en-US" dirty="0"/>
           </a:p>
@@ -1438,7 +1440,7 @@
           <a:p>
             <a:r>
               <a:rPr lang="en-US" dirty="0"/>
-              <a:t>Here is the question for Activity 1: Name the four processes of river erosion. Take one minute to think and write your answer in your rough notebook.</a:t>
+              <a:t>Why is this lesson important for you? This lesson helps us to understand the changing channel of the Benue, which affects farming, fishing and navigation.</a:t>
             </a:r>
             <a:endParaRPr lang="en-US" dirty="0"/>
           </a:p>
@@ -1614,7 +1616,7 @@
           <a:p>
             <a:r>
               <a:rPr lang="en-US" dirty="0"/>
-              <a:t>Let us check the answer together. Hydraulic action, abrasion, attrition and solution.</a:t>
+              <a:t>Activity 1. Look carefully at this diagram: an open system. Observe every detail before I ask the question.</a:t>
             </a:r>
             <a:endParaRPr lang="en-US" dirty="0"/>
           </a:p>
@@ -1702,7 +1704,7 @@
           <a:p>
             <a:r>
               <a:rPr lang="en-US" dirty="0"/>
-              <a:t>Activity 2. Look carefully at this animation: animation: how a river carries its load. Watch the animation to the end; it will play again.</a:t>
+              <a:t>Here is the question for Activity 1: Give one input of a river system. Take one minute to think and write your answer in your rough notebook.</a:t>
             </a:r>
             <a:endParaRPr lang="en-US" dirty="0"/>
           </a:p>
@@ -1790,7 +1792,7 @@
           <a:p>
             <a:r>
               <a:rPr lang="en-US" dirty="0"/>
-              <a:t>Here is the question for Activity 2: Name the four ways a river carries its load. Take one minute to think and write your answer in your rough notebook.</a:t>
+              <a:t>Let us check the answer together. Rainwater (or sediments from the slopes).</a:t>
             </a:r>
             <a:endParaRPr lang="en-US" dirty="0"/>
           </a:p>
@@ -1878,7 +1880,7 @@
           <a:p>
             <a:r>
               <a:rPr lang="en-US" dirty="0"/>
-              <a:t>Let us check the answer together. Traction, saltation, suspension and solution.</a:t>
+              <a:t>Activity 2. Look carefully at this diagram: the four processes of erosion. Observe every detail before I ask the question.</a:t>
             </a:r>
             <a:endParaRPr lang="en-US" dirty="0"/>
           </a:p>
@@ -1966,7 +1968,7 @@
           <a:p>
             <a:r>
               <a:rPr lang="en-US" dirty="0"/>
-              <a:t>Activity 3. Look carefully at this diagram: the Hjulström graph. Observe every detail before I ask the question.</a:t>
+              <a:t>Here is the question for Activity 2: Distinguish abrasion from attrition. Take one minute to think and write your answer in your rough notebook.</a:t>
             </a:r>
             <a:endParaRPr lang="en-US" dirty="0"/>
           </a:p>
@@ -2054,7 +2056,7 @@
           <a:p>
             <a:r>
               <a:rPr lang="en-US" dirty="0"/>
-              <a:t>Here is the question for Activity 3: Why is clay difficult to erode although it is very small? Take one minute to think and write your answer in your rough notebook.</a:t>
+              <a:t>Let us check the answer together. Abrasion: the load scrapes the bed and banks; attrition: stones hit each other and become smaller and rounder.</a:t>
             </a:r>
             <a:endParaRPr lang="en-US" dirty="0"/>
           </a:p>
@@ -2142,7 +2144,7 @@
           <a:p>
             <a:r>
               <a:rPr lang="en-US" dirty="0"/>
-              <a:t>Let us check the answer together. Clay particles stick together, so a high velocity is needed.</a:t>
+              <a:t>Activity 3. Look carefully at this picture: four ways of carrying the load. Observe every detail before I ask the question.</a:t>
             </a:r>
             <a:endParaRPr lang="en-US" dirty="0"/>
           </a:p>
@@ -2230,7 +2232,7 @@
           <a:p>
             <a:r>
               <a:rPr lang="en-US" dirty="0"/>
-              <a:t>Activity 4. Look carefully at this picture: a muddy river seen from space. Observe every detail before I ask the question.</a:t>
+              <a:t>Here is the question for Activity 3: Which method carries the largest amount of load? Take one minute to think and write your answer in your rough notebook.</a:t>
             </a:r>
             <a:endParaRPr lang="en-US" dirty="0"/>
           </a:p>
@@ -2318,7 +2320,7 @@
           <a:p>
             <a:r>
               <a:rPr lang="en-US" dirty="0"/>
-              <a:t>Here is the question for Activity 4: When does a river deposit its load? Take one minute to think and write your answer in your rough notebook.</a:t>
+              <a:t>Let us check the answer together. Suspension.</a:t>
             </a:r>
             <a:endParaRPr lang="en-US" dirty="0"/>
           </a:p>
@@ -2406,7 +2408,7 @@
           <a:p>
             <a:r>
               <a:rPr lang="en-US" dirty="0"/>
-              <a:t>Let us check the answer together. When its speed or volume falls, for example on flat land or at the sea.</a:t>
+              <a:t>Activity 4. Look carefully at this picture: a muddy river. Observe every detail before I ask the question.</a:t>
             </a:r>
             <a:endParaRPr lang="en-US" dirty="0"/>
           </a:p>
@@ -2494,7 +2496,7 @@
           <a:p>
             <a:r>
               <a:rPr lang="en-US" dirty="0"/>
-              <a:t>Our topic is Denudational Processes on Slopes, and the sub-topic is Erosion and Depositional Processes and Landforms. The key notions we shall use today are: erosion, transportation, deposition, competence, capacity, Hjulström. At the end, you should be able to do this: learners are able to explain how rivers erode, carry and deposit material.</a:t>
+              <a:t>Our topic is Denudational Processes on Slopes, and the sub-topic is Erosion and Depositional Processes and Landforms. The key notions we shall use today are: river system, input, output, hydraulic action, abrasion, attrition, solution, traction, saltation, suspension, load, deposition. At the end, you should be able to do this: learners are able to explain how a river erodes, carries and deposits material, using the Benue as an example.</a:t>
             </a:r>
             <a:endParaRPr lang="en-US" dirty="0"/>
           </a:p>
@@ -2582,7 +2584,7 @@
           <a:p>
             <a:r>
               <a:rPr lang="en-US" dirty="0"/>
-              <a:t>Activity 5. Look carefully at this diagram: the drainage basin as a system. Observe every detail before I ask the question.</a:t>
+              <a:t>Here is the question for Activity 4: Why is the Benue brown in the rainy season? Take one minute to think and write your answer in your rough notebook.</a:t>
             </a:r>
             <a:endParaRPr lang="en-US" dirty="0"/>
           </a:p>
@@ -2670,7 +2672,7 @@
           <a:p>
             <a:r>
               <a:rPr lang="en-US" dirty="0"/>
-              <a:t>Here is the question for Activity 5: What are the inputs and outputs of a river system? Take one minute to think and write your answer in your rough notebook.</a:t>
+              <a:t>Let us check the answer together. It carries a lot of silt and clay in suspension.</a:t>
             </a:r>
             <a:endParaRPr lang="en-US" dirty="0"/>
           </a:p>
@@ -2758,7 +2760,7 @@
           <a:p>
             <a:r>
               <a:rPr lang="en-US" dirty="0"/>
-              <a:t>Let us check the answer together. Inputs: rain, load from slopes. Outputs: water and sediment to the sea, evaporation.</a:t>
+              <a:t>Activity 5. Look carefully at this animation: animation: the load settles. Watch the animation to the end; it will play again.</a:t>
             </a:r>
             <a:endParaRPr lang="en-US" dirty="0"/>
           </a:p>
@@ -2846,7 +2848,7 @@
           <a:p>
             <a:r>
               <a:rPr lang="en-US" dirty="0"/>
-              <a:t>Now we are going to copy the board summary. Write the title and the headings neatly in your notebooks. I will give you enough time for each slide, so do not rush.</a:t>
+              <a:t>Here is the question for Activity 5: Which material is deposited first? Take one minute to think and write your answer in your rough notebook.</a:t>
             </a:r>
             <a:endParaRPr lang="en-US" dirty="0"/>
           </a:p>
@@ -2934,7 +2936,7 @@
           <a:p>
             <a:r>
               <a:rPr lang="en-US" dirty="0"/>
-              <a:t>Let us copy the definitions. The key terms of this lesson are defined as follows. On this slide we have Erosion and Competence. Write each point on a new line, with the key term first, and explain it in your own words when we revise. When you finish, we go to the next slide.</a:t>
+              <a:t>Let us check the answer together. The heaviest (boulders and pebbles).</a:t>
             </a:r>
             <a:endParaRPr lang="en-US" dirty="0"/>
           </a:p>
@@ -3022,7 +3024,7 @@
           <a:p>
             <a:r>
               <a:rPr lang="en-US" dirty="0"/>
-              <a:t>We continue with the definitions. On this slide we have Capacity. Write each point on a new line, with the key term first, and explain it in your own words when we revise.</a:t>
+              <a:t>Now we are going to copy the board summary. Write the title and the headings neatly in your notebooks. I will give you enough time for each slide, so do not rush.</a:t>
             </a:r>
             <a:endParaRPr lang="en-US" dirty="0"/>
           </a:p>
@@ -3110,7 +3112,7 @@
           <a:p>
             <a:r>
               <a:rPr lang="en-US" dirty="0"/>
-              <a:t>Let us copy Erosional Processes. Rivers erode by the following processes. On this slide we have Hydraulic action and Abrasion (corrasion). Write each point on a new line, with the key term first, and explain it in your own words when we revise. When you finish, we go to the next slide.</a:t>
+              <a:t>Let us copy the definitions. The key terms of this lesson are defined as follows. On this slide we have River system and Load. Write each point on a new line, with the key term first, and explain it in your own words when we revise. When you finish, we go to the next slide.</a:t>
             </a:r>
             <a:endParaRPr lang="en-US" dirty="0"/>
           </a:p>
@@ -3198,7 +3200,7 @@
           <a:p>
             <a:r>
               <a:rPr lang="en-US" dirty="0"/>
-              <a:t>We continue with Erosional Processes. On this slide we have Attrition and solution. Write each point on a new line, with the key term first, and explain it in your own words when we revise.</a:t>
+              <a:t>We continue with the definitions. On this slide we have Deposition. Write each point on a new line, with the key term first, and explain it in your own words when we revise.</a:t>
             </a:r>
             <a:endParaRPr lang="en-US" dirty="0"/>
           </a:p>
@@ -3286,7 +3288,7 @@
           <a:p>
             <a:r>
               <a:rPr lang="en-US" dirty="0"/>
-              <a:t>Now draw this illustration in your notebook: processes of river erosion. Give it a title and label it clearly.</a:t>
+              <a:t>Let us copy The River as a System. The river works as a system as follows. Copy the point on Inputs on the left, then draw the diagram on the right: an open system. Give it a title and label it clearly.</a:t>
             </a:r>
             <a:endParaRPr lang="en-US" dirty="0"/>
           </a:p>
@@ -3374,7 +3376,7 @@
           <a:p>
             <a:r>
               <a:rPr lang="en-US" dirty="0"/>
-              <a:t>Let us copy Transportation. The load of a river is transported as follows. On this slide we have Sources and types of load. Write each point on a new line, with the key term first, and explain it in your own words when we revise. When you finish, we go to the next slide.</a:t>
+              <a:t>We continue with The River as a System. On this slide we have Processes and Outputs. Write each point on a new line, with the key term first, and explain it in your own words when we revise.</a:t>
             </a:r>
             <a:endParaRPr lang="en-US" dirty="0"/>
           </a:p>
@@ -3462,7 +3464,7 @@
           <a:p>
             <a:r>
               <a:rPr lang="en-US" dirty="0"/>
-              <a:t>Before we start the new lesson, let us correct the homework I gave you at the end of Lesson 13: Processes and Features of Mass Wasting. The question was: Observe the Benue or a stream after rain. What does the water carry? Write three things. Take out your exercise books.</a:t>
+              <a:t>Before we start the new lesson, let us correct the homework I gave you at the end of Lesson 13: Processes and Features of Mass Wasting. The question was: Name the three types of work of a river. Take out your exercise books.</a:t>
             </a:r>
             <a:endParaRPr lang="en-US" dirty="0"/>
           </a:p>
@@ -3550,7 +3552,7 @@
           <a:p>
             <a:r>
               <a:rPr lang="en-US" dirty="0"/>
-              <a:t>We continue with Transportation. On this slide we have Processes. Write each point on a new line, with the key term first, and explain it in your own words when we revise. When you finish, we go to the next slide.</a:t>
+              <a:t>Let us copy River Erosion. A river erodes its bed and banks by the following processes. Copy the point on Hydraulic action on the left, then draw the diagram on the right: the four processes. Give it a title and label it clearly.</a:t>
             </a:r>
             <a:endParaRPr lang="en-US" dirty="0"/>
           </a:p>
@@ -3638,7 +3640,7 @@
           <a:p>
             <a:r>
               <a:rPr lang="en-US" dirty="0"/>
-              <a:t>We continue with Transportation. On this slide we have The Hjulström graph. Write each point on a new line, with the key term first, and explain it in your own words when we revise.</a:t>
+              <a:t>We continue with River Erosion. On this slide we have Abrasion (corrasion), Attrition and Solution (corrosion). Write each point on a new line, with the key term first, and explain it in your own words when we revise.</a:t>
             </a:r>
             <a:endParaRPr lang="en-US" dirty="0"/>
           </a:p>
@@ -3726,7 +3728,7 @@
           <a:p>
             <a:r>
               <a:rPr lang="en-US" dirty="0"/>
-              <a:t>Now draw this illustration in your notebook: the Hjulström graph. Give it a title and label it clearly.</a:t>
+              <a:t>Let us copy River Transportation. A river carries its load by the following methods. Copy the point on Traction on the left, then draw the diagram on the right: four ways of carrying the load. Give it a title and label it clearly.</a:t>
             </a:r>
             <a:endParaRPr lang="en-US" dirty="0"/>
           </a:p>
@@ -3814,7 +3816,7 @@
           <a:p>
             <a:r>
               <a:rPr lang="en-US" dirty="0"/>
-              <a:t>Let us copy Deposition and the River as a System. Deposition and the fluvial system can be summarised as follows. On this slide we have Deposition. Write each point on a new line, with the key term first, and explain it in your own words when we revise. When you finish, we go to the next slide.</a:t>
+              <a:t>We continue with River Transportation. On this slide we have Saltation. Write each point on a new line, with the key term first, and explain it in your own words when we revise.</a:t>
             </a:r>
             <a:endParaRPr lang="en-US" dirty="0"/>
           </a:p>
@@ -3902,7 +3904,7 @@
           <a:p>
             <a:r>
               <a:rPr lang="en-US" dirty="0"/>
-              <a:t>We continue with Deposition and the River as a System. On this slide we have The river as a system. Write each point on a new line, with the key term first, and explain it in your own words when we revise. When you finish, we go to the next slide.</a:t>
+              <a:t>Copy the point on Suspension on the left, then draw the diagram on the right: a muddy river. Give it a title and label it clearly.</a:t>
             </a:r>
             <a:endParaRPr lang="en-US" dirty="0"/>
           </a:p>
@@ -3990,7 +3992,7 @@
           <a:p>
             <a:r>
               <a:rPr lang="en-US" dirty="0"/>
-              <a:t>We continue with Deposition and the River as a System. On this slide we have Functions of rivers. Write each point on a new line, with the key term first, and explain it in your own words when we revise.</a:t>
+              <a:t>We continue with River Transportation. On this slide we have Solution. Write each point on a new line, with the key term first, and explain it in your own words when we revise.</a:t>
             </a:r>
             <a:endParaRPr lang="en-US" dirty="0"/>
           </a:p>
@@ -4078,7 +4080,7 @@
           <a:p>
             <a:r>
               <a:rPr lang="en-US" dirty="0"/>
-              <a:t>Now let us check what you have understood. Question 1: Distinguish competence and capacity. Answer in your exercise book.</a:t>
+              <a:t>Let us copy River Deposition. A river deposits its load in the following conditions. Copy the point on Loss of energy on the left, then draw the diagram on the right: the load settles. Give it a title and label it clearly.</a:t>
             </a:r>
             <a:endParaRPr lang="en-US" dirty="0"/>
           </a:p>
@@ -4166,7 +4168,7 @@
           <a:p>
             <a:r>
               <a:rPr lang="en-US" dirty="0"/>
-              <a:t>The expected answer is: competence is the largest particle carried; capacity is the total load. If you got it right, well done.</a:t>
+              <a:t>We continue with River Deposition. On this slide we have Less water, Flat land and Lakes and seas. Write each point on a new line, with the key term first, and explain it in your own words when we revise.</a:t>
             </a:r>
             <a:endParaRPr lang="en-US" dirty="0"/>
           </a:p>
@@ -4254,7 +4256,7 @@
           <a:p>
             <a:r>
               <a:rPr lang="en-US" dirty="0"/>
-              <a:t>Now let us check what you have understood. Question 2: Name the four types of transport. Answer in your exercise book.</a:t>
+              <a:t>Now let us check what you have understood. Question 1: Distinguish abrasion from attrition. Answer in your exercise book.</a:t>
             </a:r>
             <a:endParaRPr lang="en-US" dirty="0"/>
           </a:p>
@@ -4342,7 +4344,7 @@
           <a:p>
             <a:r>
               <a:rPr lang="en-US" dirty="0"/>
-              <a:t>The expected answer is: traction, saltation, suspension, solution. If you got it right, well done.</a:t>
+              <a:t>The expected answer is: abrasion is the scraping of the bed and banks by the load; attrition is the collision of stones that makes them smaller and rounder. If you got it right, well done.</a:t>
             </a:r>
             <a:endParaRPr lang="en-US" dirty="0"/>
           </a:p>
@@ -4430,7 +4432,7 @@
           <a:p>
             <a:r>
               <a:rPr lang="en-US" dirty="0"/>
-              <a:t>Here is a good answer. After rain, the river carries mud (suspended load), sand and pebbles rolling on the bed (bed load), and dissolved minerals (solution); also leaves and rubbish. Compare it with your own answer and correct your work in red.</a:t>
+              <a:t>Here is a good answer. Erosion, transportation and deposition. Compare it with your own answer and correct your work in red.</a:t>
             </a:r>
             <a:endParaRPr lang="en-US" dirty="0"/>
           </a:p>
@@ -4518,7 +4520,7 @@
           <a:p>
             <a:r>
               <a:rPr lang="en-US" dirty="0"/>
-              <a:t>For those who need more practice, fill in the blanks in your exercise book. The answers are: number 1, traction; number 2, saltation; number 3, capacity.</a:t>
+              <a:t>Now let us check what you have understood. Question 2: Give two conditions for river deposition. Answer in your exercise book.</a:t>
             </a:r>
             <a:endParaRPr lang="en-US" dirty="0"/>
           </a:p>
@@ -4606,7 +4608,7 @@
           <a:p>
             <a:r>
               <a:rPr lang="en-US" dirty="0"/>
-              <a:t>For your homework: Draw the long profile of a river and mark the upper, middle and lower courses. We shall correct it at the beginning of our next lesson.</a:t>
+              <a:t>The expected answer is: fall in water volume, entry into flat land, entry into a lake or the sea (any two). If you got it right, well done.</a:t>
             </a:r>
             <a:endParaRPr lang="en-US" dirty="0"/>
           </a:p>
@@ -4694,7 +4696,7 @@
           <a:p>
             <a:r>
               <a:rPr lang="en-US" dirty="0"/>
-              <a:t>Our next lesson will be on Lesson 15: River Action on its Long Profile. Thank you for your attention, and see you next time.</a:t>
+              <a:t>For those who need more practice, fill in the blanks in your exercise book. The answers are: number 1, traction; number 2, suspension; number 3, sandbanks.</a:t>
             </a:r>
             <a:endParaRPr lang="en-US" dirty="0"/>
           </a:p>
@@ -4782,7 +4784,7 @@
           <a:p>
             <a:r>
               <a:rPr lang="en-US" dirty="0"/>
-              <a:t>Let us play the bilingual game. I say a word in English, and you give me the French word. Then we do the reverse.</a:t>
+              <a:t>For your homework: Name the three courses of a river. We shall correct it at the beginning of our next lesson.</a:t>
             </a:r>
             <a:endParaRPr lang="en-US" dirty="0"/>
           </a:p>
@@ -4870,7 +4872,7 @@
           <a:p>
             <a:r>
               <a:rPr lang="en-US" dirty="0"/>
-              <a:t>I record this information in the official logbook of the class after the lesson.</a:t>
+              <a:t>Our next lesson will be on Lesson 15: River Action on its Long Profile. Thank you for your attention, and see you next time.</a:t>
             </a:r>
             <a:endParaRPr lang="en-US" dirty="0"/>
           </a:p>
@@ -4958,7 +4960,7 @@
           <a:p>
             <a:r>
               <a:rPr lang="en-US" dirty="0"/>
-              <a:t>I complete the second page of the logbook: the matter taught, the evaluation, the homework and the attendance.</a:t>
+              <a:t>Let us play the bilingual game. I say a word in English, and you give me the French word. Then we do the reverse.</a:t>
             </a:r>
             <a:endParaRPr lang="en-US" dirty="0"/>
           </a:p>
@@ -5046,7 +5048,7 @@
           <a:p>
             <a:r>
               <a:rPr lang="en-US" dirty="0"/>
-              <a:t>This slide is for me, the teacher: it gives the timing of the lesson and what to do if the projector is not available.</a:t>
+              <a:t>I record this information in the official logbook of the class after the lesson.</a:t>
             </a:r>
             <a:endParaRPr lang="en-US" dirty="0"/>
           </a:p>
@@ -5134,7 +5136,7 @@
           <a:p>
             <a:r>
               <a:rPr lang="en-US" dirty="0"/>
-              <a:t>These are the references and picture credits used to prepare this lesson.</a:t>
+              <a:t>I complete the second page of the logbook: the matter taught, the evaluation, the homework and the attendance.</a:t>
             </a:r>
             <a:endParaRPr lang="en-US" dirty="0"/>
           </a:p>
@@ -5158,6 +5160,182 @@
             <a:fld id="{F7021451-1387-4CA6-816F-3879F97B5CBC}" type="slidenum">
               <a:rPr lang="en-US"/>
               <a:t>57</a:t>
+            </a:fld>
+            <a:endParaRPr lang="en-US"/>
+          </a:p>
+        </p:txBody>
+      </p:sp>
+    </p:spTree>
+    <p:extLst>
+      <p:ext uri="{BB962C8B-B14F-4D97-AF65-F5344CB8AC3E}">
+        <p14:creationId xmlns:p14="http://schemas.microsoft.com/office/powerpoint/2010/main" val="1024086991"/>
+      </p:ext>
+    </p:extLst>
+  </p:cSld>
+  <p:clrMapOvr>
+    <a:masterClrMapping/>
+  </p:clrMapOvr>
+</p:notes>
+</file>
+
+<file path=ppt/notesSlides/notesSlide58.xml><?xml version="1.0" encoding="utf-8"?>
+<p:notes xmlns:a="http://schemas.openxmlformats.org/drawingml/2006/main" xmlns:r="http://schemas.openxmlformats.org/officeDocument/2006/relationships" xmlns:p="http://schemas.openxmlformats.org/presentationml/2006/main">
+  <p:cSld>
+    <p:spTree>
+      <p:nvGrpSpPr>
+        <p:cNvPr id="1" name=""/>
+        <p:cNvGrpSpPr/>
+        <p:nvPr/>
+      </p:nvGrpSpPr>
+      <p:grpSpPr>
+        <a:xfrm>
+          <a:off x="0" y="0"/>
+          <a:ext cx="0" cy="0"/>
+          <a:chOff x="0" y="0"/>
+          <a:chExt cx="0" cy="0"/>
+        </a:xfrm>
+      </p:grpSpPr>
+      <p:sp>
+        <p:nvSpPr>
+          <p:cNvPr id="2" name="Slide Image Placeholder 1"/>
+          <p:cNvSpPr>
+            <a:spLocks noGrp="1" noRot="1" noChangeAspect="1"/>
+          </p:cNvSpPr>
+          <p:nvPr>
+            <p:ph type="sldImg"/>
+          </p:nvPr>
+        </p:nvSpPr>
+        <p:spPr/>
+      </p:sp>
+      <p:sp>
+        <p:nvSpPr>
+          <p:cNvPr id="3" name="Notes Placeholder 2"/>
+          <p:cNvSpPr>
+            <a:spLocks noGrp="1"/>
+          </p:cNvSpPr>
+          <p:nvPr>
+            <p:ph type="body" idx="1"/>
+          </p:nvPr>
+        </p:nvSpPr>
+        <p:spPr/>
+        <p:txBody>
+          <a:bodyPr/>
+          <a:lstStyle/>
+          <a:p>
+            <a:r>
+              <a:rPr lang="en-US" dirty="0"/>
+              <a:t>This slide is for me, the teacher: it gives the timing of the lesson and what to do if the projector is not available.</a:t>
+            </a:r>
+            <a:endParaRPr lang="en-US" dirty="0"/>
+          </a:p>
+        </p:txBody>
+      </p:sp>
+      <p:sp>
+        <p:nvSpPr>
+          <p:cNvPr id="4" name="Slide Number Placeholder 3"/>
+          <p:cNvSpPr>
+            <a:spLocks noGrp="1"/>
+          </p:cNvSpPr>
+          <p:nvPr>
+            <p:ph type="sldNum" sz="quarter" idx="10"/>
+          </p:nvPr>
+        </p:nvSpPr>
+        <p:spPr/>
+        <p:txBody>
+          <a:bodyPr/>
+          <a:lstStyle/>
+          <a:p>
+            <a:fld id="{F7021451-1387-4CA6-816F-3879F97B5CBC}" type="slidenum">
+              <a:rPr lang="en-US"/>
+              <a:t>58</a:t>
+            </a:fld>
+            <a:endParaRPr lang="en-US"/>
+          </a:p>
+        </p:txBody>
+      </p:sp>
+    </p:spTree>
+    <p:extLst>
+      <p:ext uri="{BB962C8B-B14F-4D97-AF65-F5344CB8AC3E}">
+        <p14:creationId xmlns:p14="http://schemas.microsoft.com/office/powerpoint/2010/main" val="1024086991"/>
+      </p:ext>
+    </p:extLst>
+  </p:cSld>
+  <p:clrMapOvr>
+    <a:masterClrMapping/>
+  </p:clrMapOvr>
+</p:notes>
+</file>
+
+<file path=ppt/notesSlides/notesSlide59.xml><?xml version="1.0" encoding="utf-8"?>
+<p:notes xmlns:a="http://schemas.openxmlformats.org/drawingml/2006/main" xmlns:r="http://schemas.openxmlformats.org/officeDocument/2006/relationships" xmlns:p="http://schemas.openxmlformats.org/presentationml/2006/main">
+  <p:cSld>
+    <p:spTree>
+      <p:nvGrpSpPr>
+        <p:cNvPr id="1" name=""/>
+        <p:cNvGrpSpPr/>
+        <p:nvPr/>
+      </p:nvGrpSpPr>
+      <p:grpSpPr>
+        <a:xfrm>
+          <a:off x="0" y="0"/>
+          <a:ext cx="0" cy="0"/>
+          <a:chOff x="0" y="0"/>
+          <a:chExt cx="0" cy="0"/>
+        </a:xfrm>
+      </p:grpSpPr>
+      <p:sp>
+        <p:nvSpPr>
+          <p:cNvPr id="2" name="Slide Image Placeholder 1"/>
+          <p:cNvSpPr>
+            <a:spLocks noGrp="1" noRot="1" noChangeAspect="1"/>
+          </p:cNvSpPr>
+          <p:nvPr>
+            <p:ph type="sldImg"/>
+          </p:nvPr>
+        </p:nvSpPr>
+        <p:spPr/>
+      </p:sp>
+      <p:sp>
+        <p:nvSpPr>
+          <p:cNvPr id="3" name="Notes Placeholder 2"/>
+          <p:cNvSpPr>
+            <a:spLocks noGrp="1"/>
+          </p:cNvSpPr>
+          <p:nvPr>
+            <p:ph type="body" idx="1"/>
+          </p:nvPr>
+        </p:nvSpPr>
+        <p:spPr/>
+        <p:txBody>
+          <a:bodyPr/>
+          <a:lstStyle/>
+          <a:p>
+            <a:r>
+              <a:rPr lang="en-US" dirty="0"/>
+              <a:t>These are the references and picture credits used to prepare this lesson.</a:t>
+            </a:r>
+            <a:endParaRPr lang="en-US" dirty="0"/>
+          </a:p>
+        </p:txBody>
+      </p:sp>
+      <p:sp>
+        <p:nvSpPr>
+          <p:cNvPr id="4" name="Slide Number Placeholder 3"/>
+          <p:cNvSpPr>
+            <a:spLocks noGrp="1"/>
+          </p:cNvSpPr>
+          <p:nvPr>
+            <p:ph type="sldNum" sz="quarter" idx="10"/>
+          </p:nvPr>
+        </p:nvSpPr>
+        <p:spPr/>
+        <p:txBody>
+          <a:bodyPr/>
+          <a:lstStyle/>
+          <a:p>
+            <a:fld id="{F7021451-1387-4CA6-816F-3879F97B5CBC}" type="slidenum">
+              <a:rPr lang="en-US"/>
+              <a:t>59</a:t>
             </a:fld>
             <a:endParaRPr lang="en-US"/>
           </a:p>
@@ -5310,7 +5488,7 @@
           <a:p>
             <a:r>
               <a:rPr lang="en-US" dirty="0"/>
-              <a:t>By the end of this lesson, you should be able to do three things. Number 1: explain the processes of river erosion. Number 2: describe how rivers carry their load. Number 3: interpret the Hjulström graph and describe the river as a system.</a:t>
+              <a:t>Take your time to copy this part; we will continue together.</a:t>
             </a:r>
             <a:endParaRPr lang="en-US" dirty="0"/>
           </a:p>
@@ -5398,7 +5576,7 @@
           <a:p>
             <a:r>
               <a:rPr lang="en-US" dirty="0"/>
-              <a:t>Let us first remember what you already know. Denudation includes erosion, transport and deposition. Running water is the main agent of erosion. Keep this in mind, because we shall build on it today.</a:t>
+              <a:t>By the end of this lesson, you should be able to do four things. Number 1: describe the river as an open system. Number 2: explain the four processes of river erosion. Number 3: explain the four methods of transportation. Number 4: explain why and where a river deposits its load.</a:t>
             </a:r>
             <a:endParaRPr lang="en-US" dirty="0"/>
           </a:p>
@@ -5486,7 +5664,7 @@
           <a:p>
             <a:r>
               <a:rPr lang="en-US" dirty="0"/>
-              <a:t>Listen carefully to this situation from real life. In August, the Benue at Garoua is brown and fast and carries mud, sand and branches. In March, the water is clear and slow, and sandbanks appear. Think about it, because I am going to ask you some questions.</a:t>
+              <a:t>Let us first remember what you already know. Erosion removes weathered material. The Benue flows past Garoua. The Benue has sandbanks in the dry season. Keep this in mind, because we shall build on it today.</a:t>
             </a:r>
             <a:endParaRPr lang="en-US" dirty="0"/>
           </a:p>
@@ -6908,7 +7086,7 @@
                 <a:ea typeface="Times New Roman" pitchFamily="34" charset="-122"/>
                 <a:cs typeface="Times New Roman" pitchFamily="34" charset="-120"/>
               </a:rPr>
-              <a:t>Situation: Question 1</a:t>
+              <a:t>Situation in Real Life</a:t>
             </a:r>
             <a:endParaRPr lang="en-US" sz="3600" dirty="0"/>
           </a:p>
@@ -6950,7 +7128,7 @@
                 <a:ea typeface="Times New Roman" pitchFamily="34" charset="-122"/>
                 <a:cs typeface="Times New Roman" pitchFamily="34" charset="-120"/>
               </a:rPr>
-              <a:t>What is the problem in the situation?</a:t>
+              <a:t>In the rainy season, you stand on the bridge of Garoua and look at the Benue: it is wide, fast and brown, carrying soil, branches and debris.</a:t>
             </a:r>
             <a:endParaRPr lang="en-US" sz="4000" dirty="0"/>
           </a:p>
@@ -7085,7 +7263,7 @@
         <p:spPr>
           <a:xfrm>
             <a:off x="0" y="658368"/>
-            <a:ext cx="5120640" cy="5833872"/>
+            <a:ext cx="3840480" cy="5833872"/>
           </a:xfrm>
           <a:prstGeom prst="rect">
             <a:avLst/>
@@ -7100,8 +7278,8 @@
         </p:nvSpPr>
         <p:spPr>
           <a:xfrm>
-            <a:off x="5349240" y="1005840"/>
-            <a:ext cx="6522415" cy="731520"/>
+            <a:off x="4069080" y="1005840"/>
+            <a:ext cx="7802575" cy="731520"/>
           </a:xfrm>
           <a:prstGeom prst="rect">
             <a:avLst/>
@@ -7127,7 +7305,7 @@
                 <a:ea typeface="Times New Roman" pitchFamily="34" charset="-122"/>
                 <a:cs typeface="Times New Roman" pitchFamily="34" charset="-120"/>
               </a:rPr>
-              <a:t>Answer</a:t>
+              <a:t>Situation in Real Life (continued)</a:t>
             </a:r>
             <a:endParaRPr lang="en-US" sz="3600" dirty="0"/>
           </a:p>
@@ -7141,8 +7319,8 @@
         </p:nvSpPr>
         <p:spPr>
           <a:xfrm>
-            <a:off x="5349240" y="1783080"/>
-            <a:ext cx="6522415" cy="4663440"/>
+            <a:off x="4069080" y="1783080"/>
+            <a:ext cx="7802575" cy="4663440"/>
           </a:xfrm>
           <a:prstGeom prst="rect">
             <a:avLst/>
@@ -7169,7 +7347,27 @@
                 <a:ea typeface="Times New Roman" pitchFamily="34" charset="-122"/>
                 <a:cs typeface="Times New Roman" pitchFamily="34" charset="-120"/>
               </a:rPr>
-              <a:t>We want to know why the river carries more in August.</a:t>
+              <a:t>In the dry season, from the same place, the river is low, slow and clearer, and huge sandbanks appear where deep water flowed before.</a:t>
+            </a:r>
+            <a:endParaRPr lang="en-US" sz="4000" dirty="0"/>
+          </a:p>
+          <a:p>
+            <a:pPr algn="l" indent="0" marL="0">
+              <a:spcAft>
+                <a:spcPts val="800"/>
+              </a:spcAft>
+              <a:buNone/>
+            </a:pPr>
+            <a:r>
+              <a:rPr lang="en-US" sz="4000" dirty="0">
+                <a:solidFill>
+                  <a:srgbClr val="111111"/>
+                </a:solidFill>
+                <a:latin typeface="Times New Roman" pitchFamily="34" charset="0"/>
+                <a:ea typeface="Times New Roman" pitchFamily="34" charset="-122"/>
+                <a:cs typeface="Times New Roman" pitchFamily="34" charset="-120"/>
+              </a:rPr>
+              <a:t>You ask: "Where did all the brown mud go, and where did this new sand come from?"</a:t>
             </a:r>
             <a:endParaRPr lang="en-US" sz="4000" dirty="0"/>
           </a:p>
@@ -7346,7 +7544,7 @@
                 <a:ea typeface="Times New Roman" pitchFamily="34" charset="-122"/>
                 <a:cs typeface="Times New Roman" pitchFamily="34" charset="-120"/>
               </a:rPr>
-              <a:t>Situation: Question 2</a:t>
+              <a:t>Situation: Question 1</a:t>
             </a:r>
             <a:endParaRPr lang="en-US" sz="3600" dirty="0"/>
           </a:p>
@@ -7388,7 +7586,7 @@
                 <a:ea typeface="Times New Roman" pitchFamily="34" charset="-122"/>
                 <a:cs typeface="Times New Roman" pitchFamily="34" charset="-120"/>
               </a:rPr>
-              <a:t>What does the river carry?</a:t>
+              <a:t>What is the problem in the situation?</a:t>
             </a:r>
             <a:endParaRPr lang="en-US" sz="4000" dirty="0"/>
           </a:p>
@@ -7607,7 +7805,7 @@
                 <a:ea typeface="Times New Roman" pitchFamily="34" charset="-122"/>
                 <a:cs typeface="Times New Roman" pitchFamily="34" charset="-120"/>
               </a:rPr>
-              <a:t>Mud, sand and branches (its load).</a:t>
+              <a:t>The learner does not know how a river erodes, carries and deposits material.</a:t>
             </a:r>
             <a:endParaRPr lang="en-US" sz="4000" dirty="0"/>
           </a:p>
@@ -7784,7 +7982,7 @@
                 <a:ea typeface="Times New Roman" pitchFamily="34" charset="-122"/>
                 <a:cs typeface="Times New Roman" pitchFamily="34" charset="-120"/>
               </a:rPr>
-              <a:t>Situation: Question 3</a:t>
+              <a:t>Situation: Question 2</a:t>
             </a:r>
             <a:endParaRPr lang="en-US" sz="3600" dirty="0"/>
           </a:p>
@@ -7826,7 +8024,7 @@
                 <a:ea typeface="Times New Roman" pitchFamily="34" charset="-122"/>
                 <a:cs typeface="Times New Roman" pitchFamily="34" charset="-120"/>
               </a:rPr>
-              <a:t>Why are there sandbanks in March?</a:t>
+              <a:t>What is the river doing in the rainy season?</a:t>
             </a:r>
             <a:endParaRPr lang="en-US" sz="4000" dirty="0"/>
           </a:p>
@@ -8003,7 +8201,7 @@
                 <a:ea typeface="Times New Roman" pitchFamily="34" charset="-122"/>
                 <a:cs typeface="Times New Roman" pitchFamily="34" charset="-120"/>
               </a:rPr>
-              <a:t>Possible Answer</a:t>
+              <a:t>Answer</a:t>
             </a:r>
             <a:endParaRPr lang="en-US" sz="3600" dirty="0"/>
           </a:p>
@@ -8045,7 +8243,7 @@
                 <a:ea typeface="Times New Roman" pitchFamily="34" charset="-122"/>
                 <a:cs typeface="Times New Roman" pitchFamily="34" charset="-120"/>
               </a:rPr>
-              <a:t>The slow water drops its load.</a:t>
+              <a:t>Eroding its banks and transporting a large load.</a:t>
             </a:r>
             <a:endParaRPr lang="en-US" sz="4000" dirty="0"/>
           </a:p>
@@ -8157,7 +8355,7 @@
                 <a:ea typeface="Calibri" pitchFamily="34" charset="-122"/>
                 <a:cs typeface="Calibri" pitchFamily="34" charset="-120"/>
               </a:rPr>
-              <a:t>ACTION TO TAKE</a:t>
+              <a:t>REAL-LIFE SITUATION</a:t>
             </a:r>
             <a:endParaRPr lang="en-US" sz="1400" dirty="0"/>
           </a:p>
@@ -8222,7 +8420,7 @@
                 <a:ea typeface="Times New Roman" pitchFamily="34" charset="-122"/>
                 <a:cs typeface="Times New Roman" pitchFamily="34" charset="-120"/>
               </a:rPr>
-              <a:t>Action to Take</a:t>
+              <a:t>Situation: Question 3</a:t>
             </a:r>
             <a:endParaRPr lang="en-US" sz="3600" dirty="0"/>
           </a:p>
@@ -8264,7 +8462,7 @@
                 <a:ea typeface="Times New Roman" pitchFamily="34" charset="-122"/>
                 <a:cs typeface="Times New Roman" pitchFamily="34" charset="-120"/>
               </a:rPr>
-              <a:t>Understand river processes to manage rivers and prevent erosion and floods.</a:t>
+              <a:t>Why do sandbanks appear in the dry season?</a:t>
             </a:r>
             <a:endParaRPr lang="en-US" sz="4000" dirty="0"/>
           </a:p>
@@ -8376,7 +8574,7 @@
                 <a:ea typeface="Calibri" pitchFamily="34" charset="-122"/>
                 <a:cs typeface="Calibri" pitchFamily="34" charset="-120"/>
               </a:rPr>
-              <a:t>JUSTIFICATION</a:t>
+              <a:t>REAL-LIFE SITUATION</a:t>
             </a:r>
             <a:endParaRPr lang="en-US" sz="1400" dirty="0"/>
           </a:p>
@@ -8441,7 +8639,7 @@
                 <a:ea typeface="Times New Roman" pitchFamily="34" charset="-122"/>
                 <a:cs typeface="Times New Roman" pitchFamily="34" charset="-120"/>
               </a:rPr>
-              <a:t>Justification of the Lesson</a:t>
+              <a:t>Possible Answer</a:t>
             </a:r>
             <a:endParaRPr lang="en-US" sz="3600" dirty="0"/>
           </a:p>
@@ -8483,7 +8681,7 @@
                 <a:ea typeface="Times New Roman" pitchFamily="34" charset="-122"/>
                 <a:cs typeface="Times New Roman" pitchFamily="34" charset="-120"/>
               </a:rPr>
-              <a:t>This lesson helps us to understand the work of rivers.</a:t>
+              <a:t>The river slows down, loses energy and deposits its load.</a:t>
             </a:r>
             <a:endParaRPr lang="en-US" sz="4000" dirty="0"/>
           </a:p>
@@ -8595,54 +8793,15 @@
                 <a:ea typeface="Calibri" pitchFamily="34" charset="-122"/>
                 <a:cs typeface="Calibri" pitchFamily="34" charset="-120"/>
               </a:rPr>
-              <a:t>1. EROSIONAL PROCESSES</a:t>
+              <a:t>ACTION TO TAKE</a:t>
             </a:r>
             <a:endParaRPr lang="en-US" sz="1400" dirty="0"/>
-          </a:p>
-        </p:txBody>
-      </p:sp>
-      <p:sp>
-        <p:nvSpPr>
-          <p:cNvPr id="3" name="Text 1"/>
-          <p:cNvSpPr/>
-          <p:nvPr/>
-        </p:nvSpPr>
-        <p:spPr>
-          <a:xfrm>
-            <a:off x="457200" y="1005840"/>
-            <a:ext cx="11277295" cy="731520"/>
-          </a:xfrm>
-          <a:prstGeom prst="rect">
-            <a:avLst/>
-          </a:prstGeom>
-          <a:noFill/>
-          <a:ln/>
-        </p:spPr>
-        <p:txBody>
-          <a:bodyPr wrap="square" lIns="0" tIns="0" rIns="0" bIns="0" rtlCol="0" anchor="ctr"/>
-          <a:lstStyle/>
-          <a:p>
-            <a:pPr algn="ctr" indent="0" marL="0">
-              <a:buNone/>
-            </a:pPr>
-            <a:r>
-              <a:rPr lang="en-US" sz="3600" b="1" dirty="0">
-                <a:solidFill>
-                  <a:srgbClr val="990011"/>
-                </a:solidFill>
-                <a:latin typeface="Times New Roman" pitchFamily="34" charset="0"/>
-                <a:ea typeface="Times New Roman" pitchFamily="34" charset="-122"/>
-                <a:cs typeface="Times New Roman" pitchFamily="34" charset="-120"/>
-              </a:rPr>
-              <a:t>Activity 1</a:t>
-            </a:r>
-            <a:endParaRPr lang="en-US" sz="3600" dirty="0"/>
           </a:p>
         </p:txBody>
       </p:sp>
       <p:pic>
         <p:nvPicPr>
-          <p:cNvPr id="4" name="Image 0" descr="/home/claude/f4/img/v2/river_erosion_big.png">    </p:cNvPr>
+          <p:cNvPr id="3" name="Image 0" descr="/home/claude/f4/img/minesec_sheet.png">    </p:cNvPr>
           <p:cNvPicPr>
             <a:picLocks noChangeAspect="1"/>
           </p:cNvPicPr>
@@ -8656,8 +8815,8 @@
         </p:blipFill>
         <p:spPr>
           <a:xfrm>
-            <a:off x="629930" y="1783080"/>
-            <a:ext cx="10931835" cy="4270248"/>
+            <a:off x="0" y="658368"/>
+            <a:ext cx="5120640" cy="5833872"/>
           </a:xfrm>
           <a:prstGeom prst="rect">
             <a:avLst/>
@@ -8666,14 +8825,14 @@
       </p:pic>
       <p:sp>
         <p:nvSpPr>
-          <p:cNvPr id="5" name="Text 2"/>
+          <p:cNvPr id="4" name="Text 1"/>
           <p:cNvSpPr/>
           <p:nvPr/>
         </p:nvSpPr>
         <p:spPr>
           <a:xfrm>
-            <a:off x="457200" y="6089904"/>
-            <a:ext cx="11277295" cy="347472"/>
+            <a:off x="5349240" y="1005840"/>
+            <a:ext cx="6522415" cy="731520"/>
           </a:xfrm>
           <a:prstGeom prst="rect">
             <a:avLst/>
@@ -8682,24 +8841,68 @@
           <a:ln/>
         </p:spPr>
         <p:txBody>
-          <a:bodyPr wrap="square" lIns="0" tIns="0" rIns="0" bIns="0" rtlCol="0" anchor="ctr"/>
+          <a:bodyPr wrap="square" lIns="0" tIns="0" rIns="0" bIns="0" rtlCol="0" anchor="ctr">
+            <a:normAutofit/>
+          </a:bodyPr>
           <a:lstStyle/>
           <a:p>
             <a:pPr algn="ctr" indent="0" marL="0">
               <a:buNone/>
             </a:pPr>
             <a:r>
-              <a:rPr lang="en-US" sz="1800" i="1" dirty="0">
-                <a:solidFill>
-                  <a:srgbClr val="555555"/>
+              <a:rPr lang="en-US" sz="3600" b="1" dirty="0">
+                <a:solidFill>
+                  <a:srgbClr val="990011"/>
                 </a:solidFill>
                 <a:latin typeface="Times New Roman" pitchFamily="34" charset="0"/>
                 <a:ea typeface="Times New Roman" pitchFamily="34" charset="-122"/>
                 <a:cs typeface="Times New Roman" pitchFamily="34" charset="-120"/>
               </a:rPr>
-              <a:t>The four processes of river erosion.</a:t>
-            </a:r>
-            <a:endParaRPr lang="en-US" sz="1800" dirty="0"/>
+              <a:t>Action to Take</a:t>
+            </a:r>
+            <a:endParaRPr lang="en-US" sz="3600" dirty="0"/>
+          </a:p>
+        </p:txBody>
+      </p:sp>
+      <p:sp>
+        <p:nvSpPr>
+          <p:cNvPr id="5" name="Text 2"/>
+          <p:cNvSpPr/>
+          <p:nvPr/>
+        </p:nvSpPr>
+        <p:spPr>
+          <a:xfrm>
+            <a:off x="5349240" y="1783080"/>
+            <a:ext cx="6522415" cy="4663440"/>
+          </a:xfrm>
+          <a:prstGeom prst="rect">
+            <a:avLst/>
+          </a:prstGeom>
+          <a:noFill/>
+          <a:ln/>
+        </p:spPr>
+        <p:txBody>
+          <a:bodyPr wrap="square" lIns="0" tIns="0" rIns="0" bIns="0" rtlCol="0" anchor="t"/>
+          <a:lstStyle/>
+          <a:p>
+            <a:pPr algn="l" indent="0" marL="0">
+              <a:spcAft>
+                <a:spcPts val="800"/>
+              </a:spcAft>
+              <a:buNone/>
+            </a:pPr>
+            <a:r>
+              <a:rPr lang="en-US" sz="4000" dirty="0">
+                <a:solidFill>
+                  <a:srgbClr val="111111"/>
+                </a:solidFill>
+                <a:latin typeface="Times New Roman" pitchFamily="34" charset="0"/>
+                <a:ea typeface="Times New Roman" pitchFamily="34" charset="-122"/>
+                <a:cs typeface="Times New Roman" pitchFamily="34" charset="-120"/>
+              </a:rPr>
+              <a:t>Protect river banks with vegetation and avoid building on unstable banks.</a:t>
+            </a:r>
+            <a:endParaRPr lang="en-US" sz="4000" dirty="0"/>
           </a:p>
         </p:txBody>
       </p:sp>
@@ -8809,7 +9012,7 @@
                 <a:ea typeface="Calibri" pitchFamily="34" charset="-122"/>
                 <a:cs typeface="Calibri" pitchFamily="34" charset="-120"/>
               </a:rPr>
-              <a:t>1. EROSIONAL PROCESSES</a:t>
+              <a:t>JUSTIFICATION</a:t>
             </a:r>
             <a:endParaRPr lang="en-US" sz="1400" dirty="0"/>
           </a:p>
@@ -8874,7 +9077,7 @@
                 <a:ea typeface="Times New Roman" pitchFamily="34" charset="-122"/>
                 <a:cs typeface="Times New Roman" pitchFamily="34" charset="-120"/>
               </a:rPr>
-              <a:t>Activity 1: Question</a:t>
+              <a:t>Justification of the Lesson</a:t>
             </a:r>
             <a:endParaRPr lang="en-US" sz="3600" dirty="0"/>
           </a:p>
@@ -8916,7 +9119,7 @@
                 <a:ea typeface="Times New Roman" pitchFamily="34" charset="-122"/>
                 <a:cs typeface="Times New Roman" pitchFamily="34" charset="-120"/>
               </a:rPr>
-              <a:t>Name the four processes of river erosion.</a:t>
+              <a:t>This lesson helps us to understand the changing channel of the Benue, which affects farming, fishing and navigation.</a:t>
             </a:r>
             <a:endParaRPr lang="en-US" sz="4000" dirty="0"/>
           </a:p>
@@ -9623,15 +9826,54 @@
                 <a:ea typeface="Calibri" pitchFamily="34" charset="-122"/>
                 <a:cs typeface="Calibri" pitchFamily="34" charset="-120"/>
               </a:rPr>
-              <a:t>1. EROSIONAL PROCESSES</a:t>
+              <a:t>1. RIVER SYSTEM</a:t>
             </a:r>
             <a:endParaRPr lang="en-US" sz="1400" dirty="0"/>
+          </a:p>
+        </p:txBody>
+      </p:sp>
+      <p:sp>
+        <p:nvSpPr>
+          <p:cNvPr id="3" name="Text 1"/>
+          <p:cNvSpPr/>
+          <p:nvPr/>
+        </p:nvSpPr>
+        <p:spPr>
+          <a:xfrm>
+            <a:off x="457200" y="1005840"/>
+            <a:ext cx="11277295" cy="731520"/>
+          </a:xfrm>
+          <a:prstGeom prst="rect">
+            <a:avLst/>
+          </a:prstGeom>
+          <a:noFill/>
+          <a:ln/>
+        </p:spPr>
+        <p:txBody>
+          <a:bodyPr wrap="square" lIns="0" tIns="0" rIns="0" bIns="0" rtlCol="0" anchor="ctr"/>
+          <a:lstStyle/>
+          <a:p>
+            <a:pPr algn="ctr" indent="0" marL="0">
+              <a:buNone/>
+            </a:pPr>
+            <a:r>
+              <a:rPr lang="en-US" sz="3600" b="1" dirty="0">
+                <a:solidFill>
+                  <a:srgbClr val="990011"/>
+                </a:solidFill>
+                <a:latin typeface="Times New Roman" pitchFamily="34" charset="0"/>
+                <a:ea typeface="Times New Roman" pitchFamily="34" charset="-122"/>
+                <a:cs typeface="Times New Roman" pitchFamily="34" charset="-120"/>
+              </a:rPr>
+              <a:t>Activity 1</a:t>
+            </a:r>
+            <a:endParaRPr lang="en-US" sz="3600" dirty="0"/>
           </a:p>
         </p:txBody>
       </p:sp>
       <p:pic>
         <p:nvPicPr>
-          <p:cNvPr id="3" name="Image 0" descr="/home/claude/f4/img/minesec_sheet.png">    </p:cNvPr>
+          <p:cNvPr id="4" name="Image 0" descr="/home/claude/f4/img/v2/open_system_big.png">    </p:cNvPr>
           <p:cNvPicPr>
             <a:picLocks noChangeAspect="1"/>
           </p:cNvPicPr>
@@ -9645,8 +9887,8 @@
         </p:blipFill>
         <p:spPr>
           <a:xfrm>
-            <a:off x="0" y="658368"/>
-            <a:ext cx="5120640" cy="5833872"/>
+            <a:off x="629930" y="1783080"/>
+            <a:ext cx="10931835" cy="4270248"/>
           </a:xfrm>
           <a:prstGeom prst="rect">
             <a:avLst/>
@@ -9655,14 +9897,14 @@
       </p:pic>
       <p:sp>
         <p:nvSpPr>
-          <p:cNvPr id="4" name="Text 1"/>
+          <p:cNvPr id="5" name="Text 2"/>
           <p:cNvSpPr/>
           <p:nvPr/>
         </p:nvSpPr>
         <p:spPr>
           <a:xfrm>
-            <a:off x="5349240" y="1005840"/>
-            <a:ext cx="6522415" cy="731520"/>
+            <a:off x="457200" y="6089904"/>
+            <a:ext cx="11277295" cy="347472"/>
           </a:xfrm>
           <a:prstGeom prst="rect">
             <a:avLst/>
@@ -9671,68 +9913,24 @@
           <a:ln/>
         </p:spPr>
         <p:txBody>
-          <a:bodyPr wrap="square" lIns="0" tIns="0" rIns="0" bIns="0" rtlCol="0" anchor="ctr">
-            <a:normAutofit/>
-          </a:bodyPr>
+          <a:bodyPr wrap="square" lIns="0" tIns="0" rIns="0" bIns="0" rtlCol="0" anchor="ctr"/>
           <a:lstStyle/>
           <a:p>
             <a:pPr algn="ctr" indent="0" marL="0">
               <a:buNone/>
             </a:pPr>
             <a:r>
-              <a:rPr lang="en-US" sz="3600" b="1" dirty="0">
-                <a:solidFill>
-                  <a:srgbClr val="990011"/>
+              <a:rPr lang="en-US" sz="1800" i="1" dirty="0">
+                <a:solidFill>
+                  <a:srgbClr val="555555"/>
                 </a:solidFill>
                 <a:latin typeface="Times New Roman" pitchFamily="34" charset="0"/>
                 <a:ea typeface="Times New Roman" pitchFamily="34" charset="-122"/>
                 <a:cs typeface="Times New Roman" pitchFamily="34" charset="-120"/>
               </a:rPr>
-              <a:t>Activity 1: Answer</a:t>
-            </a:r>
-            <a:endParaRPr lang="en-US" sz="3600" dirty="0"/>
-          </a:p>
-        </p:txBody>
-      </p:sp>
-      <p:sp>
-        <p:nvSpPr>
-          <p:cNvPr id="5" name="Text 2"/>
-          <p:cNvSpPr/>
-          <p:nvPr/>
-        </p:nvSpPr>
-        <p:spPr>
-          <a:xfrm>
-            <a:off x="5349240" y="1783080"/>
-            <a:ext cx="6522415" cy="4663440"/>
-          </a:xfrm>
-          <a:prstGeom prst="rect">
-            <a:avLst/>
-          </a:prstGeom>
-          <a:noFill/>
-          <a:ln/>
-        </p:spPr>
-        <p:txBody>
-          <a:bodyPr wrap="square" lIns="0" tIns="0" rIns="0" bIns="0" rtlCol="0" anchor="t"/>
-          <a:lstStyle/>
-          <a:p>
-            <a:pPr algn="l" indent="0" marL="0">
-              <a:spcAft>
-                <a:spcPts val="800"/>
-              </a:spcAft>
-              <a:buNone/>
-            </a:pPr>
-            <a:r>
-              <a:rPr lang="en-US" sz="4000" dirty="0">
-                <a:solidFill>
-                  <a:srgbClr val="111111"/>
-                </a:solidFill>
-                <a:latin typeface="Times New Roman" pitchFamily="34" charset="0"/>
-                <a:ea typeface="Times New Roman" pitchFamily="34" charset="-122"/>
-                <a:cs typeface="Times New Roman" pitchFamily="34" charset="-120"/>
-              </a:rPr>
-              <a:t>Hydraulic action, abrasion, attrition and solution.</a:t>
-            </a:r>
-            <a:endParaRPr lang="en-US" sz="4000" dirty="0"/>
+              <a:t>An open system.</a:t>
+            </a:r>
+            <a:endParaRPr lang="en-US" sz="1800" dirty="0"/>
           </a:p>
         </p:txBody>
       </p:sp>
@@ -9842,54 +10040,15 @@
                 <a:ea typeface="Calibri" pitchFamily="34" charset="-122"/>
                 <a:cs typeface="Calibri" pitchFamily="34" charset="-120"/>
               </a:rPr>
-              <a:t>2. PROCESSES OF TRANSPORTATION</a:t>
+              <a:t>1. RIVER SYSTEM</a:t>
             </a:r>
             <a:endParaRPr lang="en-US" sz="1400" dirty="0"/>
-          </a:p>
-        </p:txBody>
-      </p:sp>
-      <p:sp>
-        <p:nvSpPr>
-          <p:cNvPr id="3" name="Text 1"/>
-          <p:cNvSpPr/>
-          <p:nvPr/>
-        </p:nvSpPr>
-        <p:spPr>
-          <a:xfrm>
-            <a:off x="457200" y="1005840"/>
-            <a:ext cx="11277295" cy="731520"/>
-          </a:xfrm>
-          <a:prstGeom prst="rect">
-            <a:avLst/>
-          </a:prstGeom>
-          <a:noFill/>
-          <a:ln/>
-        </p:spPr>
-        <p:txBody>
-          <a:bodyPr wrap="square" lIns="0" tIns="0" rIns="0" bIns="0" rtlCol="0" anchor="ctr"/>
-          <a:lstStyle/>
-          <a:p>
-            <a:pPr algn="ctr" indent="0" marL="0">
-              <a:buNone/>
-            </a:pPr>
-            <a:r>
-              <a:rPr lang="en-US" sz="3600" b="1" dirty="0">
-                <a:solidFill>
-                  <a:srgbClr val="990011"/>
-                </a:solidFill>
-                <a:latin typeface="Times New Roman" pitchFamily="34" charset="0"/>
-                <a:ea typeface="Times New Roman" pitchFamily="34" charset="-122"/>
-                <a:cs typeface="Times New Roman" pitchFamily="34" charset="-120"/>
-              </a:rPr>
-              <a:t>Activity 2</a:t>
-            </a:r>
-            <a:endParaRPr lang="en-US" sz="3600" dirty="0"/>
           </a:p>
         </p:txBody>
       </p:sp>
       <p:pic>
         <p:nvPicPr>
-          <p:cNvPr id="4" name="Image 0" descr="/home/claude/f4/img/v2/load.gif">    </p:cNvPr>
+          <p:cNvPr id="3" name="Image 0" descr="/home/claude/f4/img/minesec_sheet.png">    </p:cNvPr>
           <p:cNvPicPr>
             <a:picLocks noChangeAspect="1"/>
           </p:cNvPicPr>
@@ -9903,8 +10062,8 @@
         </p:blipFill>
         <p:spPr>
           <a:xfrm>
-            <a:off x="629930" y="1783080"/>
-            <a:ext cx="10931835" cy="4270248"/>
+            <a:off x="0" y="658368"/>
+            <a:ext cx="5120640" cy="5833872"/>
           </a:xfrm>
           <a:prstGeom prst="rect">
             <a:avLst/>
@@ -9913,14 +10072,14 @@
       </p:pic>
       <p:sp>
         <p:nvSpPr>
-          <p:cNvPr id="5" name="Text 2"/>
+          <p:cNvPr id="4" name="Text 1"/>
           <p:cNvSpPr/>
           <p:nvPr/>
         </p:nvSpPr>
         <p:spPr>
           <a:xfrm>
-            <a:off x="457200" y="6089904"/>
-            <a:ext cx="11277295" cy="347472"/>
+            <a:off x="5349240" y="1005840"/>
+            <a:ext cx="6522415" cy="731520"/>
           </a:xfrm>
           <a:prstGeom prst="rect">
             <a:avLst/>
@@ -9929,24 +10088,68 @@
           <a:ln/>
         </p:spPr>
         <p:txBody>
-          <a:bodyPr wrap="square" lIns="0" tIns="0" rIns="0" bIns="0" rtlCol="0" anchor="ctr"/>
+          <a:bodyPr wrap="square" lIns="0" tIns="0" rIns="0" bIns="0" rtlCol="0" anchor="ctr">
+            <a:normAutofit/>
+          </a:bodyPr>
           <a:lstStyle/>
           <a:p>
             <a:pPr algn="ctr" indent="0" marL="0">
               <a:buNone/>
             </a:pPr>
             <a:r>
-              <a:rPr lang="en-US" sz="1800" i="1" dirty="0">
-                <a:solidFill>
-                  <a:srgbClr val="555555"/>
+              <a:rPr lang="en-US" sz="3600" b="1" dirty="0">
+                <a:solidFill>
+                  <a:srgbClr val="990011"/>
                 </a:solidFill>
                 <a:latin typeface="Times New Roman" pitchFamily="34" charset="0"/>
                 <a:ea typeface="Times New Roman" pitchFamily="34" charset="-122"/>
                 <a:cs typeface="Times New Roman" pitchFamily="34" charset="-120"/>
               </a:rPr>
-              <a:t>Animation: how a river carries its load.</a:t>
-            </a:r>
-            <a:endParaRPr lang="en-US" sz="1800" dirty="0"/>
+              <a:t>Activity 1: Question</a:t>
+            </a:r>
+            <a:endParaRPr lang="en-US" sz="3600" dirty="0"/>
+          </a:p>
+        </p:txBody>
+      </p:sp>
+      <p:sp>
+        <p:nvSpPr>
+          <p:cNvPr id="5" name="Text 2"/>
+          <p:cNvSpPr/>
+          <p:nvPr/>
+        </p:nvSpPr>
+        <p:spPr>
+          <a:xfrm>
+            <a:off x="5349240" y="1783080"/>
+            <a:ext cx="6522415" cy="4663440"/>
+          </a:xfrm>
+          <a:prstGeom prst="rect">
+            <a:avLst/>
+          </a:prstGeom>
+          <a:noFill/>
+          <a:ln/>
+        </p:spPr>
+        <p:txBody>
+          <a:bodyPr wrap="square" lIns="0" tIns="0" rIns="0" bIns="0" rtlCol="0" anchor="t"/>
+          <a:lstStyle/>
+          <a:p>
+            <a:pPr algn="l" indent="0" marL="0">
+              <a:spcAft>
+                <a:spcPts val="800"/>
+              </a:spcAft>
+              <a:buNone/>
+            </a:pPr>
+            <a:r>
+              <a:rPr lang="en-US" sz="4000" dirty="0">
+                <a:solidFill>
+                  <a:srgbClr val="111111"/>
+                </a:solidFill>
+                <a:latin typeface="Times New Roman" pitchFamily="34" charset="0"/>
+                <a:ea typeface="Times New Roman" pitchFamily="34" charset="-122"/>
+                <a:cs typeface="Times New Roman" pitchFamily="34" charset="-120"/>
+              </a:rPr>
+              <a:t>Give one input of a river system.</a:t>
+            </a:r>
+            <a:endParaRPr lang="en-US" sz="4000" dirty="0"/>
           </a:p>
         </p:txBody>
       </p:sp>
@@ -10056,7 +10259,7 @@
                 <a:ea typeface="Calibri" pitchFamily="34" charset="-122"/>
                 <a:cs typeface="Calibri" pitchFamily="34" charset="-120"/>
               </a:rPr>
-              <a:t>2. PROCESSES OF TRANSPORTATION</a:t>
+              <a:t>1. RIVER SYSTEM</a:t>
             </a:r>
             <a:endParaRPr lang="en-US" sz="1400" dirty="0"/>
           </a:p>
@@ -10121,7 +10324,7 @@
                 <a:ea typeface="Times New Roman" pitchFamily="34" charset="-122"/>
                 <a:cs typeface="Times New Roman" pitchFamily="34" charset="-120"/>
               </a:rPr>
-              <a:t>Activity 2: Question</a:t>
+              <a:t>Activity 1: Answer</a:t>
             </a:r>
             <a:endParaRPr lang="en-US" sz="3600" dirty="0"/>
           </a:p>
@@ -10163,7 +10366,7 @@
                 <a:ea typeface="Times New Roman" pitchFamily="34" charset="-122"/>
                 <a:cs typeface="Times New Roman" pitchFamily="34" charset="-120"/>
               </a:rPr>
-              <a:t>Name the four ways a river carries its load.</a:t>
+              <a:t>Rainwater (or sediments from the slopes).</a:t>
             </a:r>
             <a:endParaRPr lang="en-US" sz="4000" dirty="0"/>
           </a:p>
@@ -10275,15 +10478,54 @@
                 <a:ea typeface="Calibri" pitchFamily="34" charset="-122"/>
                 <a:cs typeface="Calibri" pitchFamily="34" charset="-120"/>
               </a:rPr>
-              <a:t>2. PROCESSES OF TRANSPORTATION</a:t>
+              <a:t>2. EROSION</a:t>
             </a:r>
             <a:endParaRPr lang="en-US" sz="1400" dirty="0"/>
+          </a:p>
+        </p:txBody>
+      </p:sp>
+      <p:sp>
+        <p:nvSpPr>
+          <p:cNvPr id="3" name="Text 1"/>
+          <p:cNvSpPr/>
+          <p:nvPr/>
+        </p:nvSpPr>
+        <p:spPr>
+          <a:xfrm>
+            <a:off x="457200" y="1005840"/>
+            <a:ext cx="11277295" cy="731520"/>
+          </a:xfrm>
+          <a:prstGeom prst="rect">
+            <a:avLst/>
+          </a:prstGeom>
+          <a:noFill/>
+          <a:ln/>
+        </p:spPr>
+        <p:txBody>
+          <a:bodyPr wrap="square" lIns="0" tIns="0" rIns="0" bIns="0" rtlCol="0" anchor="ctr"/>
+          <a:lstStyle/>
+          <a:p>
+            <a:pPr algn="ctr" indent="0" marL="0">
+              <a:buNone/>
+            </a:pPr>
+            <a:r>
+              <a:rPr lang="en-US" sz="3600" b="1" dirty="0">
+                <a:solidFill>
+                  <a:srgbClr val="990011"/>
+                </a:solidFill>
+                <a:latin typeface="Times New Roman" pitchFamily="34" charset="0"/>
+                <a:ea typeface="Times New Roman" pitchFamily="34" charset="-122"/>
+                <a:cs typeface="Times New Roman" pitchFamily="34" charset="-120"/>
+              </a:rPr>
+              <a:t>Activity 2</a:t>
+            </a:r>
+            <a:endParaRPr lang="en-US" sz="3600" dirty="0"/>
           </a:p>
         </p:txBody>
       </p:sp>
       <p:pic>
         <p:nvPicPr>
-          <p:cNvPr id="3" name="Image 0" descr="/home/claude/f4/img/minesec_sheet.png">    </p:cNvPr>
+          <p:cNvPr id="4" name="Image 0" descr="/home/claude/f4/img/v2/river_erosion_big.png">    </p:cNvPr>
           <p:cNvPicPr>
             <a:picLocks noChangeAspect="1"/>
           </p:cNvPicPr>
@@ -10297,8 +10539,8 @@
         </p:blipFill>
         <p:spPr>
           <a:xfrm>
-            <a:off x="0" y="658368"/>
-            <a:ext cx="5120640" cy="5833872"/>
+            <a:off x="629930" y="1783080"/>
+            <a:ext cx="10931835" cy="4270248"/>
           </a:xfrm>
           <a:prstGeom prst="rect">
             <a:avLst/>
@@ -10307,14 +10549,14 @@
       </p:pic>
       <p:sp>
         <p:nvSpPr>
-          <p:cNvPr id="4" name="Text 1"/>
+          <p:cNvPr id="5" name="Text 2"/>
           <p:cNvSpPr/>
           <p:nvPr/>
         </p:nvSpPr>
         <p:spPr>
           <a:xfrm>
-            <a:off x="5349240" y="1005840"/>
-            <a:ext cx="6522415" cy="731520"/>
+            <a:off x="457200" y="6089904"/>
+            <a:ext cx="11277295" cy="347472"/>
           </a:xfrm>
           <a:prstGeom prst="rect">
             <a:avLst/>
@@ -10323,68 +10565,24 @@
           <a:ln/>
         </p:spPr>
         <p:txBody>
-          <a:bodyPr wrap="square" lIns="0" tIns="0" rIns="0" bIns="0" rtlCol="0" anchor="ctr">
-            <a:normAutofit/>
-          </a:bodyPr>
+          <a:bodyPr wrap="square" lIns="0" tIns="0" rIns="0" bIns="0" rtlCol="0" anchor="ctr"/>
           <a:lstStyle/>
           <a:p>
             <a:pPr algn="ctr" indent="0" marL="0">
               <a:buNone/>
             </a:pPr>
             <a:r>
-              <a:rPr lang="en-US" sz="3600" b="1" dirty="0">
-                <a:solidFill>
-                  <a:srgbClr val="990011"/>
+              <a:rPr lang="en-US" sz="1800" i="1" dirty="0">
+                <a:solidFill>
+                  <a:srgbClr val="555555"/>
                 </a:solidFill>
                 <a:latin typeface="Times New Roman" pitchFamily="34" charset="0"/>
                 <a:ea typeface="Times New Roman" pitchFamily="34" charset="-122"/>
                 <a:cs typeface="Times New Roman" pitchFamily="34" charset="-120"/>
               </a:rPr>
-              <a:t>Activity 2: Answer</a:t>
-            </a:r>
-            <a:endParaRPr lang="en-US" sz="3600" dirty="0"/>
-          </a:p>
-        </p:txBody>
-      </p:sp>
-      <p:sp>
-        <p:nvSpPr>
-          <p:cNvPr id="5" name="Text 2"/>
-          <p:cNvSpPr/>
-          <p:nvPr/>
-        </p:nvSpPr>
-        <p:spPr>
-          <a:xfrm>
-            <a:off x="5349240" y="1783080"/>
-            <a:ext cx="6522415" cy="4663440"/>
-          </a:xfrm>
-          <a:prstGeom prst="rect">
-            <a:avLst/>
-          </a:prstGeom>
-          <a:noFill/>
-          <a:ln/>
-        </p:spPr>
-        <p:txBody>
-          <a:bodyPr wrap="square" lIns="0" tIns="0" rIns="0" bIns="0" rtlCol="0" anchor="t"/>
-          <a:lstStyle/>
-          <a:p>
-            <a:pPr algn="l" indent="0" marL="0">
-              <a:spcAft>
-                <a:spcPts val="800"/>
-              </a:spcAft>
-              <a:buNone/>
-            </a:pPr>
-            <a:r>
-              <a:rPr lang="en-US" sz="4000" dirty="0">
-                <a:solidFill>
-                  <a:srgbClr val="111111"/>
-                </a:solidFill>
-                <a:latin typeface="Times New Roman" pitchFamily="34" charset="0"/>
-                <a:ea typeface="Times New Roman" pitchFamily="34" charset="-122"/>
-                <a:cs typeface="Times New Roman" pitchFamily="34" charset="-120"/>
-              </a:rPr>
-              <a:t>Traction, saltation, suspension and solution.</a:t>
-            </a:r>
-            <a:endParaRPr lang="en-US" sz="4000" dirty="0"/>
+              <a:t>The four processes of erosion.</a:t>
+            </a:r>
+            <a:endParaRPr lang="en-US" sz="1800" dirty="0"/>
           </a:p>
         </p:txBody>
       </p:sp>
@@ -10494,54 +10692,15 @@
                 <a:ea typeface="Calibri" pitchFamily="34" charset="-122"/>
                 <a:cs typeface="Calibri" pitchFamily="34" charset="-120"/>
               </a:rPr>
-              <a:t>2. THE HJULSTRÖM GRAPH</a:t>
+              <a:t>2. EROSION</a:t>
             </a:r>
             <a:endParaRPr lang="en-US" sz="1400" dirty="0"/>
-          </a:p>
-        </p:txBody>
-      </p:sp>
-      <p:sp>
-        <p:nvSpPr>
-          <p:cNvPr id="3" name="Text 1"/>
-          <p:cNvSpPr/>
-          <p:nvPr/>
-        </p:nvSpPr>
-        <p:spPr>
-          <a:xfrm>
-            <a:off x="457200" y="1005840"/>
-            <a:ext cx="11277295" cy="731520"/>
-          </a:xfrm>
-          <a:prstGeom prst="rect">
-            <a:avLst/>
-          </a:prstGeom>
-          <a:noFill/>
-          <a:ln/>
-        </p:spPr>
-        <p:txBody>
-          <a:bodyPr wrap="square" lIns="0" tIns="0" rIns="0" bIns="0" rtlCol="0" anchor="ctr"/>
-          <a:lstStyle/>
-          <a:p>
-            <a:pPr algn="ctr" indent="0" marL="0">
-              <a:buNone/>
-            </a:pPr>
-            <a:r>
-              <a:rPr lang="en-US" sz="3600" b="1" dirty="0">
-                <a:solidFill>
-                  <a:srgbClr val="990011"/>
-                </a:solidFill>
-                <a:latin typeface="Times New Roman" pitchFamily="34" charset="0"/>
-                <a:ea typeface="Times New Roman" pitchFamily="34" charset="-122"/>
-                <a:cs typeface="Times New Roman" pitchFamily="34" charset="-120"/>
-              </a:rPr>
-              <a:t>Activity 3</a:t>
-            </a:r>
-            <a:endParaRPr lang="en-US" sz="3600" dirty="0"/>
           </a:p>
         </p:txBody>
       </p:sp>
       <p:pic>
         <p:nvPicPr>
-          <p:cNvPr id="4" name="Image 0" descr="/home/claude/f4/img/v2/hjulstrom_big.png">    </p:cNvPr>
+          <p:cNvPr id="3" name="Image 0" descr="/home/claude/f4/img/minesec_sheet.png">    </p:cNvPr>
           <p:cNvPicPr>
             <a:picLocks noChangeAspect="1"/>
           </p:cNvPicPr>
@@ -10555,8 +10714,8 @@
         </p:blipFill>
         <p:spPr>
           <a:xfrm>
-            <a:off x="1383850" y="1783080"/>
-            <a:ext cx="9423996" cy="4270248"/>
+            <a:off x="0" y="658368"/>
+            <a:ext cx="5120640" cy="5833872"/>
           </a:xfrm>
           <a:prstGeom prst="rect">
             <a:avLst/>
@@ -10565,14 +10724,14 @@
       </p:pic>
       <p:sp>
         <p:nvSpPr>
-          <p:cNvPr id="5" name="Text 2"/>
+          <p:cNvPr id="4" name="Text 1"/>
           <p:cNvSpPr/>
           <p:nvPr/>
         </p:nvSpPr>
         <p:spPr>
           <a:xfrm>
-            <a:off x="457200" y="6089904"/>
-            <a:ext cx="11277295" cy="347472"/>
+            <a:off x="5349240" y="1005840"/>
+            <a:ext cx="6522415" cy="731520"/>
           </a:xfrm>
           <a:prstGeom prst="rect">
             <a:avLst/>
@@ -10581,24 +10740,68 @@
           <a:ln/>
         </p:spPr>
         <p:txBody>
-          <a:bodyPr wrap="square" lIns="0" tIns="0" rIns="0" bIns="0" rtlCol="0" anchor="ctr"/>
+          <a:bodyPr wrap="square" lIns="0" tIns="0" rIns="0" bIns="0" rtlCol="0" anchor="ctr">
+            <a:normAutofit/>
+          </a:bodyPr>
           <a:lstStyle/>
           <a:p>
             <a:pPr algn="ctr" indent="0" marL="0">
               <a:buNone/>
             </a:pPr>
             <a:r>
-              <a:rPr lang="en-US" sz="1800" i="1" dirty="0">
-                <a:solidFill>
-                  <a:srgbClr val="555555"/>
+              <a:rPr lang="en-US" sz="3600" b="1" dirty="0">
+                <a:solidFill>
+                  <a:srgbClr val="990011"/>
                 </a:solidFill>
                 <a:latin typeface="Times New Roman" pitchFamily="34" charset="0"/>
                 <a:ea typeface="Times New Roman" pitchFamily="34" charset="-122"/>
                 <a:cs typeface="Times New Roman" pitchFamily="34" charset="-120"/>
               </a:rPr>
-              <a:t>The Hjulström graph.</a:t>
-            </a:r>
-            <a:endParaRPr lang="en-US" sz="1800" dirty="0"/>
+              <a:t>Activity 2: Question</a:t>
+            </a:r>
+            <a:endParaRPr lang="en-US" sz="3600" dirty="0"/>
+          </a:p>
+        </p:txBody>
+      </p:sp>
+      <p:sp>
+        <p:nvSpPr>
+          <p:cNvPr id="5" name="Text 2"/>
+          <p:cNvSpPr/>
+          <p:nvPr/>
+        </p:nvSpPr>
+        <p:spPr>
+          <a:xfrm>
+            <a:off x="5349240" y="1783080"/>
+            <a:ext cx="6522415" cy="4663440"/>
+          </a:xfrm>
+          <a:prstGeom prst="rect">
+            <a:avLst/>
+          </a:prstGeom>
+          <a:noFill/>
+          <a:ln/>
+        </p:spPr>
+        <p:txBody>
+          <a:bodyPr wrap="square" lIns="0" tIns="0" rIns="0" bIns="0" rtlCol="0" anchor="t"/>
+          <a:lstStyle/>
+          <a:p>
+            <a:pPr algn="l" indent="0" marL="0">
+              <a:spcAft>
+                <a:spcPts val="800"/>
+              </a:spcAft>
+              <a:buNone/>
+            </a:pPr>
+            <a:r>
+              <a:rPr lang="en-US" sz="4000" dirty="0">
+                <a:solidFill>
+                  <a:srgbClr val="111111"/>
+                </a:solidFill>
+                <a:latin typeface="Times New Roman" pitchFamily="34" charset="0"/>
+                <a:ea typeface="Times New Roman" pitchFamily="34" charset="-122"/>
+                <a:cs typeface="Times New Roman" pitchFamily="34" charset="-120"/>
+              </a:rPr>
+              <a:t>Distinguish abrasion from attrition.</a:t>
+            </a:r>
+            <a:endParaRPr lang="en-US" sz="4000" dirty="0"/>
           </a:p>
         </p:txBody>
       </p:sp>
@@ -10708,7 +10911,7 @@
                 <a:ea typeface="Calibri" pitchFamily="34" charset="-122"/>
                 <a:cs typeface="Calibri" pitchFamily="34" charset="-120"/>
               </a:rPr>
-              <a:t>2. THE HJULSTRÖM GRAPH</a:t>
+              <a:t>2. EROSION</a:t>
             </a:r>
             <a:endParaRPr lang="en-US" sz="1400" dirty="0"/>
           </a:p>
@@ -10773,7 +10976,7 @@
                 <a:ea typeface="Times New Roman" pitchFamily="34" charset="-122"/>
                 <a:cs typeface="Times New Roman" pitchFamily="34" charset="-120"/>
               </a:rPr>
-              <a:t>Activity 3: Question</a:t>
+              <a:t>Activity 2: Answer</a:t>
             </a:r>
             <a:endParaRPr lang="en-US" sz="3600" dirty="0"/>
           </a:p>
@@ -10815,7 +11018,7 @@
                 <a:ea typeface="Times New Roman" pitchFamily="34" charset="-122"/>
                 <a:cs typeface="Times New Roman" pitchFamily="34" charset="-120"/>
               </a:rPr>
-              <a:t>Why is clay difficult to erode although it is very small?</a:t>
+              <a:t>Abrasion: the load scrapes the bed and banks; attrition: stones hit each other and become smaller and rounder.</a:t>
             </a:r>
             <a:endParaRPr lang="en-US" sz="4000" dirty="0"/>
           </a:p>
@@ -10927,15 +11130,54 @@
                 <a:ea typeface="Calibri" pitchFamily="34" charset="-122"/>
                 <a:cs typeface="Calibri" pitchFamily="34" charset="-120"/>
               </a:rPr>
-              <a:t>2. THE HJULSTRÖM GRAPH</a:t>
+              <a:t>3. TRANSPORTATION</a:t>
             </a:r>
             <a:endParaRPr lang="en-US" sz="1400" dirty="0"/>
+          </a:p>
+        </p:txBody>
+      </p:sp>
+      <p:sp>
+        <p:nvSpPr>
+          <p:cNvPr id="3" name="Text 1"/>
+          <p:cNvSpPr/>
+          <p:nvPr/>
+        </p:nvSpPr>
+        <p:spPr>
+          <a:xfrm>
+            <a:off x="457200" y="1005840"/>
+            <a:ext cx="11277295" cy="731520"/>
+          </a:xfrm>
+          <a:prstGeom prst="rect">
+            <a:avLst/>
+          </a:prstGeom>
+          <a:noFill/>
+          <a:ln/>
+        </p:spPr>
+        <p:txBody>
+          <a:bodyPr wrap="square" lIns="0" tIns="0" rIns="0" bIns="0" rtlCol="0" anchor="ctr"/>
+          <a:lstStyle/>
+          <a:p>
+            <a:pPr algn="ctr" indent="0" marL="0">
+              <a:buNone/>
+            </a:pPr>
+            <a:r>
+              <a:rPr lang="en-US" sz="3600" b="1" dirty="0">
+                <a:solidFill>
+                  <a:srgbClr val="990011"/>
+                </a:solidFill>
+                <a:latin typeface="Times New Roman" pitchFamily="34" charset="0"/>
+                <a:ea typeface="Times New Roman" pitchFamily="34" charset="-122"/>
+                <a:cs typeface="Times New Roman" pitchFamily="34" charset="-120"/>
+              </a:rPr>
+              <a:t>Activity 3</a:t>
+            </a:r>
+            <a:endParaRPr lang="en-US" sz="3600" dirty="0"/>
           </a:p>
         </p:txBody>
       </p:sp>
       <p:pic>
         <p:nvPicPr>
-          <p:cNvPr id="3" name="Image 0" descr="/home/claude/f4/img/minesec_sheet.png">    </p:cNvPr>
+          <p:cNvPr id="4" name="Image 0" descr="/home/claude/f4/img/v2/geo2_transport.png">    </p:cNvPr>
           <p:cNvPicPr>
             <a:picLocks noChangeAspect="1"/>
           </p:cNvPicPr>
@@ -10949,8 +11191,8 @@
         </p:blipFill>
         <p:spPr>
           <a:xfrm>
-            <a:off x="0" y="658368"/>
-            <a:ext cx="5120640" cy="5833872"/>
+            <a:off x="629930" y="1783080"/>
+            <a:ext cx="10931835" cy="4270248"/>
           </a:xfrm>
           <a:prstGeom prst="rect">
             <a:avLst/>
@@ -10959,14 +11201,14 @@
       </p:pic>
       <p:sp>
         <p:nvSpPr>
-          <p:cNvPr id="4" name="Text 1"/>
+          <p:cNvPr id="5" name="Text 2"/>
           <p:cNvSpPr/>
           <p:nvPr/>
         </p:nvSpPr>
         <p:spPr>
           <a:xfrm>
-            <a:off x="5349240" y="1005840"/>
-            <a:ext cx="6522415" cy="731520"/>
+            <a:off x="457200" y="6089904"/>
+            <a:ext cx="11277295" cy="347472"/>
           </a:xfrm>
           <a:prstGeom prst="rect">
             <a:avLst/>
@@ -10975,68 +11217,24 @@
           <a:ln/>
         </p:spPr>
         <p:txBody>
-          <a:bodyPr wrap="square" lIns="0" tIns="0" rIns="0" bIns="0" rtlCol="0" anchor="ctr">
-            <a:normAutofit/>
-          </a:bodyPr>
+          <a:bodyPr wrap="square" lIns="0" tIns="0" rIns="0" bIns="0" rtlCol="0" anchor="ctr"/>
           <a:lstStyle/>
           <a:p>
             <a:pPr algn="ctr" indent="0" marL="0">
               <a:buNone/>
             </a:pPr>
             <a:r>
-              <a:rPr lang="en-US" sz="3600" b="1" dirty="0">
-                <a:solidFill>
-                  <a:srgbClr val="990011"/>
+              <a:rPr lang="en-US" sz="1800" i="1" dirty="0">
+                <a:solidFill>
+                  <a:srgbClr val="555555"/>
                 </a:solidFill>
                 <a:latin typeface="Times New Roman" pitchFamily="34" charset="0"/>
                 <a:ea typeface="Times New Roman" pitchFamily="34" charset="-122"/>
                 <a:cs typeface="Times New Roman" pitchFamily="34" charset="-120"/>
               </a:rPr>
-              <a:t>Activity 3: Answer</a:t>
-            </a:r>
-            <a:endParaRPr lang="en-US" sz="3600" dirty="0"/>
-          </a:p>
-        </p:txBody>
-      </p:sp>
-      <p:sp>
-        <p:nvSpPr>
-          <p:cNvPr id="5" name="Text 2"/>
-          <p:cNvSpPr/>
-          <p:nvPr/>
-        </p:nvSpPr>
-        <p:spPr>
-          <a:xfrm>
-            <a:off x="5349240" y="1783080"/>
-            <a:ext cx="6522415" cy="4663440"/>
-          </a:xfrm>
-          <a:prstGeom prst="rect">
-            <a:avLst/>
-          </a:prstGeom>
-          <a:noFill/>
-          <a:ln/>
-        </p:spPr>
-        <p:txBody>
-          <a:bodyPr wrap="square" lIns="0" tIns="0" rIns="0" bIns="0" rtlCol="0" anchor="t"/>
-          <a:lstStyle/>
-          <a:p>
-            <a:pPr algn="l" indent="0" marL="0">
-              <a:spcAft>
-                <a:spcPts val="800"/>
-              </a:spcAft>
-              <a:buNone/>
-            </a:pPr>
-            <a:r>
-              <a:rPr lang="en-US" sz="4000" dirty="0">
-                <a:solidFill>
-                  <a:srgbClr val="111111"/>
-                </a:solidFill>
-                <a:latin typeface="Times New Roman" pitchFamily="34" charset="0"/>
-                <a:ea typeface="Times New Roman" pitchFamily="34" charset="-122"/>
-                <a:cs typeface="Times New Roman" pitchFamily="34" charset="-120"/>
-              </a:rPr>
-              <a:t>Clay particles stick together, so a high velocity is needed.</a:t>
-            </a:r>
-            <a:endParaRPr lang="en-US" sz="4000" dirty="0"/>
+              <a:t>Four ways of carrying the load.</a:t>
+            </a:r>
+            <a:endParaRPr lang="en-US" sz="1800" dirty="0"/>
           </a:p>
         </p:txBody>
       </p:sp>
@@ -11146,54 +11344,15 @@
                 <a:ea typeface="Calibri" pitchFamily="34" charset="-122"/>
                 <a:cs typeface="Calibri" pitchFamily="34" charset="-120"/>
               </a:rPr>
-              <a:t>3. DEPOSITION</a:t>
+              <a:t>3. TRANSPORTATION</a:t>
             </a:r>
             <a:endParaRPr lang="en-US" sz="1400" dirty="0"/>
-          </a:p>
-        </p:txBody>
-      </p:sp>
-      <p:sp>
-        <p:nvSpPr>
-          <p:cNvPr id="3" name="Text 1"/>
-          <p:cNvSpPr/>
-          <p:nvPr/>
-        </p:nvSpPr>
-        <p:spPr>
-          <a:xfrm>
-            <a:off x="457200" y="1005840"/>
-            <a:ext cx="11277295" cy="731520"/>
-          </a:xfrm>
-          <a:prstGeom prst="rect">
-            <a:avLst/>
-          </a:prstGeom>
-          <a:noFill/>
-          <a:ln/>
-        </p:spPr>
-        <p:txBody>
-          <a:bodyPr wrap="square" lIns="0" tIns="0" rIns="0" bIns="0" rtlCol="0" anchor="ctr"/>
-          <a:lstStyle/>
-          <a:p>
-            <a:pPr algn="ctr" indent="0" marL="0">
-              <a:buNone/>
-            </a:pPr>
-            <a:r>
-              <a:rPr lang="en-US" sz="3600" b="1" dirty="0">
-                <a:solidFill>
-                  <a:srgbClr val="990011"/>
-                </a:solidFill>
-                <a:latin typeface="Times New Roman" pitchFamily="34" charset="0"/>
-                <a:ea typeface="Times New Roman" pitchFamily="34" charset="-122"/>
-                <a:cs typeface="Times New Roman" pitchFamily="34" charset="-120"/>
-              </a:rPr>
-              <a:t>Activity 4</a:t>
-            </a:r>
-            <a:endParaRPr lang="en-US" sz="3600" dirty="0"/>
           </a:p>
         </p:txBody>
       </p:sp>
       <p:pic>
         <p:nvPicPr>
-          <p:cNvPr id="4" name="Image 0" descr="/home/claude/f4/img/v2/f4_muddyriver.jpg">    </p:cNvPr>
+          <p:cNvPr id="3" name="Image 0" descr="/home/claude/f4/img/minesec_sheet.png">    </p:cNvPr>
           <p:cNvPicPr>
             <a:picLocks noChangeAspect="1"/>
           </p:cNvPicPr>
@@ -11207,8 +11366,8 @@
         </p:blipFill>
         <p:spPr>
           <a:xfrm>
-            <a:off x="2250369" y="1783080"/>
-            <a:ext cx="7690957" cy="4270248"/>
+            <a:off x="0" y="658368"/>
+            <a:ext cx="5120640" cy="5833872"/>
           </a:xfrm>
           <a:prstGeom prst="rect">
             <a:avLst/>
@@ -11217,14 +11376,14 @@
       </p:pic>
       <p:sp>
         <p:nvSpPr>
-          <p:cNvPr id="5" name="Text 2"/>
+          <p:cNvPr id="4" name="Text 1"/>
           <p:cNvSpPr/>
           <p:nvPr/>
         </p:nvSpPr>
         <p:spPr>
           <a:xfrm>
-            <a:off x="457200" y="6089904"/>
-            <a:ext cx="11277295" cy="347472"/>
+            <a:off x="5349240" y="1005840"/>
+            <a:ext cx="6522415" cy="731520"/>
           </a:xfrm>
           <a:prstGeom prst="rect">
             <a:avLst/>
@@ -11233,24 +11392,68 @@
           <a:ln/>
         </p:spPr>
         <p:txBody>
-          <a:bodyPr wrap="square" lIns="0" tIns="0" rIns="0" bIns="0" rtlCol="0" anchor="ctr"/>
+          <a:bodyPr wrap="square" lIns="0" tIns="0" rIns="0" bIns="0" rtlCol="0" anchor="ctr">
+            <a:normAutofit/>
+          </a:bodyPr>
           <a:lstStyle/>
           <a:p>
             <a:pPr algn="ctr" indent="0" marL="0">
               <a:buNone/>
             </a:pPr>
             <a:r>
-              <a:rPr lang="en-US" sz="1800" i="1" dirty="0">
-                <a:solidFill>
-                  <a:srgbClr val="555555"/>
+              <a:rPr lang="en-US" sz="3600" b="1" dirty="0">
+                <a:solidFill>
+                  <a:srgbClr val="990011"/>
                 </a:solidFill>
                 <a:latin typeface="Times New Roman" pitchFamily="34" charset="0"/>
                 <a:ea typeface="Times New Roman" pitchFamily="34" charset="-122"/>
                 <a:cs typeface="Times New Roman" pitchFamily="34" charset="-120"/>
               </a:rPr>
-              <a:t>A muddy river seen from space.</a:t>
-            </a:r>
-            <a:endParaRPr lang="en-US" sz="1800" dirty="0"/>
+              <a:t>Activity 3: Question</a:t>
+            </a:r>
+            <a:endParaRPr lang="en-US" sz="3600" dirty="0"/>
+          </a:p>
+        </p:txBody>
+      </p:sp>
+      <p:sp>
+        <p:nvSpPr>
+          <p:cNvPr id="5" name="Text 2"/>
+          <p:cNvSpPr/>
+          <p:nvPr/>
+        </p:nvSpPr>
+        <p:spPr>
+          <a:xfrm>
+            <a:off x="5349240" y="1783080"/>
+            <a:ext cx="6522415" cy="4663440"/>
+          </a:xfrm>
+          <a:prstGeom prst="rect">
+            <a:avLst/>
+          </a:prstGeom>
+          <a:noFill/>
+          <a:ln/>
+        </p:spPr>
+        <p:txBody>
+          <a:bodyPr wrap="square" lIns="0" tIns="0" rIns="0" bIns="0" rtlCol="0" anchor="t"/>
+          <a:lstStyle/>
+          <a:p>
+            <a:pPr algn="l" indent="0" marL="0">
+              <a:spcAft>
+                <a:spcPts val="800"/>
+              </a:spcAft>
+              <a:buNone/>
+            </a:pPr>
+            <a:r>
+              <a:rPr lang="en-US" sz="4000" dirty="0">
+                <a:solidFill>
+                  <a:srgbClr val="111111"/>
+                </a:solidFill>
+                <a:latin typeface="Times New Roman" pitchFamily="34" charset="0"/>
+                <a:ea typeface="Times New Roman" pitchFamily="34" charset="-122"/>
+                <a:cs typeface="Times New Roman" pitchFamily="34" charset="-120"/>
+              </a:rPr>
+              <a:t>Which method carries the largest amount of load?</a:t>
+            </a:r>
+            <a:endParaRPr lang="en-US" sz="4000" dirty="0"/>
           </a:p>
         </p:txBody>
       </p:sp>
@@ -11360,7 +11563,7 @@
                 <a:ea typeface="Calibri" pitchFamily="34" charset="-122"/>
                 <a:cs typeface="Calibri" pitchFamily="34" charset="-120"/>
               </a:rPr>
-              <a:t>3. DEPOSITION</a:t>
+              <a:t>3. TRANSPORTATION</a:t>
             </a:r>
             <a:endParaRPr lang="en-US" sz="1400" dirty="0"/>
           </a:p>
@@ -11425,7 +11628,7 @@
                 <a:ea typeface="Times New Roman" pitchFamily="34" charset="-122"/>
                 <a:cs typeface="Times New Roman" pitchFamily="34" charset="-120"/>
               </a:rPr>
-              <a:t>Activity 4: Question</a:t>
+              <a:t>Activity 3: Answer</a:t>
             </a:r>
             <a:endParaRPr lang="en-US" sz="3600" dirty="0"/>
           </a:p>
@@ -11467,7 +11670,7 @@
                 <a:ea typeface="Times New Roman" pitchFamily="34" charset="-122"/>
                 <a:cs typeface="Times New Roman" pitchFamily="34" charset="-120"/>
               </a:rPr>
-              <a:t>When does a river deposit its load?</a:t>
+              <a:t>Suspension.</a:t>
             </a:r>
             <a:endParaRPr lang="en-US" sz="4000" dirty="0"/>
           </a:p>
@@ -11579,15 +11782,54 @@
                 <a:ea typeface="Calibri" pitchFamily="34" charset="-122"/>
                 <a:cs typeface="Calibri" pitchFamily="34" charset="-120"/>
               </a:rPr>
-              <a:t>3. DEPOSITION</a:t>
+              <a:t>3. TRANSPORTATION</a:t>
             </a:r>
             <a:endParaRPr lang="en-US" sz="1400" dirty="0"/>
+          </a:p>
+        </p:txBody>
+      </p:sp>
+      <p:sp>
+        <p:nvSpPr>
+          <p:cNvPr id="3" name="Text 1"/>
+          <p:cNvSpPr/>
+          <p:nvPr/>
+        </p:nvSpPr>
+        <p:spPr>
+          <a:xfrm>
+            <a:off x="457200" y="1005840"/>
+            <a:ext cx="11277295" cy="731520"/>
+          </a:xfrm>
+          <a:prstGeom prst="rect">
+            <a:avLst/>
+          </a:prstGeom>
+          <a:noFill/>
+          <a:ln/>
+        </p:spPr>
+        <p:txBody>
+          <a:bodyPr wrap="square" lIns="0" tIns="0" rIns="0" bIns="0" rtlCol="0" anchor="ctr"/>
+          <a:lstStyle/>
+          <a:p>
+            <a:pPr algn="ctr" indent="0" marL="0">
+              <a:buNone/>
+            </a:pPr>
+            <a:r>
+              <a:rPr lang="en-US" sz="3600" b="1" dirty="0">
+                <a:solidFill>
+                  <a:srgbClr val="990011"/>
+                </a:solidFill>
+                <a:latin typeface="Times New Roman" pitchFamily="34" charset="0"/>
+                <a:ea typeface="Times New Roman" pitchFamily="34" charset="-122"/>
+                <a:cs typeface="Times New Roman" pitchFamily="34" charset="-120"/>
+              </a:rPr>
+              <a:t>Activity 4</a:t>
+            </a:r>
+            <a:endParaRPr lang="en-US" sz="3600" dirty="0"/>
           </a:p>
         </p:txBody>
       </p:sp>
       <p:pic>
         <p:nvPicPr>
-          <p:cNvPr id="3" name="Image 0" descr="/home/claude/f4/img/minesec_sheet.png">    </p:cNvPr>
+          <p:cNvPr id="4" name="Image 0" descr="/home/claude/f4/img/v2/f4_muddyriver.jpg">    </p:cNvPr>
           <p:cNvPicPr>
             <a:picLocks noChangeAspect="1"/>
           </p:cNvPicPr>
@@ -11601,8 +11843,8 @@
         </p:blipFill>
         <p:spPr>
           <a:xfrm>
-            <a:off x="0" y="658368"/>
-            <a:ext cx="5120640" cy="5833872"/>
+            <a:off x="2250369" y="1783080"/>
+            <a:ext cx="7690957" cy="4270248"/>
           </a:xfrm>
           <a:prstGeom prst="rect">
             <a:avLst/>
@@ -11611,14 +11853,14 @@
       </p:pic>
       <p:sp>
         <p:nvSpPr>
-          <p:cNvPr id="4" name="Text 1"/>
+          <p:cNvPr id="5" name="Text 2"/>
           <p:cNvSpPr/>
           <p:nvPr/>
         </p:nvSpPr>
         <p:spPr>
           <a:xfrm>
-            <a:off x="5349240" y="1005840"/>
-            <a:ext cx="6522415" cy="731520"/>
+            <a:off x="457200" y="6089904"/>
+            <a:ext cx="11277295" cy="347472"/>
           </a:xfrm>
           <a:prstGeom prst="rect">
             <a:avLst/>
@@ -11627,68 +11869,24 @@
           <a:ln/>
         </p:spPr>
         <p:txBody>
-          <a:bodyPr wrap="square" lIns="0" tIns="0" rIns="0" bIns="0" rtlCol="0" anchor="ctr">
-            <a:normAutofit/>
-          </a:bodyPr>
+          <a:bodyPr wrap="square" lIns="0" tIns="0" rIns="0" bIns="0" rtlCol="0" anchor="ctr"/>
           <a:lstStyle/>
           <a:p>
             <a:pPr algn="ctr" indent="0" marL="0">
               <a:buNone/>
             </a:pPr>
             <a:r>
-              <a:rPr lang="en-US" sz="3600" b="1" dirty="0">
-                <a:solidFill>
-                  <a:srgbClr val="990011"/>
+              <a:rPr lang="en-US" sz="1800" i="1" dirty="0">
+                <a:solidFill>
+                  <a:srgbClr val="555555"/>
                 </a:solidFill>
                 <a:latin typeface="Times New Roman" pitchFamily="34" charset="0"/>
                 <a:ea typeface="Times New Roman" pitchFamily="34" charset="-122"/>
                 <a:cs typeface="Times New Roman" pitchFamily="34" charset="-120"/>
               </a:rPr>
-              <a:t>Activity 4: Answer</a:t>
-            </a:r>
-            <a:endParaRPr lang="en-US" sz="3600" dirty="0"/>
-          </a:p>
-        </p:txBody>
-      </p:sp>
-      <p:sp>
-        <p:nvSpPr>
-          <p:cNvPr id="5" name="Text 2"/>
-          <p:cNvSpPr/>
-          <p:nvPr/>
-        </p:nvSpPr>
-        <p:spPr>
-          <a:xfrm>
-            <a:off x="5349240" y="1783080"/>
-            <a:ext cx="6522415" cy="4663440"/>
-          </a:xfrm>
-          <a:prstGeom prst="rect">
-            <a:avLst/>
-          </a:prstGeom>
-          <a:noFill/>
-          <a:ln/>
-        </p:spPr>
-        <p:txBody>
-          <a:bodyPr wrap="square" lIns="0" tIns="0" rIns="0" bIns="0" rtlCol="0" anchor="t"/>
-          <a:lstStyle/>
-          <a:p>
-            <a:pPr algn="l" indent="0" marL="0">
-              <a:spcAft>
-                <a:spcPts val="800"/>
-              </a:spcAft>
-              <a:buNone/>
-            </a:pPr>
-            <a:r>
-              <a:rPr lang="en-US" sz="4000" dirty="0">
-                <a:solidFill>
-                  <a:srgbClr val="111111"/>
-                </a:solidFill>
-                <a:latin typeface="Times New Roman" pitchFamily="34" charset="0"/>
-                <a:ea typeface="Times New Roman" pitchFamily="34" charset="-122"/>
-                <a:cs typeface="Times New Roman" pitchFamily="34" charset="-120"/>
-              </a:rPr>
-              <a:t>When its speed or volume falls, for example on flat land or at the sea.</a:t>
-            </a:r>
-            <a:endParaRPr lang="en-US" sz="4000" dirty="0"/>
+              <a:t>A muddy river.</a:t>
+            </a:r>
+            <a:endParaRPr lang="en-US" sz="1800" dirty="0"/>
           </a:p>
         </p:txBody>
       </p:sp>
@@ -12369,7 +12567,7 @@
                           <a:ea typeface="Calibri" pitchFamily="34" charset="-122"/>
                           <a:cs typeface="Calibri" pitchFamily="34" charset="-120"/>
                         </a:rPr>
-                        <a:t>Erosion, transportation, deposition, competence, capacity, Hjulström.</a:t>
+                        <a:t>River system, input, output, hydraulic action, abrasion, attrition, solution, traction, saltation, suspension, load, deposition.</a:t>
                       </a:r>
                       <a:endParaRPr lang="en-US" sz="1700" dirty="0">
                         <a:latin typeface="Calibri" charset="0"/>
@@ -12507,7 +12705,7 @@
                           <a:ea typeface="Calibri" pitchFamily="34" charset="-122"/>
                           <a:cs typeface="Calibri" pitchFamily="34" charset="-120"/>
                         </a:rPr>
-                        <a:t>Processes of erosion and transport; types of load; the Hjulström graph; the river as a system.</a:t>
+                        <a:t>The river as a system; river erosion (four processes); transportation (four methods); deposition and its conditions.</a:t>
                       </a:r>
                       <a:endParaRPr lang="en-US" sz="1700" dirty="0">
                         <a:latin typeface="Calibri" charset="0"/>
@@ -12645,7 +12843,7 @@
                           <a:ea typeface="Calibri" pitchFamily="34" charset="-122"/>
                           <a:cs typeface="Calibri" pitchFamily="34" charset="-120"/>
                         </a:rPr>
-                        <a:t>Learners are able to explain how rivers erode, carry and deposit material.</a:t>
+                        <a:t>Learners are able to explain how a river erodes, carries and deposits material, using the Benue as an example.</a:t>
                       </a:r>
                       <a:endParaRPr lang="en-US" sz="1700" dirty="0">
                         <a:latin typeface="Calibri" charset="0"/>
@@ -12807,54 +13005,15 @@
                 <a:ea typeface="Calibri" pitchFamily="34" charset="-122"/>
                 <a:cs typeface="Calibri" pitchFamily="34" charset="-120"/>
               </a:rPr>
-              <a:t>4. THE RIVER AS A SYSTEM</a:t>
+              <a:t>3. TRANSPORTATION</a:t>
             </a:r>
             <a:endParaRPr lang="en-US" sz="1400" dirty="0"/>
-          </a:p>
-        </p:txBody>
-      </p:sp>
-      <p:sp>
-        <p:nvSpPr>
-          <p:cNvPr id="3" name="Text 1"/>
-          <p:cNvSpPr/>
-          <p:nvPr/>
-        </p:nvSpPr>
-        <p:spPr>
-          <a:xfrm>
-            <a:off x="457200" y="1005840"/>
-            <a:ext cx="11277295" cy="731520"/>
-          </a:xfrm>
-          <a:prstGeom prst="rect">
-            <a:avLst/>
-          </a:prstGeom>
-          <a:noFill/>
-          <a:ln/>
-        </p:spPr>
-        <p:txBody>
-          <a:bodyPr wrap="square" lIns="0" tIns="0" rIns="0" bIns="0" rtlCol="0" anchor="ctr"/>
-          <a:lstStyle/>
-          <a:p>
-            <a:pPr algn="ctr" indent="0" marL="0">
-              <a:buNone/>
-            </a:pPr>
-            <a:r>
-              <a:rPr lang="en-US" sz="3600" b="1" dirty="0">
-                <a:solidFill>
-                  <a:srgbClr val="990011"/>
-                </a:solidFill>
-                <a:latin typeface="Times New Roman" pitchFamily="34" charset="0"/>
-                <a:ea typeface="Times New Roman" pitchFamily="34" charset="-122"/>
-                <a:cs typeface="Times New Roman" pitchFamily="34" charset="-120"/>
-              </a:rPr>
-              <a:t>Activity 5</a:t>
-            </a:r>
-            <a:endParaRPr lang="en-US" sz="3600" dirty="0"/>
           </a:p>
         </p:txBody>
       </p:sp>
       <p:pic>
         <p:nvPicPr>
-          <p:cNvPr id="4" name="Image 0" descr="/home/claude/f4/img/v2/open_system_big.png">    </p:cNvPr>
+          <p:cNvPr id="3" name="Image 0" descr="/home/claude/f4/img/minesec_sheet.png">    </p:cNvPr>
           <p:cNvPicPr>
             <a:picLocks noChangeAspect="1"/>
           </p:cNvPicPr>
@@ -12868,8 +13027,8 @@
         </p:blipFill>
         <p:spPr>
           <a:xfrm>
-            <a:off x="629930" y="1783080"/>
-            <a:ext cx="10931835" cy="4270248"/>
+            <a:off x="0" y="658368"/>
+            <a:ext cx="5120640" cy="5833872"/>
           </a:xfrm>
           <a:prstGeom prst="rect">
             <a:avLst/>
@@ -12878,14 +13037,14 @@
       </p:pic>
       <p:sp>
         <p:nvSpPr>
-          <p:cNvPr id="5" name="Text 2"/>
+          <p:cNvPr id="4" name="Text 1"/>
           <p:cNvSpPr/>
           <p:nvPr/>
         </p:nvSpPr>
         <p:spPr>
           <a:xfrm>
-            <a:off x="457200" y="6089904"/>
-            <a:ext cx="11277295" cy="347472"/>
+            <a:off x="5349240" y="1005840"/>
+            <a:ext cx="6522415" cy="731520"/>
           </a:xfrm>
           <a:prstGeom prst="rect">
             <a:avLst/>
@@ -12894,24 +13053,68 @@
           <a:ln/>
         </p:spPr>
         <p:txBody>
-          <a:bodyPr wrap="square" lIns="0" tIns="0" rIns="0" bIns="0" rtlCol="0" anchor="ctr"/>
+          <a:bodyPr wrap="square" lIns="0" tIns="0" rIns="0" bIns="0" rtlCol="0" anchor="ctr">
+            <a:normAutofit/>
+          </a:bodyPr>
           <a:lstStyle/>
           <a:p>
             <a:pPr algn="ctr" indent="0" marL="0">
               <a:buNone/>
             </a:pPr>
             <a:r>
-              <a:rPr lang="en-US" sz="1800" i="1" dirty="0">
-                <a:solidFill>
-                  <a:srgbClr val="555555"/>
+              <a:rPr lang="en-US" sz="3600" b="1" dirty="0">
+                <a:solidFill>
+                  <a:srgbClr val="990011"/>
                 </a:solidFill>
                 <a:latin typeface="Times New Roman" pitchFamily="34" charset="0"/>
                 <a:ea typeface="Times New Roman" pitchFamily="34" charset="-122"/>
                 <a:cs typeface="Times New Roman" pitchFamily="34" charset="-120"/>
               </a:rPr>
-              <a:t>The drainage basin as a system.</a:t>
-            </a:r>
-            <a:endParaRPr lang="en-US" sz="1800" dirty="0"/>
+              <a:t>Activity 4: Question</a:t>
+            </a:r>
+            <a:endParaRPr lang="en-US" sz="3600" dirty="0"/>
+          </a:p>
+        </p:txBody>
+      </p:sp>
+      <p:sp>
+        <p:nvSpPr>
+          <p:cNvPr id="5" name="Text 2"/>
+          <p:cNvSpPr/>
+          <p:nvPr/>
+        </p:nvSpPr>
+        <p:spPr>
+          <a:xfrm>
+            <a:off x="5349240" y="1783080"/>
+            <a:ext cx="6522415" cy="4663440"/>
+          </a:xfrm>
+          <a:prstGeom prst="rect">
+            <a:avLst/>
+          </a:prstGeom>
+          <a:noFill/>
+          <a:ln/>
+        </p:spPr>
+        <p:txBody>
+          <a:bodyPr wrap="square" lIns="0" tIns="0" rIns="0" bIns="0" rtlCol="0" anchor="t"/>
+          <a:lstStyle/>
+          <a:p>
+            <a:pPr algn="l" indent="0" marL="0">
+              <a:spcAft>
+                <a:spcPts val="800"/>
+              </a:spcAft>
+              <a:buNone/>
+            </a:pPr>
+            <a:r>
+              <a:rPr lang="en-US" sz="4000" dirty="0">
+                <a:solidFill>
+                  <a:srgbClr val="111111"/>
+                </a:solidFill>
+                <a:latin typeface="Times New Roman" pitchFamily="34" charset="0"/>
+                <a:ea typeface="Times New Roman" pitchFamily="34" charset="-122"/>
+                <a:cs typeface="Times New Roman" pitchFamily="34" charset="-120"/>
+              </a:rPr>
+              <a:t>Why is the Benue brown in the rainy season?</a:t>
+            </a:r>
+            <a:endParaRPr lang="en-US" sz="4000" dirty="0"/>
           </a:p>
         </p:txBody>
       </p:sp>
@@ -13021,7 +13224,7 @@
                 <a:ea typeface="Calibri" pitchFamily="34" charset="-122"/>
                 <a:cs typeface="Calibri" pitchFamily="34" charset="-120"/>
               </a:rPr>
-              <a:t>4. THE RIVER AS A SYSTEM</a:t>
+              <a:t>3. TRANSPORTATION</a:t>
             </a:r>
             <a:endParaRPr lang="en-US" sz="1400" dirty="0"/>
           </a:p>
@@ -13086,7 +13289,7 @@
                 <a:ea typeface="Times New Roman" pitchFamily="34" charset="-122"/>
                 <a:cs typeface="Times New Roman" pitchFamily="34" charset="-120"/>
               </a:rPr>
-              <a:t>Activity 5: Question</a:t>
+              <a:t>Activity 4: Answer</a:t>
             </a:r>
             <a:endParaRPr lang="en-US" sz="3600" dirty="0"/>
           </a:p>
@@ -13128,7 +13331,7 @@
                 <a:ea typeface="Times New Roman" pitchFamily="34" charset="-122"/>
                 <a:cs typeface="Times New Roman" pitchFamily="34" charset="-120"/>
               </a:rPr>
-              <a:t>What are the inputs and outputs of a river system?</a:t>
+              <a:t>It carries a lot of silt and clay in suspension.</a:t>
             </a:r>
             <a:endParaRPr lang="en-US" sz="4000" dirty="0"/>
           </a:p>
@@ -13240,15 +13443,54 @@
                 <a:ea typeface="Calibri" pitchFamily="34" charset="-122"/>
                 <a:cs typeface="Calibri" pitchFamily="34" charset="-120"/>
               </a:rPr>
-              <a:t>4. THE RIVER AS A SYSTEM</a:t>
+              <a:t>4. DEPOSITION</a:t>
             </a:r>
             <a:endParaRPr lang="en-US" sz="1400" dirty="0"/>
+          </a:p>
+        </p:txBody>
+      </p:sp>
+      <p:sp>
+        <p:nvSpPr>
+          <p:cNvPr id="3" name="Text 1"/>
+          <p:cNvSpPr/>
+          <p:nvPr/>
+        </p:nvSpPr>
+        <p:spPr>
+          <a:xfrm>
+            <a:off x="457200" y="1005840"/>
+            <a:ext cx="11277295" cy="731520"/>
+          </a:xfrm>
+          <a:prstGeom prst="rect">
+            <a:avLst/>
+          </a:prstGeom>
+          <a:noFill/>
+          <a:ln/>
+        </p:spPr>
+        <p:txBody>
+          <a:bodyPr wrap="square" lIns="0" tIns="0" rIns="0" bIns="0" rtlCol="0" anchor="ctr"/>
+          <a:lstStyle/>
+          <a:p>
+            <a:pPr algn="ctr" indent="0" marL="0">
+              <a:buNone/>
+            </a:pPr>
+            <a:r>
+              <a:rPr lang="en-US" sz="3600" b="1" dirty="0">
+                <a:solidFill>
+                  <a:srgbClr val="990011"/>
+                </a:solidFill>
+                <a:latin typeface="Times New Roman" pitchFamily="34" charset="0"/>
+                <a:ea typeface="Times New Roman" pitchFamily="34" charset="-122"/>
+                <a:cs typeface="Times New Roman" pitchFamily="34" charset="-120"/>
+              </a:rPr>
+              <a:t>Activity 5</a:t>
+            </a:r>
+            <a:endParaRPr lang="en-US" sz="3600" dirty="0"/>
           </a:p>
         </p:txBody>
       </p:sp>
       <p:pic>
         <p:nvPicPr>
-          <p:cNvPr id="3" name="Image 0" descr="/home/claude/f4/img/minesec_sheet.png">    </p:cNvPr>
+          <p:cNvPr id="4" name="Image 0" descr="/home/claude/f4/img/v2/load.gif">    </p:cNvPr>
           <p:cNvPicPr>
             <a:picLocks noChangeAspect="1"/>
           </p:cNvPicPr>
@@ -13262,8 +13504,8 @@
         </p:blipFill>
         <p:spPr>
           <a:xfrm>
-            <a:off x="0" y="658368"/>
-            <a:ext cx="5120640" cy="5833872"/>
+            <a:off x="629930" y="1783080"/>
+            <a:ext cx="10931835" cy="4270248"/>
           </a:xfrm>
           <a:prstGeom prst="rect">
             <a:avLst/>
@@ -13272,14 +13514,14 @@
       </p:pic>
       <p:sp>
         <p:nvSpPr>
-          <p:cNvPr id="4" name="Text 1"/>
+          <p:cNvPr id="5" name="Text 2"/>
           <p:cNvSpPr/>
           <p:nvPr/>
         </p:nvSpPr>
         <p:spPr>
           <a:xfrm>
-            <a:off x="5349240" y="1005840"/>
-            <a:ext cx="6522415" cy="731520"/>
+            <a:off x="457200" y="6089904"/>
+            <a:ext cx="11277295" cy="347472"/>
           </a:xfrm>
           <a:prstGeom prst="rect">
             <a:avLst/>
@@ -13288,68 +13530,24 @@
           <a:ln/>
         </p:spPr>
         <p:txBody>
-          <a:bodyPr wrap="square" lIns="0" tIns="0" rIns="0" bIns="0" rtlCol="0" anchor="ctr">
-            <a:normAutofit/>
-          </a:bodyPr>
+          <a:bodyPr wrap="square" lIns="0" tIns="0" rIns="0" bIns="0" rtlCol="0" anchor="ctr"/>
           <a:lstStyle/>
           <a:p>
             <a:pPr algn="ctr" indent="0" marL="0">
               <a:buNone/>
             </a:pPr>
             <a:r>
-              <a:rPr lang="en-US" sz="3600" b="1" dirty="0">
-                <a:solidFill>
-                  <a:srgbClr val="990011"/>
+              <a:rPr lang="en-US" sz="1800" i="1" dirty="0">
+                <a:solidFill>
+                  <a:srgbClr val="555555"/>
                 </a:solidFill>
                 <a:latin typeface="Times New Roman" pitchFamily="34" charset="0"/>
                 <a:ea typeface="Times New Roman" pitchFamily="34" charset="-122"/>
                 <a:cs typeface="Times New Roman" pitchFamily="34" charset="-120"/>
               </a:rPr>
-              <a:t>Activity 5: Answer</a:t>
-            </a:r>
-            <a:endParaRPr lang="en-US" sz="3600" dirty="0"/>
-          </a:p>
-        </p:txBody>
-      </p:sp>
-      <p:sp>
-        <p:nvSpPr>
-          <p:cNvPr id="5" name="Text 2"/>
-          <p:cNvSpPr/>
-          <p:nvPr/>
-        </p:nvSpPr>
-        <p:spPr>
-          <a:xfrm>
-            <a:off x="5349240" y="1783080"/>
-            <a:ext cx="6522415" cy="4663440"/>
-          </a:xfrm>
-          <a:prstGeom prst="rect">
-            <a:avLst/>
-          </a:prstGeom>
-          <a:noFill/>
-          <a:ln/>
-        </p:spPr>
-        <p:txBody>
-          <a:bodyPr wrap="square" lIns="0" tIns="0" rIns="0" bIns="0" rtlCol="0" anchor="t"/>
-          <a:lstStyle/>
-          <a:p>
-            <a:pPr algn="l" indent="0" marL="0">
-              <a:spcAft>
-                <a:spcPts val="800"/>
-              </a:spcAft>
-              <a:buNone/>
-            </a:pPr>
-            <a:r>
-              <a:rPr lang="en-US" sz="4000" dirty="0">
-                <a:solidFill>
-                  <a:srgbClr val="111111"/>
-                </a:solidFill>
-                <a:latin typeface="Times New Roman" pitchFamily="34" charset="0"/>
-                <a:ea typeface="Times New Roman" pitchFamily="34" charset="-122"/>
-                <a:cs typeface="Times New Roman" pitchFamily="34" charset="-120"/>
-              </a:rPr>
-              <a:t>Inputs: rain, load from slopes. Outputs: water and sediment to the sea, evaporation.</a:t>
-            </a:r>
-            <a:endParaRPr lang="en-US" sz="4000" dirty="0"/>
+              <a:t>Animation: the load settles.</a:t>
+            </a:r>
+            <a:endParaRPr lang="en-US" sz="1800" dirty="0"/>
           </a:p>
         </p:txBody>
       </p:sp>
@@ -13459,7 +13657,7 @@
                 <a:ea typeface="Calibri" pitchFamily="34" charset="-122"/>
                 <a:cs typeface="Calibri" pitchFamily="34" charset="-120"/>
               </a:rPr>
-              <a:t>BOARD SUMMARY</a:t>
+              <a:t>4. DEPOSITION</a:t>
             </a:r>
             <a:endParaRPr lang="en-US" sz="1400" dirty="0"/>
           </a:p>
@@ -13482,7 +13680,7 @@
         <p:spPr>
           <a:xfrm>
             <a:off x="0" y="658368"/>
-            <a:ext cx="3840480" cy="5833872"/>
+            <a:ext cx="5120640" cy="5833872"/>
           </a:xfrm>
           <a:prstGeom prst="rect">
             <a:avLst/>
@@ -13497,8 +13695,8 @@
         </p:nvSpPr>
         <p:spPr>
           <a:xfrm>
-            <a:off x="4069080" y="1005840"/>
-            <a:ext cx="7802575" cy="731520"/>
+            <a:off x="5349240" y="1005840"/>
+            <a:ext cx="6522415" cy="731520"/>
           </a:xfrm>
           <a:prstGeom prst="rect">
             <a:avLst/>
@@ -13524,7 +13722,7 @@
                 <a:ea typeface="Times New Roman" pitchFamily="34" charset="-122"/>
                 <a:cs typeface="Times New Roman" pitchFamily="34" charset="-120"/>
               </a:rPr>
-              <a:t>Board Summary</a:t>
+              <a:t>Activity 5: Question</a:t>
             </a:r>
             <a:endParaRPr lang="en-US" sz="3600" dirty="0"/>
           </a:p>
@@ -13538,8 +13736,8 @@
         </p:nvSpPr>
         <p:spPr>
           <a:xfrm>
-            <a:off x="4069080" y="1783080"/>
-            <a:ext cx="7802575" cy="4663440"/>
+            <a:off x="5349240" y="1783080"/>
+            <a:ext cx="6522415" cy="4663440"/>
           </a:xfrm>
           <a:prstGeom prst="rect">
             <a:avLst/>
@@ -13558,7 +13756,7 @@
               <a:buNone/>
             </a:pPr>
             <a:r>
-              <a:rPr lang="en-US" sz="4000" b="1" dirty="0">
+              <a:rPr lang="en-US" sz="4000" dirty="0">
                 <a:solidFill>
                   <a:srgbClr val="111111"/>
                 </a:solidFill>
@@ -13566,47 +13764,7 @@
                 <a:ea typeface="Times New Roman" pitchFamily="34" charset="-122"/>
                 <a:cs typeface="Times New Roman" pitchFamily="34" charset="-120"/>
               </a:rPr>
-              <a:t>Topic: Denudational Processes on Slopes</a:t>
-            </a:r>
-            <a:endParaRPr lang="en-US" sz="4000" dirty="0"/>
-          </a:p>
-          <a:p>
-            <a:pPr algn="l" indent="0" marL="0">
-              <a:spcAft>
-                <a:spcPts val="800"/>
-              </a:spcAft>
-              <a:buNone/>
-            </a:pPr>
-            <a:r>
-              <a:rPr lang="en-US" sz="4000" b="1" dirty="0">
-                <a:solidFill>
-                  <a:srgbClr val="111111"/>
-                </a:solidFill>
-                <a:latin typeface="Times New Roman" pitchFamily="34" charset="0"/>
-                <a:ea typeface="Times New Roman" pitchFamily="34" charset="-122"/>
-                <a:cs typeface="Times New Roman" pitchFamily="34" charset="-120"/>
-              </a:rPr>
-              <a:t>Sub-topic: Erosion and Depositional Processes and Landforms</a:t>
-            </a:r>
-            <a:endParaRPr lang="en-US" sz="4000" dirty="0"/>
-          </a:p>
-          <a:p>
-            <a:pPr algn="l" indent="0" marL="0">
-              <a:spcAft>
-                <a:spcPts val="800"/>
-              </a:spcAft>
-              <a:buNone/>
-            </a:pPr>
-            <a:r>
-              <a:rPr lang="en-US" sz="4000" b="1" dirty="0">
-                <a:solidFill>
-                  <a:srgbClr val="990011"/>
-                </a:solidFill>
-                <a:latin typeface="Times New Roman" pitchFamily="34" charset="0"/>
-                <a:ea typeface="Times New Roman" pitchFamily="34" charset="-122"/>
-                <a:cs typeface="Times New Roman" pitchFamily="34" charset="-120"/>
-              </a:rPr>
-              <a:t>Lesson 14: Erosional Processes and the Fluvial System</a:t>
+              <a:t>Which material is deposited first?</a:t>
             </a:r>
             <a:endParaRPr lang="en-US" sz="4000" dirty="0"/>
           </a:p>
@@ -13718,7 +13876,7 @@
                 <a:ea typeface="Calibri" pitchFamily="34" charset="-122"/>
                 <a:cs typeface="Calibri" pitchFamily="34" charset="-120"/>
               </a:rPr>
-              <a:t>BOARD SUMMARY</a:t>
+              <a:t>4. DEPOSITION</a:t>
             </a:r>
             <a:endParaRPr lang="en-US" sz="1400" dirty="0"/>
           </a:p>
@@ -13741,7 +13899,7 @@
         <p:spPr>
           <a:xfrm>
             <a:off x="0" y="658368"/>
-            <a:ext cx="2468880" cy="5833872"/>
+            <a:ext cx="5120640" cy="5833872"/>
           </a:xfrm>
           <a:prstGeom prst="rect">
             <a:avLst/>
@@ -13756,8 +13914,8 @@
         </p:nvSpPr>
         <p:spPr>
           <a:xfrm>
-            <a:off x="2697480" y="1005840"/>
-            <a:ext cx="9174175" cy="731520"/>
+            <a:off x="5349240" y="1005840"/>
+            <a:ext cx="6522415" cy="731520"/>
           </a:xfrm>
           <a:prstGeom prst="rect">
             <a:avLst/>
@@ -13783,7 +13941,7 @@
                 <a:ea typeface="Times New Roman" pitchFamily="34" charset="-122"/>
                 <a:cs typeface="Times New Roman" pitchFamily="34" charset="-120"/>
               </a:rPr>
-              <a:t>DEFINITIONS</a:t>
+              <a:t>Activity 5: Answer</a:t>
             </a:r>
             <a:endParaRPr lang="en-US" sz="3600" dirty="0"/>
           </a:p>
@@ -13797,8 +13955,8 @@
         </p:nvSpPr>
         <p:spPr>
           <a:xfrm>
-            <a:off x="2697480" y="1783080"/>
-            <a:ext cx="9174175" cy="4663440"/>
+            <a:off x="5349240" y="1783080"/>
+            <a:ext cx="6522415" cy="4663440"/>
           </a:xfrm>
           <a:prstGeom prst="rect">
             <a:avLst/>
@@ -13817,7 +13975,7 @@
               <a:buNone/>
             </a:pPr>
             <a:r>
-              <a:rPr lang="en-US" sz="4000" i="1" dirty="0">
+              <a:rPr lang="en-US" sz="4000" dirty="0">
                 <a:solidFill>
                   <a:srgbClr val="111111"/>
                 </a:solidFill>
@@ -13825,81 +13983,7 @@
                 <a:ea typeface="Times New Roman" pitchFamily="34" charset="-122"/>
                 <a:cs typeface="Times New Roman" pitchFamily="34" charset="-120"/>
               </a:rPr>
-              <a:t>The key terms of this lesson are defined as follows:</a:t>
-            </a:r>
-            <a:endParaRPr lang="en-US" sz="4000" dirty="0"/>
-          </a:p>
-          <a:p>
-            <a:pPr algn="l" indent="0" marL="0">
-              <a:spcAft>
-                <a:spcPts val="800"/>
-              </a:spcAft>
-              <a:buNone/>
-            </a:pPr>
-            <a:r>
-              <a:rPr lang="en-US" sz="4000" b="1" dirty="0">
-                <a:solidFill>
-                  <a:srgbClr val="111111"/>
-                </a:solidFill>
-                <a:latin typeface="Times New Roman" pitchFamily="34" charset="0"/>
-                <a:ea typeface="Times New Roman" pitchFamily="34" charset="-122"/>
-                <a:cs typeface="Times New Roman" pitchFamily="34" charset="-120"/>
-              </a:rPr>
-              <a:t>Erosion: </a:t>
-            </a:r>
-            <a:pPr algn="l" indent="0" marL="0">
-              <a:spcAft>
-                <a:spcPts val="800"/>
-              </a:spcAft>
-              <a:buNone/>
-            </a:pPr>
-            <a:r>
-              <a:rPr lang="en-US" sz="4000" dirty="0">
-                <a:solidFill>
-                  <a:srgbClr val="111111"/>
-                </a:solidFill>
-                <a:latin typeface="Times New Roman" pitchFamily="34" charset="0"/>
-                <a:ea typeface="Times New Roman" pitchFamily="34" charset="-122"/>
-                <a:cs typeface="Times New Roman" pitchFamily="34" charset="-120"/>
-              </a:rPr>
-              <a:t>It is the wearing away and removal of rock and soil by agents such as rivers, wind, waves and ice.</a:t>
-            </a:r>
-            <a:endParaRPr lang="en-US" sz="4000" dirty="0"/>
-          </a:p>
-          <a:p>
-            <a:pPr algn="l" indent="0" marL="0">
-              <a:spcAft>
-                <a:spcPts val="800"/>
-              </a:spcAft>
-              <a:buNone/>
-            </a:pPr>
-            <a:r>
-              <a:rPr lang="en-US" sz="4000" b="1" dirty="0">
-                <a:solidFill>
-                  <a:srgbClr val="111111"/>
-                </a:solidFill>
-                <a:latin typeface="Times New Roman" pitchFamily="34" charset="0"/>
-                <a:ea typeface="Times New Roman" pitchFamily="34" charset="-122"/>
-                <a:cs typeface="Times New Roman" pitchFamily="34" charset="-120"/>
-              </a:rPr>
-              <a:t>Competence: </a:t>
-            </a:r>
-            <a:pPr algn="l" indent="0" marL="0">
-              <a:spcAft>
-                <a:spcPts val="800"/>
-              </a:spcAft>
-              <a:buNone/>
-            </a:pPr>
-            <a:r>
-              <a:rPr lang="en-US" sz="4000" dirty="0">
-                <a:solidFill>
-                  <a:srgbClr val="111111"/>
-                </a:solidFill>
-                <a:latin typeface="Times New Roman" pitchFamily="34" charset="0"/>
-                <a:ea typeface="Times New Roman" pitchFamily="34" charset="-122"/>
-                <a:cs typeface="Times New Roman" pitchFamily="34" charset="-120"/>
-              </a:rPr>
-              <a:t>It is the size of the largest particle a river can carry.</a:t>
+              <a:t>The heaviest (boulders and pebbles).</a:t>
             </a:r>
             <a:endParaRPr lang="en-US" sz="4000" dirty="0"/>
           </a:p>
@@ -14076,7 +14160,7 @@
                 <a:ea typeface="Times New Roman" pitchFamily="34" charset="-122"/>
                 <a:cs typeface="Times New Roman" pitchFamily="34" charset="-120"/>
               </a:rPr>
-              <a:t>DEFINITIONS (continued)</a:t>
+              <a:t>Board Summary</a:t>
             </a:r>
             <a:endParaRPr lang="en-US" sz="3600" dirty="0"/>
           </a:p>
@@ -14110,7 +14194,7 @@
               <a:buNone/>
             </a:pPr>
             <a:r>
-              <a:rPr lang="en-US" sz="4000" b="1" dirty="0">
+              <a:rPr lang="en-US" sz="3200" b="1" dirty="0">
                 <a:solidFill>
                   <a:srgbClr val="111111"/>
                 </a:solidFill>
@@ -14118,8 +14202,11 @@
                 <a:ea typeface="Times New Roman" pitchFamily="34" charset="-122"/>
                 <a:cs typeface="Times New Roman" pitchFamily="34" charset="-120"/>
               </a:rPr>
-              <a:t>Capacity: </a:t>
-            </a:r>
+              <a:t>Topic: Denudational Processes on Slopes</a:t>
+            </a:r>
+            <a:endParaRPr lang="en-US" sz="3200" dirty="0"/>
+          </a:p>
+          <a:p>
             <a:pPr algn="l" indent="0" marL="0">
               <a:spcAft>
                 <a:spcPts val="800"/>
@@ -14127,7 +14214,7 @@
               <a:buNone/>
             </a:pPr>
             <a:r>
-              <a:rPr lang="en-US" sz="4000" dirty="0">
+              <a:rPr lang="en-US" sz="3200" b="1" dirty="0">
                 <a:solidFill>
                   <a:srgbClr val="111111"/>
                 </a:solidFill>
@@ -14135,9 +14222,29 @@
                 <a:ea typeface="Times New Roman" pitchFamily="34" charset="-122"/>
                 <a:cs typeface="Times New Roman" pitchFamily="34" charset="-120"/>
               </a:rPr>
-              <a:t>It is the total amount of load a river can carry.</a:t>
-            </a:r>
-            <a:endParaRPr lang="en-US" sz="4000" dirty="0"/>
+              <a:t>Sub-topic: Erosion and Depositional Processes and Landforms</a:t>
+            </a:r>
+            <a:endParaRPr lang="en-US" sz="3200" dirty="0"/>
+          </a:p>
+          <a:p>
+            <a:pPr algn="l" indent="0" marL="0">
+              <a:spcAft>
+                <a:spcPts val="800"/>
+              </a:spcAft>
+              <a:buNone/>
+            </a:pPr>
+            <a:r>
+              <a:rPr lang="en-US" sz="3200" b="1" dirty="0">
+                <a:solidFill>
+                  <a:srgbClr val="990011"/>
+                </a:solidFill>
+                <a:latin typeface="Times New Roman" pitchFamily="34" charset="0"/>
+                <a:ea typeface="Times New Roman" pitchFamily="34" charset="-122"/>
+                <a:cs typeface="Times New Roman" pitchFamily="34" charset="-120"/>
+              </a:rPr>
+              <a:t>Lesson 14: Erosional Processes and the Fluvial System</a:t>
+            </a:r>
+            <a:endParaRPr lang="en-US" sz="3200" dirty="0"/>
           </a:p>
         </p:txBody>
       </p:sp>
@@ -14270,7 +14377,7 @@
         <p:spPr>
           <a:xfrm>
             <a:off x="0" y="658368"/>
-            <a:ext cx="1463040" cy="5833872"/>
+            <a:ext cx="3840480" cy="5833872"/>
           </a:xfrm>
           <a:prstGeom prst="rect">
             <a:avLst/>
@@ -14285,8 +14392,8 @@
         </p:nvSpPr>
         <p:spPr>
           <a:xfrm>
-            <a:off x="1691640" y="1005840"/>
-            <a:ext cx="10180015" cy="731520"/>
+            <a:off x="4069080" y="1005840"/>
+            <a:ext cx="7802575" cy="731520"/>
           </a:xfrm>
           <a:prstGeom prst="rect">
             <a:avLst/>
@@ -14312,7 +14419,7 @@
                 <a:ea typeface="Times New Roman" pitchFamily="34" charset="-122"/>
                 <a:cs typeface="Times New Roman" pitchFamily="34" charset="-120"/>
               </a:rPr>
-              <a:t>1. Erosional Processes</a:t>
+              <a:t>DEFINITIONS</a:t>
             </a:r>
             <a:endParaRPr lang="en-US" sz="3600" dirty="0"/>
           </a:p>
@@ -14326,8 +14433,8 @@
         </p:nvSpPr>
         <p:spPr>
           <a:xfrm>
-            <a:off x="1691640" y="1783080"/>
-            <a:ext cx="10180015" cy="4663440"/>
+            <a:off x="4069080" y="1783080"/>
+            <a:ext cx="7802575" cy="4663440"/>
           </a:xfrm>
           <a:prstGeom prst="rect">
             <a:avLst/>
@@ -14354,7 +14461,7 @@
                 <a:ea typeface="Times New Roman" pitchFamily="34" charset="-122"/>
                 <a:cs typeface="Times New Roman" pitchFamily="34" charset="-120"/>
               </a:rPr>
-              <a:t>Rivers erode by the following processes:</a:t>
+              <a:t>The key terms of this lesson are defined as follows:</a:t>
             </a:r>
             <a:endParaRPr lang="en-US" sz="4000" dirty="0"/>
           </a:p>
@@ -14374,7 +14481,7 @@
                 <a:ea typeface="Times New Roman" pitchFamily="34" charset="-122"/>
                 <a:cs typeface="Times New Roman" pitchFamily="34" charset="-120"/>
               </a:rPr>
-              <a:t>Hydraulic action: </a:t>
+              <a:t>River system: </a:t>
             </a:r>
             <a:pPr algn="l" indent="0" marL="0">
               <a:spcAft>
@@ -14391,7 +14498,7 @@
                 <a:ea typeface="Times New Roman" pitchFamily="34" charset="-122"/>
                 <a:cs typeface="Times New Roman" pitchFamily="34" charset="-120"/>
               </a:rPr>
-              <a:t>The force of water pushes into cracks and breaks rocks. It is strongest at waterfalls and in floods.</a:t>
+              <a:t>It is a river seen as an open system with inputs, processes and outputs.</a:t>
             </a:r>
             <a:endParaRPr lang="en-US" sz="4000" dirty="0"/>
           </a:p>
@@ -14411,7 +14518,7 @@
                 <a:ea typeface="Times New Roman" pitchFamily="34" charset="-122"/>
                 <a:cs typeface="Times New Roman" pitchFamily="34" charset="-120"/>
               </a:rPr>
-              <a:t>Abrasion (corrasion): </a:t>
+              <a:t>Load: </a:t>
             </a:r>
             <a:pPr algn="l" indent="0" marL="0">
               <a:spcAft>
@@ -14428,7 +14535,7 @@
                 <a:ea typeface="Times New Roman" pitchFamily="34" charset="-122"/>
                 <a:cs typeface="Times New Roman" pitchFamily="34" charset="-120"/>
               </a:rPr>
-              <a:t>Stones carried by the river scrape the bed and banks. It deepens and widens the channel.</a:t>
+              <a:t>It is the material carried by a river.</a:t>
             </a:r>
             <a:endParaRPr lang="en-US" sz="4000" dirty="0"/>
           </a:p>
@@ -14605,7 +14712,7 @@
                 <a:ea typeface="Times New Roman" pitchFamily="34" charset="-122"/>
                 <a:cs typeface="Times New Roman" pitchFamily="34" charset="-120"/>
               </a:rPr>
-              <a:t>1. Erosional Processes (continued)</a:t>
+              <a:t>DEFINITIONS (continued)</a:t>
             </a:r>
             <a:endParaRPr lang="en-US" sz="3600" dirty="0"/>
           </a:p>
@@ -14647,7 +14754,7 @@
                 <a:ea typeface="Times New Roman" pitchFamily="34" charset="-122"/>
                 <a:cs typeface="Times New Roman" pitchFamily="34" charset="-120"/>
               </a:rPr>
-              <a:t>Attrition and solution: </a:t>
+              <a:t>Deposition: </a:t>
             </a:r>
             <a:pPr algn="l" indent="0" marL="0">
               <a:spcAft>
@@ -14664,7 +14771,7 @@
                 <a:ea typeface="Times New Roman" pitchFamily="34" charset="-122"/>
                 <a:cs typeface="Times New Roman" pitchFamily="34" charset="-120"/>
               </a:rPr>
-              <a:t>In attrition, stones hit each other and become smaller and rounder. In solution, water dissolves rocks such as limestone.</a:t>
+              <a:t>It is the dropping of the load when a river loses energy.</a:t>
             </a:r>
             <a:endParaRPr lang="en-US" sz="4000" dirty="0"/>
           </a:p>
@@ -14790,8 +14897,8 @@
         </p:nvSpPr>
         <p:spPr>
           <a:xfrm>
-            <a:off x="457200" y="1005840"/>
-            <a:ext cx="11277295" cy="731520"/>
+            <a:off x="365760" y="1005840"/>
+            <a:ext cx="11460175" cy="731520"/>
           </a:xfrm>
           <a:prstGeom prst="rect">
             <a:avLst/>
@@ -14800,7 +14907,9 @@
           <a:ln/>
         </p:spPr>
         <p:txBody>
-          <a:bodyPr wrap="square" lIns="0" tIns="0" rIns="0" bIns="0" rtlCol="0" anchor="ctr"/>
+          <a:bodyPr wrap="square" lIns="0" tIns="0" rIns="0" bIns="0" rtlCol="0" anchor="ctr">
+            <a:normAutofit/>
+          </a:bodyPr>
           <a:lstStyle/>
           <a:p>
             <a:pPr algn="ctr" indent="0" marL="0">
@@ -14815,7 +14924,86 @@
                 <a:ea typeface="Times New Roman" pitchFamily="34" charset="-122"/>
                 <a:cs typeface="Times New Roman" pitchFamily="34" charset="-120"/>
               </a:rPr>
-              <a:t>1. Erosional Processes</a:t>
+              <a:t>1. The River as a System</a:t>
+            </a:r>
+            <a:endParaRPr lang="en-US" sz="3600" dirty="0"/>
+          </a:p>
+        </p:txBody>
+      </p:sp>
+      <p:sp>
+        <p:nvSpPr>
+          <p:cNvPr id="4" name="Text 2"/>
+          <p:cNvSpPr/>
+          <p:nvPr/>
+        </p:nvSpPr>
+        <p:spPr>
+          <a:xfrm>
+            <a:off x="365760" y="1783080"/>
+            <a:ext cx="4846320" cy="4617720"/>
+          </a:xfrm>
+          <a:prstGeom prst="rect">
+            <a:avLst/>
+          </a:prstGeom>
+          <a:noFill/>
+          <a:ln/>
+        </p:spPr>
+        <p:txBody>
+          <a:bodyPr wrap="square" lIns="0" tIns="0" rIns="0" bIns="0" rtlCol="0" anchor="t"/>
+          <a:lstStyle/>
+          <a:p>
+            <a:pPr algn="l" indent="0" marL="0">
+              <a:spcAft>
+                <a:spcPts val="800"/>
+              </a:spcAft>
+              <a:buNone/>
+            </a:pPr>
+            <a:r>
+              <a:rPr lang="en-US" sz="3600" i="1" dirty="0">
+                <a:solidFill>
+                  <a:srgbClr val="111111"/>
+                </a:solidFill>
+                <a:latin typeface="Times New Roman" pitchFamily="34" charset="0"/>
+                <a:ea typeface="Times New Roman" pitchFamily="34" charset="-122"/>
+                <a:cs typeface="Times New Roman" pitchFamily="34" charset="-120"/>
+              </a:rPr>
+              <a:t>The river works as a system as follows:</a:t>
+            </a:r>
+            <a:endParaRPr lang="en-US" sz="3600" dirty="0"/>
+          </a:p>
+          <a:p>
+            <a:pPr algn="l" indent="0" marL="0">
+              <a:spcAft>
+                <a:spcPts val="800"/>
+              </a:spcAft>
+              <a:buNone/>
+            </a:pPr>
+            <a:r>
+              <a:rPr lang="en-US" sz="3600" b="1" dirty="0">
+                <a:solidFill>
+                  <a:srgbClr val="111111"/>
+                </a:solidFill>
+                <a:latin typeface="Times New Roman" pitchFamily="34" charset="0"/>
+                <a:ea typeface="Times New Roman" pitchFamily="34" charset="-122"/>
+                <a:cs typeface="Times New Roman" pitchFamily="34" charset="-120"/>
+              </a:rPr>
+              <a:t>Inputs: </a:t>
+            </a:r>
+            <a:pPr algn="l" indent="0" marL="0">
+              <a:spcAft>
+                <a:spcPts val="800"/>
+              </a:spcAft>
+              <a:buNone/>
+            </a:pPr>
+            <a:r>
+              <a:rPr lang="en-US" sz="3600" dirty="0">
+                <a:solidFill>
+                  <a:srgbClr val="111111"/>
+                </a:solidFill>
+                <a:latin typeface="Times New Roman" pitchFamily="34" charset="0"/>
+                <a:ea typeface="Times New Roman" pitchFamily="34" charset="-122"/>
+                <a:cs typeface="Times New Roman" pitchFamily="34" charset="-120"/>
+              </a:rPr>
+              <a:t>Rainwater, springs and sediments from the valley slopes enter the river.</a:t>
             </a:r>
             <a:endParaRPr lang="en-US" sz="3600" dirty="0"/>
           </a:p>
@@ -14823,7 +15011,7 @@
       </p:sp>
       <p:pic>
         <p:nvPicPr>
-          <p:cNvPr id="4" name="Image 0" descr="/home/claude/f4/img/v2/river_erosion_big.png">    </p:cNvPr>
+          <p:cNvPr id="5" name="Image 0" descr="/home/claude/f4/img/v2/open_system_big.png">    </p:cNvPr>
           <p:cNvPicPr>
             <a:picLocks noChangeAspect="1"/>
           </p:cNvPicPr>
@@ -14837,8 +15025,8 @@
         </p:blipFill>
         <p:spPr>
           <a:xfrm>
-            <a:off x="629930" y="1783080"/>
-            <a:ext cx="10931835" cy="4270248"/>
+            <a:off x="5349240" y="2617506"/>
+            <a:ext cx="6659575" cy="2601397"/>
           </a:xfrm>
           <a:prstGeom prst="rect">
             <a:avLst/>
@@ -14847,14 +15035,14 @@
       </p:pic>
       <p:sp>
         <p:nvSpPr>
-          <p:cNvPr id="5" name="Text 2"/>
+          <p:cNvPr id="6" name="Text 3"/>
           <p:cNvSpPr/>
           <p:nvPr/>
         </p:nvSpPr>
         <p:spPr>
           <a:xfrm>
-            <a:off x="457200" y="6089904"/>
-            <a:ext cx="11277295" cy="347472"/>
+            <a:off x="5349240" y="6089904"/>
+            <a:ext cx="6659575" cy="347472"/>
           </a:xfrm>
           <a:prstGeom prst="rect">
             <a:avLst/>
@@ -14870,7 +15058,7 @@
               <a:buNone/>
             </a:pPr>
             <a:r>
-              <a:rPr lang="en-US" sz="1800" i="1" dirty="0">
+              <a:rPr lang="en-US" sz="1600" i="1" dirty="0">
                 <a:solidFill>
                   <a:srgbClr val="555555"/>
                 </a:solidFill>
@@ -14878,9 +15066,9 @@
                 <a:ea typeface="Times New Roman" pitchFamily="34" charset="-122"/>
                 <a:cs typeface="Times New Roman" pitchFamily="34" charset="-120"/>
               </a:rPr>
-              <a:t>Illustration: processes of river erosion</a:t>
-            </a:r>
-            <a:endParaRPr lang="en-US" sz="1800" dirty="0"/>
+              <a:t>Illustration: an open system</a:t>
+            </a:r>
+            <a:endParaRPr lang="en-US" sz="1600" dirty="0"/>
           </a:p>
         </p:txBody>
       </p:sp>
@@ -15013,7 +15201,7 @@
         <p:spPr>
           <a:xfrm>
             <a:off x="0" y="658368"/>
-            <a:ext cx="3840480" cy="5833872"/>
+            <a:ext cx="5120640" cy="5833872"/>
           </a:xfrm>
           <a:prstGeom prst="rect">
             <a:avLst/>
@@ -15028,8 +15216,8 @@
         </p:nvSpPr>
         <p:spPr>
           <a:xfrm>
-            <a:off x="4069080" y="1005840"/>
-            <a:ext cx="7802575" cy="731520"/>
+            <a:off x="5349240" y="1005840"/>
+            <a:ext cx="6522415" cy="731520"/>
           </a:xfrm>
           <a:prstGeom prst="rect">
             <a:avLst/>
@@ -15055,7 +15243,7 @@
                 <a:ea typeface="Times New Roman" pitchFamily="34" charset="-122"/>
                 <a:cs typeface="Times New Roman" pitchFamily="34" charset="-120"/>
               </a:rPr>
-              <a:t>2. Transportation</a:t>
+              <a:t>1. The River as a System</a:t>
             </a:r>
             <a:endParaRPr lang="en-US" sz="3600" dirty="0"/>
           </a:p>
@@ -15069,8 +15257,8 @@
         </p:nvSpPr>
         <p:spPr>
           <a:xfrm>
-            <a:off x="4069080" y="1783080"/>
-            <a:ext cx="7802575" cy="4663440"/>
+            <a:off x="5349240" y="1783080"/>
+            <a:ext cx="6522415" cy="4663440"/>
           </a:xfrm>
           <a:prstGeom prst="rect">
             <a:avLst/>
@@ -15089,7 +15277,7 @@
               <a:buNone/>
             </a:pPr>
             <a:r>
-              <a:rPr lang="en-US" sz="4000" i="1" dirty="0">
+              <a:rPr lang="en-US" sz="4000" b="1" dirty="0">
                 <a:solidFill>
                   <a:srgbClr val="111111"/>
                 </a:solidFill>
@@ -15097,11 +15285,8 @@
                 <a:ea typeface="Times New Roman" pitchFamily="34" charset="-122"/>
                 <a:cs typeface="Times New Roman" pitchFamily="34" charset="-120"/>
               </a:rPr>
-              <a:t>The load of a river is transported as follows:</a:t>
-            </a:r>
-            <a:endParaRPr lang="en-US" sz="4000" dirty="0"/>
-          </a:p>
-          <a:p>
+              <a:t>Processes: </a:t>
+            </a:r>
             <a:pPr algn="l" indent="0" marL="0">
               <a:spcAft>
                 <a:spcPts val="800"/>
@@ -15109,7 +15294,7 @@
               <a:buNone/>
             </a:pPr>
             <a:r>
-              <a:rPr lang="en-US" sz="4000" b="1" dirty="0">
+              <a:rPr lang="en-US" sz="4000" dirty="0">
                 <a:solidFill>
                   <a:srgbClr val="111111"/>
                 </a:solidFill>
@@ -15117,8 +15302,11 @@
                 <a:ea typeface="Times New Roman" pitchFamily="34" charset="-122"/>
                 <a:cs typeface="Times New Roman" pitchFamily="34" charset="-120"/>
               </a:rPr>
-              <a:t>Sources and types of load: </a:t>
-            </a:r>
+              <a:t>The river erodes, transports and deposits.</a:t>
+            </a:r>
+            <a:endParaRPr lang="en-US" sz="4000" dirty="0"/>
+          </a:p>
+          <a:p>
             <a:pPr algn="l" indent="0" marL="0">
               <a:spcAft>
                 <a:spcPts val="800"/>
@@ -15126,7 +15314,7 @@
               <a:buNone/>
             </a:pPr>
             <a:r>
-              <a:rPr lang="en-US" sz="4000" dirty="0">
+              <a:rPr lang="en-US" sz="4000" b="1" dirty="0">
                 <a:solidFill>
                   <a:srgbClr val="111111"/>
                 </a:solidFill>
@@ -15134,7 +15322,24 @@
                 <a:ea typeface="Times New Roman" pitchFamily="34" charset="-122"/>
                 <a:cs typeface="Times New Roman" pitchFamily="34" charset="-120"/>
               </a:rPr>
-              <a:t>Load comes from weathering, mass movement and bank erosion. It is carried as bed load, suspended load and dissolved load.</a:t>
+              <a:t>Outputs: </a:t>
+            </a:r>
+            <a:pPr algn="l" indent="0" marL="0">
+              <a:spcAft>
+                <a:spcPts val="800"/>
+              </a:spcAft>
+              <a:buNone/>
+            </a:pPr>
+            <a:r>
+              <a:rPr lang="en-US" sz="4000" dirty="0">
+                <a:solidFill>
+                  <a:srgbClr val="111111"/>
+                </a:solidFill>
+                <a:latin typeface="Times New Roman" pitchFamily="34" charset="0"/>
+                <a:ea typeface="Times New Roman" pitchFamily="34" charset="-122"/>
+                <a:cs typeface="Times New Roman" pitchFamily="34" charset="-120"/>
+              </a:rPr>
+              <a:t>Water and sediments flow out into a larger river, a lake or the sea; the Benue flows into the Niger.</a:t>
             </a:r>
             <a:endParaRPr lang="en-US" sz="4000" dirty="0"/>
           </a:p>
@@ -15373,7 +15578,7 @@
                 <a:ea typeface="Times New Roman" pitchFamily="34" charset="-122"/>
                 <a:cs typeface="Times New Roman" pitchFamily="34" charset="-120"/>
               </a:rPr>
-              <a:t>Observe the Benue or a stream after rain. What does the water carry? Write three things.</a:t>
+              <a:t>Name the three types of work of a river.</a:t>
             </a:r>
             <a:endParaRPr lang="en-US" sz="4000" dirty="0"/>
           </a:p>
@@ -15491,9 +15696,129 @@
           </a:p>
         </p:txBody>
       </p:sp>
+      <p:sp>
+        <p:nvSpPr>
+          <p:cNvPr id="3" name="Text 1"/>
+          <p:cNvSpPr/>
+          <p:nvPr/>
+        </p:nvSpPr>
+        <p:spPr>
+          <a:xfrm>
+            <a:off x="365760" y="1005840"/>
+            <a:ext cx="11460175" cy="731520"/>
+          </a:xfrm>
+          <a:prstGeom prst="rect">
+            <a:avLst/>
+          </a:prstGeom>
+          <a:noFill/>
+          <a:ln/>
+        </p:spPr>
+        <p:txBody>
+          <a:bodyPr wrap="square" lIns="0" tIns="0" rIns="0" bIns="0" rtlCol="0" anchor="ctr">
+            <a:normAutofit/>
+          </a:bodyPr>
+          <a:lstStyle/>
+          <a:p>
+            <a:pPr algn="ctr" indent="0" marL="0">
+              <a:buNone/>
+            </a:pPr>
+            <a:r>
+              <a:rPr lang="en-US" sz="3600" b="1" dirty="0">
+                <a:solidFill>
+                  <a:srgbClr val="990011"/>
+                </a:solidFill>
+                <a:latin typeface="Times New Roman" pitchFamily="34" charset="0"/>
+                <a:ea typeface="Times New Roman" pitchFamily="34" charset="-122"/>
+                <a:cs typeface="Times New Roman" pitchFamily="34" charset="-120"/>
+              </a:rPr>
+              <a:t>2. River Erosion</a:t>
+            </a:r>
+            <a:endParaRPr lang="en-US" sz="3600" dirty="0"/>
+          </a:p>
+        </p:txBody>
+      </p:sp>
+      <p:sp>
+        <p:nvSpPr>
+          <p:cNvPr id="4" name="Text 2"/>
+          <p:cNvSpPr/>
+          <p:nvPr/>
+        </p:nvSpPr>
+        <p:spPr>
+          <a:xfrm>
+            <a:off x="365760" y="1783080"/>
+            <a:ext cx="4846320" cy="4617720"/>
+          </a:xfrm>
+          <a:prstGeom prst="rect">
+            <a:avLst/>
+          </a:prstGeom>
+          <a:noFill/>
+          <a:ln/>
+        </p:spPr>
+        <p:txBody>
+          <a:bodyPr wrap="square" lIns="0" tIns="0" rIns="0" bIns="0" rtlCol="0" anchor="t"/>
+          <a:lstStyle/>
+          <a:p>
+            <a:pPr algn="l" indent="0" marL="0">
+              <a:spcAft>
+                <a:spcPts val="800"/>
+              </a:spcAft>
+              <a:buNone/>
+            </a:pPr>
+            <a:r>
+              <a:rPr lang="en-US" sz="3200" i="1" dirty="0">
+                <a:solidFill>
+                  <a:srgbClr val="111111"/>
+                </a:solidFill>
+                <a:latin typeface="Times New Roman" pitchFamily="34" charset="0"/>
+                <a:ea typeface="Times New Roman" pitchFamily="34" charset="-122"/>
+                <a:cs typeface="Times New Roman" pitchFamily="34" charset="-120"/>
+              </a:rPr>
+              <a:t>A river erodes its bed and banks by the following processes:</a:t>
+            </a:r>
+            <a:endParaRPr lang="en-US" sz="3200" dirty="0"/>
+          </a:p>
+          <a:p>
+            <a:pPr algn="l" indent="0" marL="0">
+              <a:spcAft>
+                <a:spcPts val="800"/>
+              </a:spcAft>
+              <a:buNone/>
+            </a:pPr>
+            <a:r>
+              <a:rPr lang="en-US" sz="3200" b="1" dirty="0">
+                <a:solidFill>
+                  <a:srgbClr val="111111"/>
+                </a:solidFill>
+                <a:latin typeface="Times New Roman" pitchFamily="34" charset="0"/>
+                <a:ea typeface="Times New Roman" pitchFamily="34" charset="-122"/>
+                <a:cs typeface="Times New Roman" pitchFamily="34" charset="-120"/>
+              </a:rPr>
+              <a:t>Hydraulic action: </a:t>
+            </a:r>
+            <a:pPr algn="l" indent="0" marL="0">
+              <a:spcAft>
+                <a:spcPts val="800"/>
+              </a:spcAft>
+              <a:buNone/>
+            </a:pPr>
+            <a:r>
+              <a:rPr lang="en-US" sz="3200" dirty="0">
+                <a:solidFill>
+                  <a:srgbClr val="111111"/>
+                </a:solidFill>
+                <a:latin typeface="Times New Roman" pitchFamily="34" charset="0"/>
+                <a:ea typeface="Times New Roman" pitchFamily="34" charset="-122"/>
+                <a:cs typeface="Times New Roman" pitchFamily="34" charset="-120"/>
+              </a:rPr>
+              <a:t>The force of the water hits the bed and banks and compresses air in cracks, breaking pieces off.</a:t>
+            </a:r>
+            <a:endParaRPr lang="en-US" sz="3200" dirty="0"/>
+          </a:p>
+        </p:txBody>
+      </p:sp>
       <p:pic>
         <p:nvPicPr>
-          <p:cNvPr id="3" name="Image 0" descr="/home/claude/f4/img/minesec_sheet.png">    </p:cNvPr>
+          <p:cNvPr id="5" name="Image 0" descr="/home/claude/f4/img/v2/river_erosion_big.png">    </p:cNvPr>
           <p:cNvPicPr>
             <a:picLocks noChangeAspect="1"/>
           </p:cNvPicPr>
@@ -15507,8 +15832,8 @@
         </p:blipFill>
         <p:spPr>
           <a:xfrm>
-            <a:off x="0" y="658368"/>
-            <a:ext cx="5120640" cy="5833872"/>
+            <a:off x="5349240" y="2617506"/>
+            <a:ext cx="6659575" cy="2601397"/>
           </a:xfrm>
           <a:prstGeom prst="rect">
             <a:avLst/>
@@ -15517,14 +15842,14 @@
       </p:pic>
       <p:sp>
         <p:nvSpPr>
-          <p:cNvPr id="4" name="Text 1"/>
+          <p:cNvPr id="6" name="Text 3"/>
           <p:cNvSpPr/>
           <p:nvPr/>
         </p:nvSpPr>
         <p:spPr>
           <a:xfrm>
-            <a:off x="5349240" y="1005840"/>
-            <a:ext cx="6522415" cy="731520"/>
+            <a:off x="5349240" y="6089904"/>
+            <a:ext cx="6659575" cy="347472"/>
           </a:xfrm>
           <a:prstGeom prst="rect">
             <a:avLst/>
@@ -15533,85 +15858,24 @@
           <a:ln/>
         </p:spPr>
         <p:txBody>
-          <a:bodyPr wrap="square" lIns="0" tIns="0" rIns="0" bIns="0" rtlCol="0" anchor="ctr">
-            <a:normAutofit/>
-          </a:bodyPr>
+          <a:bodyPr wrap="square" lIns="0" tIns="0" rIns="0" bIns="0" rtlCol="0" anchor="ctr"/>
           <a:lstStyle/>
           <a:p>
             <a:pPr algn="ctr" indent="0" marL="0">
               <a:buNone/>
             </a:pPr>
             <a:r>
-              <a:rPr lang="en-US" sz="3600" b="1" dirty="0">
-                <a:solidFill>
-                  <a:srgbClr val="990011"/>
+              <a:rPr lang="en-US" sz="1600" i="1" dirty="0">
+                <a:solidFill>
+                  <a:srgbClr val="555555"/>
                 </a:solidFill>
                 <a:latin typeface="Times New Roman" pitchFamily="34" charset="0"/>
                 <a:ea typeface="Times New Roman" pitchFamily="34" charset="-122"/>
                 <a:cs typeface="Times New Roman" pitchFamily="34" charset="-120"/>
               </a:rPr>
-              <a:t>2. Transportation (continued)</a:t>
-            </a:r>
-            <a:endParaRPr lang="en-US" sz="3600" dirty="0"/>
-          </a:p>
-        </p:txBody>
-      </p:sp>
-      <p:sp>
-        <p:nvSpPr>
-          <p:cNvPr id="5" name="Text 2"/>
-          <p:cNvSpPr/>
-          <p:nvPr/>
-        </p:nvSpPr>
-        <p:spPr>
-          <a:xfrm>
-            <a:off x="5349240" y="1783080"/>
-            <a:ext cx="6522415" cy="4663440"/>
-          </a:xfrm>
-          <a:prstGeom prst="rect">
-            <a:avLst/>
-          </a:prstGeom>
-          <a:noFill/>
-          <a:ln/>
-        </p:spPr>
-        <p:txBody>
-          <a:bodyPr wrap="square" lIns="0" tIns="0" rIns="0" bIns="0" rtlCol="0" anchor="t"/>
-          <a:lstStyle/>
-          <a:p>
-            <a:pPr algn="l" indent="0" marL="0">
-              <a:spcAft>
-                <a:spcPts val="800"/>
-              </a:spcAft>
-              <a:buNone/>
-            </a:pPr>
-            <a:r>
-              <a:rPr lang="en-US" sz="4000" b="1" dirty="0">
-                <a:solidFill>
-                  <a:srgbClr val="111111"/>
-                </a:solidFill>
-                <a:latin typeface="Times New Roman" pitchFamily="34" charset="0"/>
-                <a:ea typeface="Times New Roman" pitchFamily="34" charset="-122"/>
-                <a:cs typeface="Times New Roman" pitchFamily="34" charset="-120"/>
-              </a:rPr>
-              <a:t>Processes: </a:t>
-            </a:r>
-            <a:pPr algn="l" indent="0" marL="0">
-              <a:spcAft>
-                <a:spcPts val="800"/>
-              </a:spcAft>
-              <a:buNone/>
-            </a:pPr>
-            <a:r>
-              <a:rPr lang="en-US" sz="4000" dirty="0">
-                <a:solidFill>
-                  <a:srgbClr val="111111"/>
-                </a:solidFill>
-                <a:latin typeface="Times New Roman" pitchFamily="34" charset="0"/>
-                <a:ea typeface="Times New Roman" pitchFamily="34" charset="-122"/>
-                <a:cs typeface="Times New Roman" pitchFamily="34" charset="-120"/>
-              </a:rPr>
-              <a:t>Large stones roll (traction), smaller ones bounce (saltation), fine clay floats (suspension) and minerals are dissolved (solution). Speed decides which process works.</a:t>
-            </a:r>
-            <a:endParaRPr lang="en-US" sz="4000" dirty="0"/>
+              <a:t>Illustration: the four processes</a:t>
+            </a:r>
+            <a:endParaRPr lang="en-US" sz="1600" dirty="0"/>
           </a:p>
         </p:txBody>
       </p:sp>
@@ -15744,7 +16008,7 @@
         <p:spPr>
           <a:xfrm>
             <a:off x="0" y="658368"/>
-            <a:ext cx="3840480" cy="5833872"/>
+            <a:ext cx="1463040" cy="5833872"/>
           </a:xfrm>
           <a:prstGeom prst="rect">
             <a:avLst/>
@@ -15759,8 +16023,8 @@
         </p:nvSpPr>
         <p:spPr>
           <a:xfrm>
-            <a:off x="4069080" y="1005840"/>
-            <a:ext cx="7802575" cy="731520"/>
+            <a:off x="1691640" y="1005840"/>
+            <a:ext cx="10180015" cy="731520"/>
           </a:xfrm>
           <a:prstGeom prst="rect">
             <a:avLst/>
@@ -15786,7 +16050,7 @@
                 <a:ea typeface="Times New Roman" pitchFamily="34" charset="-122"/>
                 <a:cs typeface="Times New Roman" pitchFamily="34" charset="-120"/>
               </a:rPr>
-              <a:t>2. Transportation (continued)</a:t>
+              <a:t>2. River Erosion</a:t>
             </a:r>
             <a:endParaRPr lang="en-US" sz="3600" dirty="0"/>
           </a:p>
@@ -15800,8 +16064,8 @@
         </p:nvSpPr>
         <p:spPr>
           <a:xfrm>
-            <a:off x="4069080" y="1783080"/>
-            <a:ext cx="7802575" cy="4663440"/>
+            <a:off x="1691640" y="1783080"/>
+            <a:ext cx="10180015" cy="4663440"/>
           </a:xfrm>
           <a:prstGeom prst="rect">
             <a:avLst/>
@@ -15828,7 +16092,7 @@
                 <a:ea typeface="Times New Roman" pitchFamily="34" charset="-122"/>
                 <a:cs typeface="Times New Roman" pitchFamily="34" charset="-120"/>
               </a:rPr>
-              <a:t>The Hjulström graph: </a:t>
+              <a:t>Abrasion (corrasion): </a:t>
             </a:r>
             <a:pPr algn="l" indent="0" marL="0">
               <a:spcAft>
@@ -15845,7 +16109,81 @@
                 <a:ea typeface="Times New Roman" pitchFamily="34" charset="-122"/>
                 <a:cs typeface="Times New Roman" pitchFamily="34" charset="-120"/>
               </a:rPr>
-              <a:t>It shows the velocity needed to erode, transport and deposit particles of each size. Clay is hard to erode because it sticks together, but once moving it stays in suspension.</a:t>
+              <a:t>The load scrapes and grinds the bed and banks like sandpaper.</a:t>
+            </a:r>
+            <a:endParaRPr lang="en-US" sz="4000" dirty="0"/>
+          </a:p>
+          <a:p>
+            <a:pPr algn="l" indent="0" marL="0">
+              <a:spcAft>
+                <a:spcPts val="800"/>
+              </a:spcAft>
+              <a:buNone/>
+            </a:pPr>
+            <a:r>
+              <a:rPr lang="en-US" sz="4000" b="1" dirty="0">
+                <a:solidFill>
+                  <a:srgbClr val="111111"/>
+                </a:solidFill>
+                <a:latin typeface="Times New Roman" pitchFamily="34" charset="0"/>
+                <a:ea typeface="Times New Roman" pitchFamily="34" charset="-122"/>
+                <a:cs typeface="Times New Roman" pitchFamily="34" charset="-120"/>
+              </a:rPr>
+              <a:t>Attrition: </a:t>
+            </a:r>
+            <a:pPr algn="l" indent="0" marL="0">
+              <a:spcAft>
+                <a:spcPts val="800"/>
+              </a:spcAft>
+              <a:buNone/>
+            </a:pPr>
+            <a:r>
+              <a:rPr lang="en-US" sz="4000" dirty="0">
+                <a:solidFill>
+                  <a:srgbClr val="111111"/>
+                </a:solidFill>
+                <a:latin typeface="Times New Roman" pitchFamily="34" charset="0"/>
+                <a:ea typeface="Times New Roman" pitchFamily="34" charset="-122"/>
+                <a:cs typeface="Times New Roman" pitchFamily="34" charset="-120"/>
+              </a:rPr>
+              <a:t>Stones carried by the river knock against each other and become smaller and rounder.</a:t>
+            </a:r>
+            <a:endParaRPr lang="en-US" sz="4000" dirty="0"/>
+          </a:p>
+          <a:p>
+            <a:pPr algn="l" indent="0" marL="0">
+              <a:spcAft>
+                <a:spcPts val="800"/>
+              </a:spcAft>
+              <a:buNone/>
+            </a:pPr>
+            <a:r>
+              <a:rPr lang="en-US" sz="4000" b="1" dirty="0">
+                <a:solidFill>
+                  <a:srgbClr val="111111"/>
+                </a:solidFill>
+                <a:latin typeface="Times New Roman" pitchFamily="34" charset="0"/>
+                <a:ea typeface="Times New Roman" pitchFamily="34" charset="-122"/>
+                <a:cs typeface="Times New Roman" pitchFamily="34" charset="-120"/>
+              </a:rPr>
+              <a:t>Solution (corrosion): </a:t>
+            </a:r>
+            <a:pPr algn="l" indent="0" marL="0">
+              <a:spcAft>
+                <a:spcPts val="800"/>
+              </a:spcAft>
+              <a:buNone/>
+            </a:pPr>
+            <a:r>
+              <a:rPr lang="en-US" sz="4000" dirty="0">
+                <a:solidFill>
+                  <a:srgbClr val="111111"/>
+                </a:solidFill>
+                <a:latin typeface="Times New Roman" pitchFamily="34" charset="0"/>
+                <a:ea typeface="Times New Roman" pitchFamily="34" charset="-122"/>
+                <a:cs typeface="Times New Roman" pitchFamily="34" charset="-120"/>
+              </a:rPr>
+              <a:t>The water dissolves soluble rocks such as limestone.</a:t>
             </a:r>
             <a:endParaRPr lang="en-US" sz="4000" dirty="0"/>
           </a:p>
@@ -15971,8 +16309,8 @@
         </p:nvSpPr>
         <p:spPr>
           <a:xfrm>
-            <a:off x="457200" y="1005840"/>
-            <a:ext cx="11277295" cy="731520"/>
+            <a:off x="365760" y="1005840"/>
+            <a:ext cx="11460175" cy="731520"/>
           </a:xfrm>
           <a:prstGeom prst="rect">
             <a:avLst/>
@@ -15981,7 +16319,9 @@
           <a:ln/>
         </p:spPr>
         <p:txBody>
-          <a:bodyPr wrap="square" lIns="0" tIns="0" rIns="0" bIns="0" rtlCol="0" anchor="ctr"/>
+          <a:bodyPr wrap="square" lIns="0" tIns="0" rIns="0" bIns="0" rtlCol="0" anchor="ctr">
+            <a:normAutofit/>
+          </a:bodyPr>
           <a:lstStyle/>
           <a:p>
             <a:pPr algn="ctr" indent="0" marL="0">
@@ -15996,7 +16336,86 @@
                 <a:ea typeface="Times New Roman" pitchFamily="34" charset="-122"/>
                 <a:cs typeface="Times New Roman" pitchFamily="34" charset="-120"/>
               </a:rPr>
-              <a:t>2. Transportation</a:t>
+              <a:t>3. River Transportation</a:t>
+            </a:r>
+            <a:endParaRPr lang="en-US" sz="3600" dirty="0"/>
+          </a:p>
+        </p:txBody>
+      </p:sp>
+      <p:sp>
+        <p:nvSpPr>
+          <p:cNvPr id="4" name="Text 2"/>
+          <p:cNvSpPr/>
+          <p:nvPr/>
+        </p:nvSpPr>
+        <p:spPr>
+          <a:xfrm>
+            <a:off x="365760" y="1783080"/>
+            <a:ext cx="4846320" cy="4617720"/>
+          </a:xfrm>
+          <a:prstGeom prst="rect">
+            <a:avLst/>
+          </a:prstGeom>
+          <a:noFill/>
+          <a:ln/>
+        </p:spPr>
+        <p:txBody>
+          <a:bodyPr wrap="square" lIns="0" tIns="0" rIns="0" bIns="0" rtlCol="0" anchor="t"/>
+          <a:lstStyle/>
+          <a:p>
+            <a:pPr algn="l" indent="0" marL="0">
+              <a:spcAft>
+                <a:spcPts val="800"/>
+              </a:spcAft>
+              <a:buNone/>
+            </a:pPr>
+            <a:r>
+              <a:rPr lang="en-US" sz="3600" i="1" dirty="0">
+                <a:solidFill>
+                  <a:srgbClr val="111111"/>
+                </a:solidFill>
+                <a:latin typeface="Times New Roman" pitchFamily="34" charset="0"/>
+                <a:ea typeface="Times New Roman" pitchFamily="34" charset="-122"/>
+                <a:cs typeface="Times New Roman" pitchFamily="34" charset="-120"/>
+              </a:rPr>
+              <a:t>A river carries its load by the following methods:</a:t>
+            </a:r>
+            <a:endParaRPr lang="en-US" sz="3600" dirty="0"/>
+          </a:p>
+          <a:p>
+            <a:pPr algn="l" indent="0" marL="0">
+              <a:spcAft>
+                <a:spcPts val="800"/>
+              </a:spcAft>
+              <a:buNone/>
+            </a:pPr>
+            <a:r>
+              <a:rPr lang="en-US" sz="3600" b="1" dirty="0">
+                <a:solidFill>
+                  <a:srgbClr val="111111"/>
+                </a:solidFill>
+                <a:latin typeface="Times New Roman" pitchFamily="34" charset="0"/>
+                <a:ea typeface="Times New Roman" pitchFamily="34" charset="-122"/>
+                <a:cs typeface="Times New Roman" pitchFamily="34" charset="-120"/>
+              </a:rPr>
+              <a:t>Traction: </a:t>
+            </a:r>
+            <a:pPr algn="l" indent="0" marL="0">
+              <a:spcAft>
+                <a:spcPts val="800"/>
+              </a:spcAft>
+              <a:buNone/>
+            </a:pPr>
+            <a:r>
+              <a:rPr lang="en-US" sz="3600" dirty="0">
+                <a:solidFill>
+                  <a:srgbClr val="111111"/>
+                </a:solidFill>
+                <a:latin typeface="Times New Roman" pitchFamily="34" charset="0"/>
+                <a:ea typeface="Times New Roman" pitchFamily="34" charset="-122"/>
+                <a:cs typeface="Times New Roman" pitchFamily="34" charset="-120"/>
+              </a:rPr>
+              <a:t>The largest boulders roll along the bed.</a:t>
             </a:r>
             <a:endParaRPr lang="en-US" sz="3600" dirty="0"/>
           </a:p>
@@ -16004,7 +16423,7 @@
       </p:sp>
       <p:pic>
         <p:nvPicPr>
-          <p:cNvPr id="4" name="Image 0" descr="/home/claude/f4/img/v2/hjulstrom_big.png">    </p:cNvPr>
+          <p:cNvPr id="5" name="Image 0" descr="/home/claude/f4/img/v2/geo2_transport.png">    </p:cNvPr>
           <p:cNvPicPr>
             <a:picLocks noChangeAspect="1"/>
           </p:cNvPicPr>
@@ -16018,8 +16437,8 @@
         </p:blipFill>
         <p:spPr>
           <a:xfrm>
-            <a:off x="1383850" y="1783080"/>
-            <a:ext cx="9423996" cy="4270248"/>
+            <a:off x="5349240" y="2617506"/>
+            <a:ext cx="6659575" cy="2601397"/>
           </a:xfrm>
           <a:prstGeom prst="rect">
             <a:avLst/>
@@ -16028,14 +16447,14 @@
       </p:pic>
       <p:sp>
         <p:nvSpPr>
-          <p:cNvPr id="5" name="Text 2"/>
+          <p:cNvPr id="6" name="Text 3"/>
           <p:cNvSpPr/>
           <p:nvPr/>
         </p:nvSpPr>
         <p:spPr>
           <a:xfrm>
-            <a:off x="457200" y="6089904"/>
-            <a:ext cx="11277295" cy="347472"/>
+            <a:off x="5349240" y="6089904"/>
+            <a:ext cx="6659575" cy="347472"/>
           </a:xfrm>
           <a:prstGeom prst="rect">
             <a:avLst/>
@@ -16051,7 +16470,7 @@
               <a:buNone/>
             </a:pPr>
             <a:r>
-              <a:rPr lang="en-US" sz="1800" i="1" dirty="0">
+              <a:rPr lang="en-US" sz="1600" i="1" dirty="0">
                 <a:solidFill>
                   <a:srgbClr val="555555"/>
                 </a:solidFill>
@@ -16059,9 +16478,9 @@
                 <a:ea typeface="Times New Roman" pitchFamily="34" charset="-122"/>
                 <a:cs typeface="Times New Roman" pitchFamily="34" charset="-120"/>
               </a:rPr>
-              <a:t>Illustration: the Hjulström graph</a:t>
-            </a:r>
-            <a:endParaRPr lang="en-US" sz="1800" dirty="0"/>
+              <a:t>Illustration: four ways of carrying the load</a:t>
+            </a:r>
+            <a:endParaRPr lang="en-US" sz="1600" dirty="0"/>
           </a:p>
         </p:txBody>
       </p:sp>
@@ -16194,7 +16613,7 @@
         <p:spPr>
           <a:xfrm>
             <a:off x="0" y="658368"/>
-            <a:ext cx="3840480" cy="5833872"/>
+            <a:ext cx="5120640" cy="5833872"/>
           </a:xfrm>
           <a:prstGeom prst="rect">
             <a:avLst/>
@@ -16209,8 +16628,8 @@
         </p:nvSpPr>
         <p:spPr>
           <a:xfrm>
-            <a:off x="4069080" y="1005840"/>
-            <a:ext cx="7802575" cy="731520"/>
+            <a:off x="5349240" y="1005840"/>
+            <a:ext cx="6522415" cy="731520"/>
           </a:xfrm>
           <a:prstGeom prst="rect">
             <a:avLst/>
@@ -16236,7 +16655,7 @@
                 <a:ea typeface="Times New Roman" pitchFamily="34" charset="-122"/>
                 <a:cs typeface="Times New Roman" pitchFamily="34" charset="-120"/>
               </a:rPr>
-              <a:t>3. Deposition and the River as a System</a:t>
+              <a:t>3. River Transportation</a:t>
             </a:r>
             <a:endParaRPr lang="en-US" sz="3600" dirty="0"/>
           </a:p>
@@ -16250,8 +16669,8 @@
         </p:nvSpPr>
         <p:spPr>
           <a:xfrm>
-            <a:off x="4069080" y="1783080"/>
-            <a:ext cx="7802575" cy="4663440"/>
+            <a:off x="5349240" y="1783080"/>
+            <a:ext cx="6522415" cy="4663440"/>
           </a:xfrm>
           <a:prstGeom prst="rect">
             <a:avLst/>
@@ -16270,7 +16689,7 @@
               <a:buNone/>
             </a:pPr>
             <a:r>
-              <a:rPr lang="en-US" sz="4000" i="1" dirty="0">
+              <a:rPr lang="en-US" sz="4000" b="1" dirty="0">
                 <a:solidFill>
                   <a:srgbClr val="111111"/>
                 </a:solidFill>
@@ -16278,11 +16697,8 @@
                 <a:ea typeface="Times New Roman" pitchFamily="34" charset="-122"/>
                 <a:cs typeface="Times New Roman" pitchFamily="34" charset="-120"/>
               </a:rPr>
-              <a:t>Deposition and the fluvial system can be summarised as follows:</a:t>
-            </a:r>
-            <a:endParaRPr lang="en-US" sz="4000" dirty="0"/>
-          </a:p>
-          <a:p>
+              <a:t>Saltation: </a:t>
+            </a:r>
             <a:pPr algn="l" indent="0" marL="0">
               <a:spcAft>
                 <a:spcPts val="800"/>
@@ -16290,7 +16706,7 @@
               <a:buNone/>
             </a:pPr>
             <a:r>
-              <a:rPr lang="en-US" sz="4000" b="1" dirty="0">
+              <a:rPr lang="en-US" sz="4000" dirty="0">
                 <a:solidFill>
                   <a:srgbClr val="111111"/>
                 </a:solidFill>
@@ -16298,24 +16714,7 @@
                 <a:ea typeface="Times New Roman" pitchFamily="34" charset="-122"/>
                 <a:cs typeface="Times New Roman" pitchFamily="34" charset="-120"/>
               </a:rPr>
-              <a:t>Deposition: </a:t>
-            </a:r>
-            <a:pPr algn="l" indent="0" marL="0">
-              <a:spcAft>
-                <a:spcPts val="800"/>
-              </a:spcAft>
-              <a:buNone/>
-            </a:pPr>
-            <a:r>
-              <a:rPr lang="en-US" sz="4000" dirty="0">
-                <a:solidFill>
-                  <a:srgbClr val="111111"/>
-                </a:solidFill>
-                <a:latin typeface="Times New Roman" pitchFamily="34" charset="0"/>
-                <a:ea typeface="Times New Roman" pitchFamily="34" charset="-122"/>
-                <a:cs typeface="Times New Roman" pitchFamily="34" charset="-120"/>
-              </a:rPr>
-              <a:t>A river deposits its load when its velocity falls, for example on the inside of bends, in lakes and at its mouth. Heavy materials are dropped first.</a:t>
+              <a:t>Small pebbles and sand bounce along the bed.</a:t>
             </a:r>
             <a:endParaRPr lang="en-US" sz="4000" dirty="0"/>
           </a:p>
@@ -16433,9 +16832,109 @@
           </a:p>
         </p:txBody>
       </p:sp>
+      <p:sp>
+        <p:nvSpPr>
+          <p:cNvPr id="3" name="Text 1"/>
+          <p:cNvSpPr/>
+          <p:nvPr/>
+        </p:nvSpPr>
+        <p:spPr>
+          <a:xfrm>
+            <a:off x="365760" y="1005840"/>
+            <a:ext cx="11460175" cy="731520"/>
+          </a:xfrm>
+          <a:prstGeom prst="rect">
+            <a:avLst/>
+          </a:prstGeom>
+          <a:noFill/>
+          <a:ln/>
+        </p:spPr>
+        <p:txBody>
+          <a:bodyPr wrap="square" lIns="0" tIns="0" rIns="0" bIns="0" rtlCol="0" anchor="ctr">
+            <a:normAutofit/>
+          </a:bodyPr>
+          <a:lstStyle/>
+          <a:p>
+            <a:pPr algn="ctr" indent="0" marL="0">
+              <a:buNone/>
+            </a:pPr>
+            <a:r>
+              <a:rPr lang="en-US" sz="3600" b="1" dirty="0">
+                <a:solidFill>
+                  <a:srgbClr val="990011"/>
+                </a:solidFill>
+                <a:latin typeface="Times New Roman" pitchFamily="34" charset="0"/>
+                <a:ea typeface="Times New Roman" pitchFamily="34" charset="-122"/>
+                <a:cs typeface="Times New Roman" pitchFamily="34" charset="-120"/>
+              </a:rPr>
+              <a:t>3. River Transportation</a:t>
+            </a:r>
+            <a:endParaRPr lang="en-US" sz="3600" dirty="0"/>
+          </a:p>
+        </p:txBody>
+      </p:sp>
+      <p:sp>
+        <p:nvSpPr>
+          <p:cNvPr id="4" name="Text 2"/>
+          <p:cNvSpPr/>
+          <p:nvPr/>
+        </p:nvSpPr>
+        <p:spPr>
+          <a:xfrm>
+            <a:off x="365760" y="1783080"/>
+            <a:ext cx="4846320" cy="4617720"/>
+          </a:xfrm>
+          <a:prstGeom prst="rect">
+            <a:avLst/>
+          </a:prstGeom>
+          <a:noFill/>
+          <a:ln/>
+        </p:spPr>
+        <p:txBody>
+          <a:bodyPr wrap="square" lIns="0" tIns="0" rIns="0" bIns="0" rtlCol="0" anchor="t"/>
+          <a:lstStyle/>
+          <a:p>
+            <a:pPr algn="l" indent="0" marL="0">
+              <a:spcAft>
+                <a:spcPts val="800"/>
+              </a:spcAft>
+              <a:buNone/>
+            </a:pPr>
+            <a:r>
+              <a:rPr lang="en-US" sz="3600" b="1" dirty="0">
+                <a:solidFill>
+                  <a:srgbClr val="111111"/>
+                </a:solidFill>
+                <a:latin typeface="Times New Roman" pitchFamily="34" charset="0"/>
+                <a:ea typeface="Times New Roman" pitchFamily="34" charset="-122"/>
+                <a:cs typeface="Times New Roman" pitchFamily="34" charset="-120"/>
+              </a:rPr>
+              <a:t>Suspension: </a:t>
+            </a:r>
+            <a:pPr algn="l" indent="0" marL="0">
+              <a:spcAft>
+                <a:spcPts val="800"/>
+              </a:spcAft>
+              <a:buNone/>
+            </a:pPr>
+            <a:r>
+              <a:rPr lang="en-US" sz="3600" dirty="0">
+                <a:solidFill>
+                  <a:srgbClr val="111111"/>
+                </a:solidFill>
+                <a:latin typeface="Times New Roman" pitchFamily="34" charset="0"/>
+                <a:ea typeface="Times New Roman" pitchFamily="34" charset="-122"/>
+                <a:cs typeface="Times New Roman" pitchFamily="34" charset="-120"/>
+              </a:rPr>
+              <a:t>Silt and clay are carried within the water, making it brown; this is the largest part of the load.</a:t>
+            </a:r>
+            <a:endParaRPr lang="en-US" sz="3600" dirty="0"/>
+          </a:p>
+        </p:txBody>
+      </p:sp>
       <p:pic>
         <p:nvPicPr>
-          <p:cNvPr id="3" name="Image 0" descr="/home/claude/f4/img/minesec_sheet.png">    </p:cNvPr>
+          <p:cNvPr id="5" name="Image 0" descr="/home/claude/f4/img/v2/f4_muddyriver.jpg">    </p:cNvPr>
           <p:cNvPicPr>
             <a:picLocks noChangeAspect="1"/>
           </p:cNvPicPr>
@@ -16449,8 +16948,8 @@
         </p:blipFill>
         <p:spPr>
           <a:xfrm>
-            <a:off x="0" y="658368"/>
-            <a:ext cx="5120640" cy="5833872"/>
+            <a:off x="5349240" y="2069407"/>
+            <a:ext cx="6659575" cy="3697594"/>
           </a:xfrm>
           <a:prstGeom prst="rect">
             <a:avLst/>
@@ -16459,14 +16958,14 @@
       </p:pic>
       <p:sp>
         <p:nvSpPr>
-          <p:cNvPr id="4" name="Text 1"/>
+          <p:cNvPr id="6" name="Text 3"/>
           <p:cNvSpPr/>
           <p:nvPr/>
         </p:nvSpPr>
         <p:spPr>
           <a:xfrm>
-            <a:off x="5349240" y="1005840"/>
-            <a:ext cx="6522415" cy="731520"/>
+            <a:off x="5349240" y="6089904"/>
+            <a:ext cx="6659575" cy="347472"/>
           </a:xfrm>
           <a:prstGeom prst="rect">
             <a:avLst/>
@@ -16475,85 +16974,24 @@
           <a:ln/>
         </p:spPr>
         <p:txBody>
-          <a:bodyPr wrap="square" lIns="0" tIns="0" rIns="0" bIns="0" rtlCol="0" anchor="ctr">
-            <a:normAutofit/>
-          </a:bodyPr>
+          <a:bodyPr wrap="square" lIns="0" tIns="0" rIns="0" bIns="0" rtlCol="0" anchor="ctr"/>
           <a:lstStyle/>
           <a:p>
             <a:pPr algn="ctr" indent="0" marL="0">
               <a:buNone/>
             </a:pPr>
             <a:r>
-              <a:rPr lang="en-US" sz="3600" b="1" dirty="0">
-                <a:solidFill>
-                  <a:srgbClr val="990011"/>
+              <a:rPr lang="en-US" sz="1600" i="1" dirty="0">
+                <a:solidFill>
+                  <a:srgbClr val="555555"/>
                 </a:solidFill>
                 <a:latin typeface="Times New Roman" pitchFamily="34" charset="0"/>
                 <a:ea typeface="Times New Roman" pitchFamily="34" charset="-122"/>
                 <a:cs typeface="Times New Roman" pitchFamily="34" charset="-120"/>
               </a:rPr>
-              <a:t>3. Deposition and the River as a System (continued)</a:t>
-            </a:r>
-            <a:endParaRPr lang="en-US" sz="3600" dirty="0"/>
-          </a:p>
-        </p:txBody>
-      </p:sp>
-      <p:sp>
-        <p:nvSpPr>
-          <p:cNvPr id="5" name="Text 2"/>
-          <p:cNvSpPr/>
-          <p:nvPr/>
-        </p:nvSpPr>
-        <p:spPr>
-          <a:xfrm>
-            <a:off x="5349240" y="1783080"/>
-            <a:ext cx="6522415" cy="4663440"/>
-          </a:xfrm>
-          <a:prstGeom prst="rect">
-            <a:avLst/>
-          </a:prstGeom>
-          <a:noFill/>
-          <a:ln/>
-        </p:spPr>
-        <p:txBody>
-          <a:bodyPr wrap="square" lIns="0" tIns="0" rIns="0" bIns="0" rtlCol="0" anchor="t"/>
-          <a:lstStyle/>
-          <a:p>
-            <a:pPr algn="l" indent="0" marL="0">
-              <a:spcAft>
-                <a:spcPts val="800"/>
-              </a:spcAft>
-              <a:buNone/>
-            </a:pPr>
-            <a:r>
-              <a:rPr lang="en-US" sz="4000" b="1" dirty="0">
-                <a:solidFill>
-                  <a:srgbClr val="111111"/>
-                </a:solidFill>
-                <a:latin typeface="Times New Roman" pitchFamily="34" charset="0"/>
-                <a:ea typeface="Times New Roman" pitchFamily="34" charset="-122"/>
-                <a:cs typeface="Times New Roman" pitchFamily="34" charset="-120"/>
-              </a:rPr>
-              <a:t>The river as a system: </a:t>
-            </a:r>
-            <a:pPr algn="l" indent="0" marL="0">
-              <a:spcAft>
-                <a:spcPts val="800"/>
-              </a:spcAft>
-              <a:buNone/>
-            </a:pPr>
-            <a:r>
-              <a:rPr lang="en-US" sz="4000" dirty="0">
-                <a:solidFill>
-                  <a:srgbClr val="111111"/>
-                </a:solidFill>
-                <a:latin typeface="Times New Roman" pitchFamily="34" charset="0"/>
-                <a:ea typeface="Times New Roman" pitchFamily="34" charset="-122"/>
-                <a:cs typeface="Times New Roman" pitchFamily="34" charset="-120"/>
-              </a:rPr>
-              <a:t>Inputs are precipitation, load and energy; processes in the channel are erosion, transport and deposition. Outputs are water, sediment and energy to the sea.</a:t>
-            </a:r>
-            <a:endParaRPr lang="en-US" sz="4000" dirty="0"/>
+              <a:t>Illustration: a muddy river</a:t>
+            </a:r>
+            <a:endParaRPr lang="en-US" sz="1600" dirty="0"/>
           </a:p>
         </p:txBody>
       </p:sp>
@@ -16728,7 +17166,7 @@
                 <a:ea typeface="Times New Roman" pitchFamily="34" charset="-122"/>
                 <a:cs typeface="Times New Roman" pitchFamily="34" charset="-120"/>
               </a:rPr>
-              <a:t>3. Deposition and the River as a System (continued)</a:t>
+              <a:t>3. River Transportation</a:t>
             </a:r>
             <a:endParaRPr lang="en-US" sz="3600" dirty="0"/>
           </a:p>
@@ -16770,7 +17208,7 @@
                 <a:ea typeface="Times New Roman" pitchFamily="34" charset="-122"/>
                 <a:cs typeface="Times New Roman" pitchFamily="34" charset="-120"/>
               </a:rPr>
-              <a:t>Functions of rivers: </a:t>
+              <a:t>Solution: </a:t>
             </a:r>
             <a:pPr algn="l" indent="0" marL="0">
               <a:spcAft>
@@ -16787,7 +17225,7 @@
                 <a:ea typeface="Times New Roman" pitchFamily="34" charset="-122"/>
                 <a:cs typeface="Times New Roman" pitchFamily="34" charset="-120"/>
               </a:rPr>
-              <a:t>Rivers shape valleys, floodplains and deltas. They also support ecosystems, recharge groundwater and supply fertile silt.</a:t>
+              <a:t>Dissolved minerals are carried invisibly.</a:t>
             </a:r>
             <a:endParaRPr lang="en-US" sz="4000" dirty="0"/>
           </a:p>
@@ -16899,15 +17337,135 @@
                 <a:ea typeface="Calibri" pitchFamily="34" charset="-122"/>
                 <a:cs typeface="Calibri" pitchFamily="34" charset="-120"/>
               </a:rPr>
-              <a:t>FORMATIVE EVALUATION</a:t>
+              <a:t>BOARD SUMMARY</a:t>
             </a:r>
             <a:endParaRPr lang="en-US" sz="1400" dirty="0"/>
+          </a:p>
+        </p:txBody>
+      </p:sp>
+      <p:sp>
+        <p:nvSpPr>
+          <p:cNvPr id="3" name="Text 1"/>
+          <p:cNvSpPr/>
+          <p:nvPr/>
+        </p:nvSpPr>
+        <p:spPr>
+          <a:xfrm>
+            <a:off x="365760" y="1005840"/>
+            <a:ext cx="11460175" cy="731520"/>
+          </a:xfrm>
+          <a:prstGeom prst="rect">
+            <a:avLst/>
+          </a:prstGeom>
+          <a:noFill/>
+          <a:ln/>
+        </p:spPr>
+        <p:txBody>
+          <a:bodyPr wrap="square" lIns="0" tIns="0" rIns="0" bIns="0" rtlCol="0" anchor="ctr">
+            <a:normAutofit/>
+          </a:bodyPr>
+          <a:lstStyle/>
+          <a:p>
+            <a:pPr algn="ctr" indent="0" marL="0">
+              <a:buNone/>
+            </a:pPr>
+            <a:r>
+              <a:rPr lang="en-US" sz="3600" b="1" dirty="0">
+                <a:solidFill>
+                  <a:srgbClr val="990011"/>
+                </a:solidFill>
+                <a:latin typeface="Times New Roman" pitchFamily="34" charset="0"/>
+                <a:ea typeface="Times New Roman" pitchFamily="34" charset="-122"/>
+                <a:cs typeface="Times New Roman" pitchFamily="34" charset="-120"/>
+              </a:rPr>
+              <a:t>4. River Deposition</a:t>
+            </a:r>
+            <a:endParaRPr lang="en-US" sz="3600" dirty="0"/>
+          </a:p>
+        </p:txBody>
+      </p:sp>
+      <p:sp>
+        <p:nvSpPr>
+          <p:cNvPr id="4" name="Text 2"/>
+          <p:cNvSpPr/>
+          <p:nvPr/>
+        </p:nvSpPr>
+        <p:spPr>
+          <a:xfrm>
+            <a:off x="365760" y="1783080"/>
+            <a:ext cx="4846320" cy="4617720"/>
+          </a:xfrm>
+          <a:prstGeom prst="rect">
+            <a:avLst/>
+          </a:prstGeom>
+          <a:noFill/>
+          <a:ln/>
+        </p:spPr>
+        <p:txBody>
+          <a:bodyPr wrap="square" lIns="0" tIns="0" rIns="0" bIns="0" rtlCol="0" anchor="t"/>
+          <a:lstStyle/>
+          <a:p>
+            <a:pPr algn="l" indent="0" marL="0">
+              <a:spcAft>
+                <a:spcPts val="800"/>
+              </a:spcAft>
+              <a:buNone/>
+            </a:pPr>
+            <a:r>
+              <a:rPr lang="en-US" sz="3600" i="1" dirty="0">
+                <a:solidFill>
+                  <a:srgbClr val="111111"/>
+                </a:solidFill>
+                <a:latin typeface="Times New Roman" pitchFamily="34" charset="0"/>
+                <a:ea typeface="Times New Roman" pitchFamily="34" charset="-122"/>
+                <a:cs typeface="Times New Roman" pitchFamily="34" charset="-120"/>
+              </a:rPr>
+              <a:t>A river deposits its load in the following conditions:</a:t>
+            </a:r>
+            <a:endParaRPr lang="en-US" sz="3600" dirty="0"/>
+          </a:p>
+          <a:p>
+            <a:pPr algn="l" indent="0" marL="0">
+              <a:spcAft>
+                <a:spcPts val="800"/>
+              </a:spcAft>
+              <a:buNone/>
+            </a:pPr>
+            <a:r>
+              <a:rPr lang="en-US" sz="3600" b="1" dirty="0">
+                <a:solidFill>
+                  <a:srgbClr val="111111"/>
+                </a:solidFill>
+                <a:latin typeface="Times New Roman" pitchFamily="34" charset="0"/>
+                <a:ea typeface="Times New Roman" pitchFamily="34" charset="-122"/>
+                <a:cs typeface="Times New Roman" pitchFamily="34" charset="-120"/>
+              </a:rPr>
+              <a:t>Loss of energy: </a:t>
+            </a:r>
+            <a:pPr algn="l" indent="0" marL="0">
+              <a:spcAft>
+                <a:spcPts val="800"/>
+              </a:spcAft>
+              <a:buNone/>
+            </a:pPr>
+            <a:r>
+              <a:rPr lang="en-US" sz="3600" dirty="0">
+                <a:solidFill>
+                  <a:srgbClr val="111111"/>
+                </a:solidFill>
+                <a:latin typeface="Times New Roman" pitchFamily="34" charset="0"/>
+                <a:ea typeface="Times New Roman" pitchFamily="34" charset="-122"/>
+                <a:cs typeface="Times New Roman" pitchFamily="34" charset="-120"/>
+              </a:rPr>
+              <a:t>Deposition happens when velocity falls, and the heaviest material is dropped first.</a:t>
+            </a:r>
+            <a:endParaRPr lang="en-US" sz="3600" dirty="0"/>
           </a:p>
         </p:txBody>
       </p:sp>
       <p:pic>
         <p:nvPicPr>
-          <p:cNvPr id="3" name="Image 0" descr="/home/claude/f4/img/minesec_sheet.png">    </p:cNvPr>
+          <p:cNvPr id="5" name="Image 0" descr="/home/claude/f4/img/v2/load_mid.png">    </p:cNvPr>
           <p:cNvPicPr>
             <a:picLocks noChangeAspect="1"/>
           </p:cNvPicPr>
@@ -16921,8 +17479,8 @@
         </p:blipFill>
         <p:spPr>
           <a:xfrm>
-            <a:off x="0" y="658368"/>
-            <a:ext cx="5120640" cy="5833872"/>
+            <a:off x="5349240" y="2617506"/>
+            <a:ext cx="6659575" cy="2601397"/>
           </a:xfrm>
           <a:prstGeom prst="rect">
             <a:avLst/>
@@ -16931,14 +17489,14 @@
       </p:pic>
       <p:sp>
         <p:nvSpPr>
-          <p:cNvPr id="4" name="Text 1"/>
+          <p:cNvPr id="6" name="Text 3"/>
           <p:cNvSpPr/>
           <p:nvPr/>
         </p:nvSpPr>
         <p:spPr>
           <a:xfrm>
-            <a:off x="5349240" y="1005840"/>
-            <a:ext cx="6522415" cy="731520"/>
+            <a:off x="5349240" y="6089904"/>
+            <a:ext cx="6659575" cy="347472"/>
           </a:xfrm>
           <a:prstGeom prst="rect">
             <a:avLst/>
@@ -16947,68 +17505,24 @@
           <a:ln/>
         </p:spPr>
         <p:txBody>
-          <a:bodyPr wrap="square" lIns="0" tIns="0" rIns="0" bIns="0" rtlCol="0" anchor="ctr">
-            <a:normAutofit/>
-          </a:bodyPr>
+          <a:bodyPr wrap="square" lIns="0" tIns="0" rIns="0" bIns="0" rtlCol="0" anchor="ctr"/>
           <a:lstStyle/>
           <a:p>
             <a:pPr algn="ctr" indent="0" marL="0">
               <a:buNone/>
             </a:pPr>
             <a:r>
-              <a:rPr lang="en-US" sz="3600" b="1" dirty="0">
-                <a:solidFill>
-                  <a:srgbClr val="990011"/>
+              <a:rPr lang="en-US" sz="1600" i="1" dirty="0">
+                <a:solidFill>
+                  <a:srgbClr val="555555"/>
                 </a:solidFill>
                 <a:latin typeface="Times New Roman" pitchFamily="34" charset="0"/>
                 <a:ea typeface="Times New Roman" pitchFamily="34" charset="-122"/>
                 <a:cs typeface="Times New Roman" pitchFamily="34" charset="-120"/>
               </a:rPr>
-              <a:t>Evaluation 1</a:t>
-            </a:r>
-            <a:endParaRPr lang="en-US" sz="3600" dirty="0"/>
-          </a:p>
-        </p:txBody>
-      </p:sp>
-      <p:sp>
-        <p:nvSpPr>
-          <p:cNvPr id="5" name="Text 2"/>
-          <p:cNvSpPr/>
-          <p:nvPr/>
-        </p:nvSpPr>
-        <p:spPr>
-          <a:xfrm>
-            <a:off x="5349240" y="1783080"/>
-            <a:ext cx="6522415" cy="4663440"/>
-          </a:xfrm>
-          <a:prstGeom prst="rect">
-            <a:avLst/>
-          </a:prstGeom>
-          <a:noFill/>
-          <a:ln/>
-        </p:spPr>
-        <p:txBody>
-          <a:bodyPr wrap="square" lIns="0" tIns="0" rIns="0" bIns="0" rtlCol="0" anchor="t"/>
-          <a:lstStyle/>
-          <a:p>
-            <a:pPr algn="l" indent="0" marL="0">
-              <a:spcAft>
-                <a:spcPts val="800"/>
-              </a:spcAft>
-              <a:buNone/>
-            </a:pPr>
-            <a:r>
-              <a:rPr lang="en-US" sz="4000" dirty="0">
-                <a:solidFill>
-                  <a:srgbClr val="111111"/>
-                </a:solidFill>
-                <a:latin typeface="Times New Roman" pitchFamily="34" charset="0"/>
-                <a:ea typeface="Times New Roman" pitchFamily="34" charset="-122"/>
-                <a:cs typeface="Times New Roman" pitchFamily="34" charset="-120"/>
-              </a:rPr>
-              <a:t>Distinguish competence and capacity.</a:t>
-            </a:r>
-            <a:endParaRPr lang="en-US" sz="4000" dirty="0"/>
+              <a:t>Illustration: the load settles</a:t>
+            </a:r>
+            <a:endParaRPr lang="en-US" sz="1600" dirty="0"/>
           </a:p>
         </p:txBody>
       </p:sp>
@@ -17118,7 +17632,7 @@
                 <a:ea typeface="Calibri" pitchFamily="34" charset="-122"/>
                 <a:cs typeface="Calibri" pitchFamily="34" charset="-120"/>
               </a:rPr>
-              <a:t>FORMATIVE EVALUATION</a:t>
+              <a:t>BOARD SUMMARY</a:t>
             </a:r>
             <a:endParaRPr lang="en-US" sz="1400" dirty="0"/>
           </a:p>
@@ -17141,7 +17655,7 @@
         <p:spPr>
           <a:xfrm>
             <a:off x="0" y="658368"/>
-            <a:ext cx="5120640" cy="5833872"/>
+            <a:ext cx="2468880" cy="5833872"/>
           </a:xfrm>
           <a:prstGeom prst="rect">
             <a:avLst/>
@@ -17156,8 +17670,8 @@
         </p:nvSpPr>
         <p:spPr>
           <a:xfrm>
-            <a:off x="5349240" y="1005840"/>
-            <a:ext cx="6522415" cy="731520"/>
+            <a:off x="2697480" y="1005840"/>
+            <a:ext cx="9174175" cy="731520"/>
           </a:xfrm>
           <a:prstGeom prst="rect">
             <a:avLst/>
@@ -17183,7 +17697,7 @@
                 <a:ea typeface="Times New Roman" pitchFamily="34" charset="-122"/>
                 <a:cs typeface="Times New Roman" pitchFamily="34" charset="-120"/>
               </a:rPr>
-              <a:t>Expected Answer</a:t>
+              <a:t>4. River Deposition</a:t>
             </a:r>
             <a:endParaRPr lang="en-US" sz="3600" dirty="0"/>
           </a:p>
@@ -17197,8 +17711,8 @@
         </p:nvSpPr>
         <p:spPr>
           <a:xfrm>
-            <a:off x="5349240" y="1783080"/>
-            <a:ext cx="6522415" cy="4663440"/>
+            <a:off x="2697480" y="1783080"/>
+            <a:ext cx="9174175" cy="4663440"/>
           </a:xfrm>
           <a:prstGeom prst="rect">
             <a:avLst/>
@@ -17217,7 +17731,7 @@
               <a:buNone/>
             </a:pPr>
             <a:r>
-              <a:rPr lang="en-US" sz="4000" dirty="0">
+              <a:rPr lang="en-US" sz="4000" b="1" dirty="0">
                 <a:solidFill>
                   <a:srgbClr val="111111"/>
                 </a:solidFill>
@@ -17225,7 +17739,98 @@
                 <a:ea typeface="Times New Roman" pitchFamily="34" charset="-122"/>
                 <a:cs typeface="Times New Roman" pitchFamily="34" charset="-120"/>
               </a:rPr>
-              <a:t>Competence is the largest particle carried; capacity is the total load.</a:t>
+              <a:t>Less water: </a:t>
+            </a:r>
+            <a:pPr algn="l" indent="0" marL="0">
+              <a:spcAft>
+                <a:spcPts val="800"/>
+              </a:spcAft>
+              <a:buNone/>
+            </a:pPr>
+            <a:r>
+              <a:rPr lang="en-US" sz="4000" dirty="0">
+                <a:solidFill>
+                  <a:srgbClr val="111111"/>
+                </a:solidFill>
+                <a:latin typeface="Times New Roman" pitchFamily="34" charset="0"/>
+                <a:ea typeface="Times New Roman" pitchFamily="34" charset="-122"/>
+                <a:cs typeface="Times New Roman" pitchFamily="34" charset="-120"/>
+              </a:rPr>
+              <a:t>The volume falls in the dry season, so the Benue leaves sandbanks.</a:t>
+            </a:r>
+            <a:endParaRPr lang="en-US" sz="4000" dirty="0"/>
+          </a:p>
+          <a:p>
+            <a:pPr algn="l" indent="0" marL="0">
+              <a:spcAft>
+                <a:spcPts val="800"/>
+              </a:spcAft>
+              <a:buNone/>
+            </a:pPr>
+            <a:r>
+              <a:rPr lang="en-US" sz="4000" b="1" dirty="0">
+                <a:solidFill>
+                  <a:srgbClr val="111111"/>
+                </a:solidFill>
+                <a:latin typeface="Times New Roman" pitchFamily="34" charset="0"/>
+                <a:ea typeface="Times New Roman" pitchFamily="34" charset="-122"/>
+                <a:cs typeface="Times New Roman" pitchFamily="34" charset="-120"/>
+              </a:rPr>
+              <a:t>Flat land: </a:t>
+            </a:r>
+            <a:pPr algn="l" indent="0" marL="0">
+              <a:spcAft>
+                <a:spcPts val="800"/>
+              </a:spcAft>
+              <a:buNone/>
+            </a:pPr>
+            <a:r>
+              <a:rPr lang="en-US" sz="4000" dirty="0">
+                <a:solidFill>
+                  <a:srgbClr val="111111"/>
+                </a:solidFill>
+                <a:latin typeface="Times New Roman" pitchFamily="34" charset="0"/>
+                <a:ea typeface="Times New Roman" pitchFamily="34" charset="-122"/>
+                <a:cs typeface="Times New Roman" pitchFamily="34" charset="-120"/>
+              </a:rPr>
+              <a:t>The river enters a gentle plain and slows down.</a:t>
+            </a:r>
+            <a:endParaRPr lang="en-US" sz="4000" dirty="0"/>
+          </a:p>
+          <a:p>
+            <a:pPr algn="l" indent="0" marL="0">
+              <a:spcAft>
+                <a:spcPts val="800"/>
+              </a:spcAft>
+              <a:buNone/>
+            </a:pPr>
+            <a:r>
+              <a:rPr lang="en-US" sz="4000" b="1" dirty="0">
+                <a:solidFill>
+                  <a:srgbClr val="111111"/>
+                </a:solidFill>
+                <a:latin typeface="Times New Roman" pitchFamily="34" charset="0"/>
+                <a:ea typeface="Times New Roman" pitchFamily="34" charset="-122"/>
+                <a:cs typeface="Times New Roman" pitchFamily="34" charset="-120"/>
+              </a:rPr>
+              <a:t>Lakes and seas: </a:t>
+            </a:r>
+            <a:pPr algn="l" indent="0" marL="0">
+              <a:spcAft>
+                <a:spcPts val="800"/>
+              </a:spcAft>
+              <a:buNone/>
+            </a:pPr>
+            <a:r>
+              <a:rPr lang="en-US" sz="4000" dirty="0">
+                <a:solidFill>
+                  <a:srgbClr val="111111"/>
+                </a:solidFill>
+                <a:latin typeface="Times New Roman" pitchFamily="34" charset="0"/>
+                <a:ea typeface="Times New Roman" pitchFamily="34" charset="-122"/>
+                <a:cs typeface="Times New Roman" pitchFamily="34" charset="-120"/>
+              </a:rPr>
+              <a:t>The river enters still water, as the Benue enters the Lagdo reservoir.</a:t>
             </a:r>
             <a:endParaRPr lang="en-US" sz="4000" dirty="0"/>
           </a:p>
@@ -17402,7 +18007,7 @@
                 <a:ea typeface="Times New Roman" pitchFamily="34" charset="-122"/>
                 <a:cs typeface="Times New Roman" pitchFamily="34" charset="-120"/>
               </a:rPr>
-              <a:t>Evaluation 2</a:t>
+              <a:t>Evaluation 1</a:t>
             </a:r>
             <a:endParaRPr lang="en-US" sz="3600" dirty="0"/>
           </a:p>
@@ -17444,7 +18049,7 @@
                 <a:ea typeface="Times New Roman" pitchFamily="34" charset="-122"/>
                 <a:cs typeface="Times New Roman" pitchFamily="34" charset="-120"/>
               </a:rPr>
-              <a:t>Name the four types of transport.</a:t>
+              <a:t>Distinguish abrasion from attrition.</a:t>
             </a:r>
             <a:endParaRPr lang="en-US" sz="4000" dirty="0"/>
           </a:p>
@@ -17663,7 +18268,7 @@
                 <a:ea typeface="Times New Roman" pitchFamily="34" charset="-122"/>
                 <a:cs typeface="Times New Roman" pitchFamily="34" charset="-120"/>
               </a:rPr>
-              <a:t>Traction, saltation, suspension, solution.</a:t>
+              <a:t>Abrasion is the scraping of the bed and banks by the load; attrition is the collision of stones that makes them smaller and rounder.</a:t>
             </a:r>
             <a:endParaRPr lang="en-US" sz="4000" dirty="0"/>
           </a:p>
@@ -17882,7 +18487,7 @@
                 <a:ea typeface="Times New Roman" pitchFamily="34" charset="-122"/>
                 <a:cs typeface="Times New Roman" pitchFamily="34" charset="-120"/>
               </a:rPr>
-              <a:t>After rain, the river carries mud (suspended load), sand and pebbles rolling on the bed (bed load), and dissolved minerals (solution); also leaves and rubbish.</a:t>
+              <a:t>Erosion, transportation and deposition.</a:t>
             </a:r>
             <a:endParaRPr lang="en-US" sz="4000" dirty="0"/>
           </a:p>
@@ -17994,7 +18599,7 @@
                 <a:ea typeface="Calibri" pitchFamily="34" charset="-122"/>
                 <a:cs typeface="Calibri" pitchFamily="34" charset="-120"/>
               </a:rPr>
-              <a:t>REMEDIATION</a:t>
+              <a:t>FORMATIVE EVALUATION</a:t>
             </a:r>
             <a:endParaRPr lang="en-US" sz="1400" dirty="0"/>
           </a:p>
@@ -18017,7 +18622,7 @@
         <p:spPr>
           <a:xfrm>
             <a:off x="0" y="658368"/>
-            <a:ext cx="1463040" cy="5833872"/>
+            <a:ext cx="5120640" cy="5833872"/>
           </a:xfrm>
           <a:prstGeom prst="rect">
             <a:avLst/>
@@ -18032,8 +18637,8 @@
         </p:nvSpPr>
         <p:spPr>
           <a:xfrm>
-            <a:off x="1691640" y="1005840"/>
-            <a:ext cx="10180015" cy="731520"/>
+            <a:off x="5349240" y="1005840"/>
+            <a:ext cx="6522415" cy="731520"/>
           </a:xfrm>
           <a:prstGeom prst="rect">
             <a:avLst/>
@@ -18059,7 +18664,7 @@
                 <a:ea typeface="Times New Roman" pitchFamily="34" charset="-122"/>
                 <a:cs typeface="Times New Roman" pitchFamily="34" charset="-120"/>
               </a:rPr>
-              <a:t>Remediation</a:t>
+              <a:t>Evaluation 2</a:t>
             </a:r>
             <a:endParaRPr lang="en-US" sz="3600" dirty="0"/>
           </a:p>
@@ -18073,8 +18678,8 @@
         </p:nvSpPr>
         <p:spPr>
           <a:xfrm>
-            <a:off x="1691640" y="1783080"/>
-            <a:ext cx="10180015" cy="4663440"/>
+            <a:off x="5349240" y="1783080"/>
+            <a:ext cx="6522415" cy="4663440"/>
           </a:xfrm>
           <a:prstGeom prst="rect">
             <a:avLst/>
@@ -18093,7 +18698,7 @@
               <a:buNone/>
             </a:pPr>
             <a:r>
-              <a:rPr lang="en-US" sz="4000" b="1" dirty="0">
+              <a:rPr lang="en-US" sz="4000" dirty="0">
                 <a:solidFill>
                   <a:srgbClr val="111111"/>
                 </a:solidFill>
@@ -18101,73 +18706,7 @@
                 <a:ea typeface="Times New Roman" pitchFamily="34" charset="-122"/>
                 <a:cs typeface="Times New Roman" pitchFamily="34" charset="-120"/>
               </a:rPr>
-              <a:t>Fill in the blanks:</a:t>
-            </a:r>
-            <a:endParaRPr lang="en-US" sz="4000" dirty="0"/>
-          </a:p>
-          <a:p>
-            <a:pPr algn="l" marL="342900" indent="-342900">
-              <a:spcAft>
-                <a:spcPts val="800"/>
-              </a:spcAft>
-              <a:buSzPct val="100000"/>
-              <a:buFont typeface="+mj-lt"/>
-              <a:buAutoNum type="arabicPeriod" startAt="1"/>
-            </a:pPr>
-            <a:r>
-              <a:rPr lang="en-US" sz="4000" dirty="0">
-                <a:solidFill>
-                  <a:srgbClr val="111111"/>
-                </a:solidFill>
-                <a:latin typeface="Times New Roman" pitchFamily="34" charset="0"/>
-                <a:ea typeface="Times New Roman" pitchFamily="34" charset="-122"/>
-                <a:cs typeface="Times New Roman" pitchFamily="34" charset="-120"/>
-              </a:rPr>
-              <a:t>Stones rolled on the bed move by ______.</a:t>
-            </a:r>
-            <a:endParaRPr lang="en-US" sz="4000" dirty="0"/>
-          </a:p>
-          <a:p>
-            <a:pPr algn="l" marL="342900" indent="-342900">
-              <a:spcAft>
-                <a:spcPts val="800"/>
-              </a:spcAft>
-              <a:buSzPct val="100000"/>
-              <a:buFont typeface="+mj-lt"/>
-              <a:buAutoNum type="arabicPeriod" startAt="1"/>
-            </a:pPr>
-            <a:r>
-              <a:rPr lang="en-US" sz="4000" dirty="0">
-                <a:solidFill>
-                  <a:srgbClr val="111111"/>
-                </a:solidFill>
-                <a:latin typeface="Times New Roman" pitchFamily="34" charset="0"/>
-                <a:ea typeface="Times New Roman" pitchFamily="34" charset="-122"/>
-                <a:cs typeface="Times New Roman" pitchFamily="34" charset="-120"/>
-              </a:rPr>
-              <a:t>Sand bouncing on the bed moves by ______.</a:t>
-            </a:r>
-            <a:endParaRPr lang="en-US" sz="4000" dirty="0"/>
-          </a:p>
-          <a:p>
-            <a:pPr algn="l" marL="342900" indent="-342900">
-              <a:spcAft>
-                <a:spcPts val="800"/>
-              </a:spcAft>
-              <a:buSzPct val="100000"/>
-              <a:buFont typeface="+mj-lt"/>
-              <a:buAutoNum type="arabicPeriod" startAt="1"/>
-            </a:pPr>
-            <a:r>
-              <a:rPr lang="en-US" sz="4000" dirty="0">
-                <a:solidFill>
-                  <a:srgbClr val="111111"/>
-                </a:solidFill>
-                <a:latin typeface="Times New Roman" pitchFamily="34" charset="0"/>
-                <a:ea typeface="Times New Roman" pitchFamily="34" charset="-122"/>
-                <a:cs typeface="Times New Roman" pitchFamily="34" charset="-120"/>
-              </a:rPr>
-              <a:t>The total load a river can carry is its ______.</a:t>
+              <a:t>Give two conditions for river deposition.</a:t>
             </a:r>
             <a:endParaRPr lang="en-US" sz="4000" dirty="0"/>
           </a:p>
@@ -18279,7 +18818,7 @@
                 <a:ea typeface="Calibri" pitchFamily="34" charset="-122"/>
                 <a:cs typeface="Calibri" pitchFamily="34" charset="-120"/>
               </a:rPr>
-              <a:t>HOMEWORK</a:t>
+              <a:t>FORMATIVE EVALUATION</a:t>
             </a:r>
             <a:endParaRPr lang="en-US" sz="1400" dirty="0"/>
           </a:p>
@@ -18344,7 +18883,7 @@
                 <a:ea typeface="Times New Roman" pitchFamily="34" charset="-122"/>
                 <a:cs typeface="Times New Roman" pitchFamily="34" charset="-120"/>
               </a:rPr>
-              <a:t>Homework</a:t>
+              <a:t>Expected Answer</a:t>
             </a:r>
             <a:endParaRPr lang="en-US" sz="3600" dirty="0"/>
           </a:p>
@@ -18386,7 +18925,7 @@
                 <a:ea typeface="Times New Roman" pitchFamily="34" charset="-122"/>
                 <a:cs typeface="Times New Roman" pitchFamily="34" charset="-120"/>
               </a:rPr>
-              <a:t>Draw the long profile of a river and mark the upper, middle and lower courses.</a:t>
+              <a:t>Fall in water volume, entry into flat land, entry into a lake or the sea (any two).</a:t>
             </a:r>
             <a:endParaRPr lang="en-US" sz="4000" dirty="0"/>
           </a:p>
@@ -18498,7 +19037,7 @@
                 <a:ea typeface="Calibri" pitchFamily="34" charset="-122"/>
                 <a:cs typeface="Calibri" pitchFamily="34" charset="-120"/>
               </a:rPr>
-              <a:t>NEXT LESSON</a:t>
+              <a:t>REMEDIATION</a:t>
             </a:r>
             <a:endParaRPr lang="en-US" sz="1400" dirty="0"/>
           </a:p>
@@ -18521,7 +19060,7 @@
         <p:spPr>
           <a:xfrm>
             <a:off x="0" y="658368"/>
-            <a:ext cx="5120640" cy="5833872"/>
+            <a:ext cx="2468880" cy="5833872"/>
           </a:xfrm>
           <a:prstGeom prst="rect">
             <a:avLst/>
@@ -18536,8 +19075,8 @@
         </p:nvSpPr>
         <p:spPr>
           <a:xfrm>
-            <a:off x="5349240" y="1005840"/>
-            <a:ext cx="6522415" cy="731520"/>
+            <a:off x="2697480" y="1005840"/>
+            <a:ext cx="9174175" cy="731520"/>
           </a:xfrm>
           <a:prstGeom prst="rect">
             <a:avLst/>
@@ -18563,7 +19102,7 @@
                 <a:ea typeface="Times New Roman" pitchFamily="34" charset="-122"/>
                 <a:cs typeface="Times New Roman" pitchFamily="34" charset="-120"/>
               </a:rPr>
-              <a:t>Next Lesson</a:t>
+              <a:t>Remediation</a:t>
             </a:r>
             <a:endParaRPr lang="en-US" sz="3600" dirty="0"/>
           </a:p>
@@ -18577,8 +19116,8 @@
         </p:nvSpPr>
         <p:spPr>
           <a:xfrm>
-            <a:off x="5349240" y="1783080"/>
-            <a:ext cx="6522415" cy="4663440"/>
+            <a:off x="2697480" y="1783080"/>
+            <a:ext cx="9174175" cy="4663440"/>
           </a:xfrm>
           <a:prstGeom prst="rect">
             <a:avLst/>
@@ -18587,10 +19126,10 @@
           <a:ln/>
         </p:spPr>
         <p:txBody>
-          <a:bodyPr wrap="square" lIns="0" tIns="0" rIns="0" bIns="0" rtlCol="0" anchor="ctr"/>
-          <a:lstStyle/>
-          <a:p>
-            <a:pPr algn="ctr" indent="0" marL="0">
+          <a:bodyPr wrap="square" lIns="0" tIns="0" rIns="0" bIns="0" rtlCol="0" anchor="t"/>
+          <a:lstStyle/>
+          <a:p>
+            <a:pPr algn="l" indent="0" marL="0">
               <a:spcAft>
                 <a:spcPts val="800"/>
               </a:spcAft>
@@ -18605,27 +19144,73 @@
                 <a:ea typeface="Times New Roman" pitchFamily="34" charset="-122"/>
                 <a:cs typeface="Times New Roman" pitchFamily="34" charset="-120"/>
               </a:rPr>
-              <a:t>Our next lesson will be on:</a:t>
+              <a:t>Fill in the blanks:</a:t>
             </a:r>
             <a:endParaRPr lang="en-US" sz="4000" dirty="0"/>
           </a:p>
           <a:p>
-            <a:pPr algn="ctr" indent="0" marL="0">
+            <a:pPr algn="l" marL="342900" indent="-342900">
               <a:spcAft>
                 <a:spcPts val="800"/>
               </a:spcAft>
-              <a:buNone/>
+              <a:buSzPct val="100000"/>
+              <a:buFont typeface="+mj-lt"/>
+              <a:buAutoNum type="arabicPeriod" startAt="1"/>
             </a:pPr>
             <a:r>
-              <a:rPr lang="en-US" sz="4000" b="1" dirty="0">
-                <a:solidFill>
-                  <a:srgbClr val="990011"/>
+              <a:rPr lang="en-US" sz="4000" dirty="0">
+                <a:solidFill>
+                  <a:srgbClr val="111111"/>
                 </a:solidFill>
                 <a:latin typeface="Times New Roman" pitchFamily="34" charset="0"/>
                 <a:ea typeface="Times New Roman" pitchFamily="34" charset="-122"/>
                 <a:cs typeface="Times New Roman" pitchFamily="34" charset="-120"/>
               </a:rPr>
-              <a:t>Lesson 15: River Action on its Long Profile</a:t>
+              <a:t>The rolling of boulders is ______.</a:t>
+            </a:r>
+            <a:endParaRPr lang="en-US" sz="4000" dirty="0"/>
+          </a:p>
+          <a:p>
+            <a:pPr algn="l" marL="342900" indent="-342900">
+              <a:spcAft>
+                <a:spcPts val="800"/>
+              </a:spcAft>
+              <a:buSzPct val="100000"/>
+              <a:buFont typeface="+mj-lt"/>
+              <a:buAutoNum type="arabicPeriod" startAt="1"/>
+            </a:pPr>
+            <a:r>
+              <a:rPr lang="en-US" sz="4000" dirty="0">
+                <a:solidFill>
+                  <a:srgbClr val="111111"/>
+                </a:solidFill>
+                <a:latin typeface="Times New Roman" pitchFamily="34" charset="0"/>
+                <a:ea typeface="Times New Roman" pitchFamily="34" charset="-122"/>
+                <a:cs typeface="Times New Roman" pitchFamily="34" charset="-120"/>
+              </a:rPr>
+              <a:t>Silt carried in the water moves by ______.</a:t>
+            </a:r>
+            <a:endParaRPr lang="en-US" sz="4000" dirty="0"/>
+          </a:p>
+          <a:p>
+            <a:pPr algn="l" marL="342900" indent="-342900">
+              <a:spcAft>
+                <a:spcPts val="800"/>
+              </a:spcAft>
+              <a:buSzPct val="100000"/>
+              <a:buFont typeface="+mj-lt"/>
+              <a:buAutoNum type="arabicPeriod" startAt="1"/>
+            </a:pPr>
+            <a:r>
+              <a:rPr lang="en-US" sz="4000" dirty="0">
+                <a:solidFill>
+                  <a:srgbClr val="111111"/>
+                </a:solidFill>
+                <a:latin typeface="Times New Roman" pitchFamily="34" charset="0"/>
+                <a:ea typeface="Times New Roman" pitchFamily="34" charset="-122"/>
+                <a:cs typeface="Times New Roman" pitchFamily="34" charset="-120"/>
+              </a:rPr>
+              <a:t>The Benue leaves ______ in the dry season.</a:t>
             </a:r>
             <a:endParaRPr lang="en-US" sz="4000" dirty="0"/>
           </a:p>
@@ -18737,6 +19322,464 @@
                 <a:ea typeface="Calibri" pitchFamily="34" charset="-122"/>
                 <a:cs typeface="Calibri" pitchFamily="34" charset="-120"/>
               </a:rPr>
+              <a:t>HOMEWORK</a:t>
+            </a:r>
+            <a:endParaRPr lang="en-US" sz="1400" dirty="0"/>
+          </a:p>
+        </p:txBody>
+      </p:sp>
+      <p:pic>
+        <p:nvPicPr>
+          <p:cNvPr id="3" name="Image 0" descr="/home/claude/f4/img/minesec_sheet.png">    </p:cNvPr>
+          <p:cNvPicPr>
+            <a:picLocks noChangeAspect="1"/>
+          </p:cNvPicPr>
+          <p:nvPr/>
+        </p:nvPicPr>
+        <p:blipFill>
+          <a:blip r:embed="rId1"/>
+          <a:stretch>
+            <a:fillRect/>
+          </a:stretch>
+        </p:blipFill>
+        <p:spPr>
+          <a:xfrm>
+            <a:off x="0" y="658368"/>
+            <a:ext cx="5120640" cy="5833872"/>
+          </a:xfrm>
+          <a:prstGeom prst="rect">
+            <a:avLst/>
+          </a:prstGeom>
+        </p:spPr>
+      </p:pic>
+      <p:sp>
+        <p:nvSpPr>
+          <p:cNvPr id="4" name="Text 1"/>
+          <p:cNvSpPr/>
+          <p:nvPr/>
+        </p:nvSpPr>
+        <p:spPr>
+          <a:xfrm>
+            <a:off x="5349240" y="1005840"/>
+            <a:ext cx="6522415" cy="731520"/>
+          </a:xfrm>
+          <a:prstGeom prst="rect">
+            <a:avLst/>
+          </a:prstGeom>
+          <a:noFill/>
+          <a:ln/>
+        </p:spPr>
+        <p:txBody>
+          <a:bodyPr wrap="square" lIns="0" tIns="0" rIns="0" bIns="0" rtlCol="0" anchor="ctr">
+            <a:normAutofit/>
+          </a:bodyPr>
+          <a:lstStyle/>
+          <a:p>
+            <a:pPr algn="ctr" indent="0" marL="0">
+              <a:buNone/>
+            </a:pPr>
+            <a:r>
+              <a:rPr lang="en-US" sz="3600" b="1" dirty="0">
+                <a:solidFill>
+                  <a:srgbClr val="990011"/>
+                </a:solidFill>
+                <a:latin typeface="Times New Roman" pitchFamily="34" charset="0"/>
+                <a:ea typeface="Times New Roman" pitchFamily="34" charset="-122"/>
+                <a:cs typeface="Times New Roman" pitchFamily="34" charset="-120"/>
+              </a:rPr>
+              <a:t>Homework</a:t>
+            </a:r>
+            <a:endParaRPr lang="en-US" sz="3600" dirty="0"/>
+          </a:p>
+        </p:txBody>
+      </p:sp>
+      <p:sp>
+        <p:nvSpPr>
+          <p:cNvPr id="5" name="Text 2"/>
+          <p:cNvSpPr/>
+          <p:nvPr/>
+        </p:nvSpPr>
+        <p:spPr>
+          <a:xfrm>
+            <a:off x="5349240" y="1783080"/>
+            <a:ext cx="6522415" cy="4663440"/>
+          </a:xfrm>
+          <a:prstGeom prst="rect">
+            <a:avLst/>
+          </a:prstGeom>
+          <a:noFill/>
+          <a:ln/>
+        </p:spPr>
+        <p:txBody>
+          <a:bodyPr wrap="square" lIns="0" tIns="0" rIns="0" bIns="0" rtlCol="0" anchor="t"/>
+          <a:lstStyle/>
+          <a:p>
+            <a:pPr algn="l" indent="0" marL="0">
+              <a:spcAft>
+                <a:spcPts val="800"/>
+              </a:spcAft>
+              <a:buNone/>
+            </a:pPr>
+            <a:r>
+              <a:rPr lang="en-US" sz="4000" dirty="0">
+                <a:solidFill>
+                  <a:srgbClr val="111111"/>
+                </a:solidFill>
+                <a:latin typeface="Times New Roman" pitchFamily="34" charset="0"/>
+                <a:ea typeface="Times New Roman" pitchFamily="34" charset="-122"/>
+                <a:cs typeface="Times New Roman" pitchFamily="34" charset="-120"/>
+              </a:rPr>
+              <a:t>Name the three courses of a river.</a:t>
+            </a:r>
+            <a:endParaRPr lang="en-US" sz="4000" dirty="0"/>
+          </a:p>
+        </p:txBody>
+      </p:sp>
+      <p:sp>
+        <p:nvSpPr>
+          <p:cNvPr id="25" name="Slide Number Placeholder 0"/>
+          <p:cNvSpPr>
+            <a:spLocks noGrp="1"/>
+          </p:cNvSpPr>
+          <p:nvPr>
+            <p:ph type="sldNum" sz="quarter" idx="4294967295"/>
+          </p:nvPr>
+        </p:nvSpPr>
+        <p:spPr>
+          <a:xfrm>
+            <a:off x="27432" y="91440"/>
+            <a:ext cx="585216" cy="475488"/>
+          </a:xfrm>
+          <a:prstGeom prst="rect">
+            <a:avLst/>
+          </a:prstGeom>
+          <a:extLst>
+            <a:ext uri="{C572A759-6A51-4108-AA02-DFA0A04FC94B}">
+              <ma14:wrappingTextBoxFlag xmlns:ma14="http://schemas.microsoft.com/office/mac/drawingml/2011/main" val="0"/>
+            </a:ext>
+          </a:extLst>
+        </p:spPr>
+        <p:txBody>
+          <a:bodyPr/>
+          <a:lstStyle>
+            <a:lvl1pPr>
+              <a:defRPr sz="2000">
+                <a:solidFill>
+                  <a:srgbClr val="FFFFFF"/>
+                </a:solidFill>
+                <a:latin typeface="Calibri"/>
+                <a:ea typeface="Calibri"/>
+                <a:cs typeface="Calibri"/>
+              </a:defRPr>
+            </a:lvl1pPr>
+          </a:lstStyle>
+          <a:p>
+            <a:pPr algn="ctr"/>
+            <a:fld id="{F7021451-1387-4CA6-816F-3879F97B5CBC}" type="slidenum">
+              <a:rPr b="1" lang="en-US"/>
+              <a:t>53</a:t>
+            </a:fld>
+            <a:endParaRPr lang="en-US"/>
+          </a:p>
+        </p:txBody>
+      </p:sp>
+    </p:spTree>
+  </p:cSld>
+  <p:clrMapOvr>
+    <a:masterClrMapping/>
+  </p:clrMapOvr>
+</p:sld>
+</file>
+
+<file path=ppt/slides/slide54.xml><?xml version="1.0" encoding="utf-8"?>
+<p:sld xmlns:a="http://schemas.openxmlformats.org/drawingml/2006/main" xmlns:r="http://schemas.openxmlformats.org/officeDocument/2006/relationships" xmlns:p="http://schemas.openxmlformats.org/presentationml/2006/main">
+  <p:cSld name="Slide 54">
+    <p:spTree>
+      <p:nvGrpSpPr>
+        <p:cNvPr id="1" name=""/>
+        <p:cNvGrpSpPr/>
+        <p:nvPr/>
+      </p:nvGrpSpPr>
+      <p:grpSpPr>
+        <a:xfrm>
+          <a:off x="0" y="0"/>
+          <a:ext cx="0" cy="0"/>
+          <a:chOff x="0" y="0"/>
+          <a:chExt cx="0" cy="0"/>
+        </a:xfrm>
+      </p:grpSpPr>
+      <p:sp>
+        <p:nvSpPr>
+          <p:cNvPr id="2" name="Text 0"/>
+          <p:cNvSpPr/>
+          <p:nvPr/>
+        </p:nvSpPr>
+        <p:spPr>
+          <a:xfrm>
+            <a:off x="457200" y="713232"/>
+            <a:ext cx="11368735" cy="274320"/>
+          </a:xfrm>
+          <a:prstGeom prst="rect">
+            <a:avLst/>
+          </a:prstGeom>
+          <a:noFill/>
+          <a:ln/>
+        </p:spPr>
+        <p:txBody>
+          <a:bodyPr wrap="square" lIns="0" tIns="0" rIns="0" bIns="0" rtlCol="0" anchor="ctr"/>
+          <a:lstStyle/>
+          <a:p>
+            <a:pPr algn="r" indent="0" marL="0">
+              <a:buNone/>
+            </a:pPr>
+            <a:r>
+              <a:rPr lang="en-US" sz="1400" b="1" dirty="0">
+                <a:solidFill>
+                  <a:srgbClr val="1C3F6E"/>
+                </a:solidFill>
+                <a:latin typeface="Calibri" pitchFamily="34" charset="0"/>
+                <a:ea typeface="Calibri" pitchFamily="34" charset="-122"/>
+                <a:cs typeface="Calibri" pitchFamily="34" charset="-120"/>
+              </a:rPr>
+              <a:t>NEXT LESSON</a:t>
+            </a:r>
+            <a:endParaRPr lang="en-US" sz="1400" dirty="0"/>
+          </a:p>
+        </p:txBody>
+      </p:sp>
+      <p:pic>
+        <p:nvPicPr>
+          <p:cNvPr id="3" name="Image 0" descr="/home/claude/f4/img/minesec_sheet.png">    </p:cNvPr>
+          <p:cNvPicPr>
+            <a:picLocks noChangeAspect="1"/>
+          </p:cNvPicPr>
+          <p:nvPr/>
+        </p:nvPicPr>
+        <p:blipFill>
+          <a:blip r:embed="rId1"/>
+          <a:stretch>
+            <a:fillRect/>
+          </a:stretch>
+        </p:blipFill>
+        <p:spPr>
+          <a:xfrm>
+            <a:off x="0" y="658368"/>
+            <a:ext cx="5120640" cy="5833872"/>
+          </a:xfrm>
+          <a:prstGeom prst="rect">
+            <a:avLst/>
+          </a:prstGeom>
+        </p:spPr>
+      </p:pic>
+      <p:sp>
+        <p:nvSpPr>
+          <p:cNvPr id="4" name="Text 1"/>
+          <p:cNvSpPr/>
+          <p:nvPr/>
+        </p:nvSpPr>
+        <p:spPr>
+          <a:xfrm>
+            <a:off x="5349240" y="1005840"/>
+            <a:ext cx="6522415" cy="731520"/>
+          </a:xfrm>
+          <a:prstGeom prst="rect">
+            <a:avLst/>
+          </a:prstGeom>
+          <a:noFill/>
+          <a:ln/>
+        </p:spPr>
+        <p:txBody>
+          <a:bodyPr wrap="square" lIns="0" tIns="0" rIns="0" bIns="0" rtlCol="0" anchor="ctr">
+            <a:normAutofit/>
+          </a:bodyPr>
+          <a:lstStyle/>
+          <a:p>
+            <a:pPr algn="ctr" indent="0" marL="0">
+              <a:buNone/>
+            </a:pPr>
+            <a:r>
+              <a:rPr lang="en-US" sz="3600" b="1" dirty="0">
+                <a:solidFill>
+                  <a:srgbClr val="990011"/>
+                </a:solidFill>
+                <a:latin typeface="Times New Roman" pitchFamily="34" charset="0"/>
+                <a:ea typeface="Times New Roman" pitchFamily="34" charset="-122"/>
+                <a:cs typeface="Times New Roman" pitchFamily="34" charset="-120"/>
+              </a:rPr>
+              <a:t>Next Lesson</a:t>
+            </a:r>
+            <a:endParaRPr lang="en-US" sz="3600" dirty="0"/>
+          </a:p>
+        </p:txBody>
+      </p:sp>
+      <p:sp>
+        <p:nvSpPr>
+          <p:cNvPr id="5" name="Text 2"/>
+          <p:cNvSpPr/>
+          <p:nvPr/>
+        </p:nvSpPr>
+        <p:spPr>
+          <a:xfrm>
+            <a:off x="5349240" y="1783080"/>
+            <a:ext cx="6522415" cy="4663440"/>
+          </a:xfrm>
+          <a:prstGeom prst="rect">
+            <a:avLst/>
+          </a:prstGeom>
+          <a:noFill/>
+          <a:ln/>
+        </p:spPr>
+        <p:txBody>
+          <a:bodyPr wrap="square" lIns="0" tIns="0" rIns="0" bIns="0" rtlCol="0" anchor="ctr"/>
+          <a:lstStyle/>
+          <a:p>
+            <a:pPr algn="ctr" indent="0" marL="0">
+              <a:spcAft>
+                <a:spcPts val="800"/>
+              </a:spcAft>
+              <a:buNone/>
+            </a:pPr>
+            <a:r>
+              <a:rPr lang="en-US" sz="4000" b="1" dirty="0">
+                <a:solidFill>
+                  <a:srgbClr val="111111"/>
+                </a:solidFill>
+                <a:latin typeface="Times New Roman" pitchFamily="34" charset="0"/>
+                <a:ea typeface="Times New Roman" pitchFamily="34" charset="-122"/>
+                <a:cs typeface="Times New Roman" pitchFamily="34" charset="-120"/>
+              </a:rPr>
+              <a:t>Our next lesson will be on:</a:t>
+            </a:r>
+            <a:endParaRPr lang="en-US" sz="4000" dirty="0"/>
+          </a:p>
+          <a:p>
+            <a:pPr algn="ctr" indent="0" marL="0">
+              <a:spcAft>
+                <a:spcPts val="800"/>
+              </a:spcAft>
+              <a:buNone/>
+            </a:pPr>
+            <a:r>
+              <a:rPr lang="en-US" sz="4000" b="1" dirty="0">
+                <a:solidFill>
+                  <a:srgbClr val="990011"/>
+                </a:solidFill>
+                <a:latin typeface="Times New Roman" pitchFamily="34" charset="0"/>
+                <a:ea typeface="Times New Roman" pitchFamily="34" charset="-122"/>
+                <a:cs typeface="Times New Roman" pitchFamily="34" charset="-120"/>
+              </a:rPr>
+              <a:t>Lesson 15: River Action on its Long Profile</a:t>
+            </a:r>
+            <a:endParaRPr lang="en-US" sz="4000" dirty="0"/>
+          </a:p>
+        </p:txBody>
+      </p:sp>
+      <p:sp>
+        <p:nvSpPr>
+          <p:cNvPr id="25" name="Slide Number Placeholder 0"/>
+          <p:cNvSpPr>
+            <a:spLocks noGrp="1"/>
+          </p:cNvSpPr>
+          <p:nvPr>
+            <p:ph type="sldNum" sz="quarter" idx="4294967295"/>
+          </p:nvPr>
+        </p:nvSpPr>
+        <p:spPr>
+          <a:xfrm>
+            <a:off x="27432" y="91440"/>
+            <a:ext cx="585216" cy="475488"/>
+          </a:xfrm>
+          <a:prstGeom prst="rect">
+            <a:avLst/>
+          </a:prstGeom>
+          <a:extLst>
+            <a:ext uri="{C572A759-6A51-4108-AA02-DFA0A04FC94B}">
+              <ma14:wrappingTextBoxFlag xmlns:ma14="http://schemas.microsoft.com/office/mac/drawingml/2011/main" val="0"/>
+            </a:ext>
+          </a:extLst>
+        </p:spPr>
+        <p:txBody>
+          <a:bodyPr/>
+          <a:lstStyle>
+            <a:lvl1pPr>
+              <a:defRPr sz="2000">
+                <a:solidFill>
+                  <a:srgbClr val="FFFFFF"/>
+                </a:solidFill>
+                <a:latin typeface="Calibri"/>
+                <a:ea typeface="Calibri"/>
+                <a:cs typeface="Calibri"/>
+              </a:defRPr>
+            </a:lvl1pPr>
+          </a:lstStyle>
+          <a:p>
+            <a:pPr algn="ctr"/>
+            <a:fld id="{F7021451-1387-4CA6-816F-3879F97B5CBC}" type="slidenum">
+              <a:rPr b="1" lang="en-US"/>
+              <a:t>54</a:t>
+            </a:fld>
+            <a:endParaRPr lang="en-US"/>
+          </a:p>
+        </p:txBody>
+      </p:sp>
+    </p:spTree>
+  </p:cSld>
+  <p:clrMapOvr>
+    <a:masterClrMapping/>
+  </p:clrMapOvr>
+</p:sld>
+</file>
+
+<file path=ppt/slides/slide55.xml><?xml version="1.0" encoding="utf-8"?>
+<p:sld xmlns:a="http://schemas.openxmlformats.org/drawingml/2006/main" xmlns:r="http://schemas.openxmlformats.org/officeDocument/2006/relationships" xmlns:p="http://schemas.openxmlformats.org/presentationml/2006/main">
+  <p:cSld name="Slide 55">
+    <p:spTree>
+      <p:nvGrpSpPr>
+        <p:cNvPr id="1" name=""/>
+        <p:cNvGrpSpPr/>
+        <p:nvPr/>
+      </p:nvGrpSpPr>
+      <p:grpSpPr>
+        <a:xfrm>
+          <a:off x="0" y="0"/>
+          <a:ext cx="0" cy="0"/>
+          <a:chOff x="0" y="0"/>
+          <a:chExt cx="0" cy="0"/>
+        </a:xfrm>
+      </p:grpSpPr>
+      <p:sp>
+        <p:nvSpPr>
+          <p:cNvPr id="2" name="Text 0"/>
+          <p:cNvSpPr/>
+          <p:nvPr/>
+        </p:nvSpPr>
+        <p:spPr>
+          <a:xfrm>
+            <a:off x="457200" y="713232"/>
+            <a:ext cx="11368735" cy="274320"/>
+          </a:xfrm>
+          <a:prstGeom prst="rect">
+            <a:avLst/>
+          </a:prstGeom>
+          <a:noFill/>
+          <a:ln/>
+        </p:spPr>
+        <p:txBody>
+          <a:bodyPr wrap="square" lIns="0" tIns="0" rIns="0" bIns="0" rtlCol="0" anchor="ctr"/>
+          <a:lstStyle/>
+          <a:p>
+            <a:pPr algn="r" indent="0" marL="0">
+              <a:buNone/>
+            </a:pPr>
+            <a:r>
+              <a:rPr lang="en-US" sz="1400" b="1" dirty="0">
+                <a:solidFill>
+                  <a:srgbClr val="1C3F6E"/>
+                </a:solidFill>
+                <a:latin typeface="Calibri" pitchFamily="34" charset="0"/>
+                <a:ea typeface="Calibri" pitchFamily="34" charset="-122"/>
+                <a:cs typeface="Calibri" pitchFamily="34" charset="-120"/>
+              </a:rPr>
               <a:t>BILINGUAL GAME</a:t>
             </a:r>
             <a:endParaRPr lang="en-US" sz="1400" dirty="0"/>
@@ -18784,7 +19827,7 @@
       </p:sp>
       <p:graphicFrame>
         <p:nvGraphicFramePr>
-          <p:cNvPr id="54" name="Table 0"/>
+          <p:cNvPr id="56" name="Table 0"/>
           <p:cNvGraphicFramePr>
             <a:graphicFrameLocks noGrp="1"/>
           </p:cNvGraphicFramePr>
@@ -19102,7 +20145,7 @@
                           <a:ea typeface="Calibri" pitchFamily="34" charset="-122"/>
                           <a:cs typeface="Calibri" pitchFamily="34" charset="-120"/>
                         </a:rPr>
-                        <a:t>Load</a:t>
+                        <a:t>Transportation</a:t>
                       </a:r>
                       <a:endParaRPr lang="en-US" sz="2200" dirty="0">
                         <a:latin typeface="Calibri" charset="0"/>
@@ -19170,283 +20213,7 @@
                           <a:ea typeface="Calibri" pitchFamily="34" charset="-122"/>
                           <a:cs typeface="Calibri" pitchFamily="34" charset="-120"/>
                         </a:rPr>
-                        <a:t>La charge</a:t>
-                      </a:r>
-                      <a:endParaRPr lang="en-US" sz="2200" dirty="0">
-                        <a:latin typeface="Calibri" charset="0"/>
-                        <a:ea typeface="Calibri" charset="0"/>
-                        <a:cs typeface="Calibri" charset="0"/>
-                      </a:endParaRPr>
-                    </a:p>
-                  </a:txBody>
-                  <a:tcPr marL="73152" marR="73152" marT="73152" marB="73152" anchor="ctr">
-                    <a:lnL w="12700" cap="flat" cmpd="sng" algn="ctr">
-                      <a:solidFill>
-                        <a:srgbClr val="BBBBBB"/>
-                      </a:solidFill>
-                      <a:prstDash val="solid"/>
-                      <a:round/>
-                      <a:headEnd type="none" w="med" len="med"/>
-                      <a:tailEnd type="none" w="med" len="med"/>
-                    </a:lnL>
-                    <a:lnR w="12700" cap="flat" cmpd="sng" algn="ctr">
-                      <a:solidFill>
-                        <a:srgbClr val="BBBBBB"/>
-                      </a:solidFill>
-                      <a:prstDash val="solid"/>
-                      <a:round/>
-                      <a:headEnd type="none" w="med" len="med"/>
-                      <a:tailEnd type="none" w="med" len="med"/>
-                    </a:lnR>
-                    <a:lnT w="12700" cap="flat" cmpd="sng" algn="ctr">
-                      <a:solidFill>
-                        <a:srgbClr val="BBBBBB"/>
-                      </a:solidFill>
-                      <a:prstDash val="solid"/>
-                      <a:round/>
-                      <a:headEnd type="none" w="med" len="med"/>
-                      <a:tailEnd type="none" w="med" len="med"/>
-                    </a:lnT>
-                    <a:lnB w="12700" cap="flat" cmpd="sng" algn="ctr">
-                      <a:solidFill>
-                        <a:srgbClr val="BBBBBB"/>
-                      </a:solidFill>
-                      <a:prstDash val="solid"/>
-                      <a:round/>
-                      <a:headEnd type="none" w="med" len="med"/>
-                      <a:tailEnd type="none" w="med" len="med"/>
-                    </a:lnB>
-                    <a:solidFill>
-                      <a:srgbClr val="F2F4F8"/>
-                    </a:solidFill>
-                  </a:tcPr>
-                </a:tc>
-              </a:tr>
-              <a:tr h="0">
-                <a:tc>
-                  <a:txBody>
-                    <a:bodyPr/>
-                    <a:lstStyle/>
-                    <a:p>
-                      <a:pPr algn="ctr" indent="0" marL="0">
-                        <a:buNone/>
-                      </a:pPr>
-                      <a:r>
-                        <a:rPr lang="en-US" sz="2200" dirty="0">
-                          <a:solidFill>
-                            <a:srgbClr val="111111"/>
-                          </a:solidFill>
-                          <a:latin typeface="Calibri" pitchFamily="34" charset="0"/>
-                          <a:ea typeface="Calibri" pitchFamily="34" charset="-122"/>
-                          <a:cs typeface="Calibri" pitchFamily="34" charset="-120"/>
-                        </a:rPr>
-                        <a:t>Suspension</a:t>
-                      </a:r>
-                      <a:endParaRPr lang="en-US" sz="2200" dirty="0">
-                        <a:latin typeface="Calibri" charset="0"/>
-                        <a:ea typeface="Calibri" charset="0"/>
-                        <a:cs typeface="Calibri" charset="0"/>
-                      </a:endParaRPr>
-                    </a:p>
-                  </a:txBody>
-                  <a:tcPr marL="73152" marR="73152" marT="73152" marB="73152" anchor="ctr">
-                    <a:lnL w="12700" cap="flat" cmpd="sng" algn="ctr">
-                      <a:solidFill>
-                        <a:srgbClr val="BBBBBB"/>
-                      </a:solidFill>
-                      <a:prstDash val="solid"/>
-                      <a:round/>
-                      <a:headEnd type="none" w="med" len="med"/>
-                      <a:tailEnd type="none" w="med" len="med"/>
-                    </a:lnL>
-                    <a:lnR w="12700" cap="flat" cmpd="sng" algn="ctr">
-                      <a:solidFill>
-                        <a:srgbClr val="BBBBBB"/>
-                      </a:solidFill>
-                      <a:prstDash val="solid"/>
-                      <a:round/>
-                      <a:headEnd type="none" w="med" len="med"/>
-                      <a:tailEnd type="none" w="med" len="med"/>
-                    </a:lnR>
-                    <a:lnT w="12700" cap="flat" cmpd="sng" algn="ctr">
-                      <a:solidFill>
-                        <a:srgbClr val="BBBBBB"/>
-                      </a:solidFill>
-                      <a:prstDash val="solid"/>
-                      <a:round/>
-                      <a:headEnd type="none" w="med" len="med"/>
-                      <a:tailEnd type="none" w="med" len="med"/>
-                    </a:lnT>
-                    <a:lnB w="12700" cap="flat" cmpd="sng" algn="ctr">
-                      <a:solidFill>
-                        <a:srgbClr val="BBBBBB"/>
-                      </a:solidFill>
-                      <a:prstDash val="solid"/>
-                      <a:round/>
-                      <a:headEnd type="none" w="med" len="med"/>
-                      <a:tailEnd type="none" w="med" len="med"/>
-                    </a:lnB>
-                    <a:solidFill>
-                      <a:srgbClr val="FFFFFF"/>
-                    </a:solidFill>
-                  </a:tcPr>
-                </a:tc>
-                <a:tc>
-                  <a:txBody>
-                    <a:bodyPr/>
-                    <a:lstStyle/>
-                    <a:p>
-                      <a:pPr algn="ctr" indent="0" marL="0">
-                        <a:buNone/>
-                      </a:pPr>
-                      <a:r>
-                        <a:rPr lang="en-US" sz="2200" dirty="0">
-                          <a:solidFill>
-                            <a:srgbClr val="111111"/>
-                          </a:solidFill>
-                          <a:latin typeface="Calibri" pitchFamily="34" charset="0"/>
-                          <a:ea typeface="Calibri" pitchFamily="34" charset="-122"/>
-                          <a:cs typeface="Calibri" pitchFamily="34" charset="-120"/>
-                        </a:rPr>
-                        <a:t>La suspension</a:t>
-                      </a:r>
-                      <a:endParaRPr lang="en-US" sz="2200" dirty="0">
-                        <a:latin typeface="Calibri" charset="0"/>
-                        <a:ea typeface="Calibri" charset="0"/>
-                        <a:cs typeface="Calibri" charset="0"/>
-                      </a:endParaRPr>
-                    </a:p>
-                  </a:txBody>
-                  <a:tcPr marL="73152" marR="73152" marT="73152" marB="73152" anchor="ctr">
-                    <a:lnL w="12700" cap="flat" cmpd="sng" algn="ctr">
-                      <a:solidFill>
-                        <a:srgbClr val="BBBBBB"/>
-                      </a:solidFill>
-                      <a:prstDash val="solid"/>
-                      <a:round/>
-                      <a:headEnd type="none" w="med" len="med"/>
-                      <a:tailEnd type="none" w="med" len="med"/>
-                    </a:lnL>
-                    <a:lnR w="12700" cap="flat" cmpd="sng" algn="ctr">
-                      <a:solidFill>
-                        <a:srgbClr val="BBBBBB"/>
-                      </a:solidFill>
-                      <a:prstDash val="solid"/>
-                      <a:round/>
-                      <a:headEnd type="none" w="med" len="med"/>
-                      <a:tailEnd type="none" w="med" len="med"/>
-                    </a:lnR>
-                    <a:lnT w="12700" cap="flat" cmpd="sng" algn="ctr">
-                      <a:solidFill>
-                        <a:srgbClr val="BBBBBB"/>
-                      </a:solidFill>
-                      <a:prstDash val="solid"/>
-                      <a:round/>
-                      <a:headEnd type="none" w="med" len="med"/>
-                      <a:tailEnd type="none" w="med" len="med"/>
-                    </a:lnT>
-                    <a:lnB w="12700" cap="flat" cmpd="sng" algn="ctr">
-                      <a:solidFill>
-                        <a:srgbClr val="BBBBBB"/>
-                      </a:solidFill>
-                      <a:prstDash val="solid"/>
-                      <a:round/>
-                      <a:headEnd type="none" w="med" len="med"/>
-                      <a:tailEnd type="none" w="med" len="med"/>
-                    </a:lnB>
-                    <a:solidFill>
-                      <a:srgbClr val="FFFFFF"/>
-                    </a:solidFill>
-                  </a:tcPr>
-                </a:tc>
-              </a:tr>
-              <a:tr h="0">
-                <a:tc>
-                  <a:txBody>
-                    <a:bodyPr/>
-                    <a:lstStyle/>
-                    <a:p>
-                      <a:pPr algn="ctr" indent="0" marL="0">
-                        <a:buNone/>
-                      </a:pPr>
-                      <a:r>
-                        <a:rPr lang="en-US" sz="2200" dirty="0">
-                          <a:solidFill>
-                            <a:srgbClr val="111111"/>
-                          </a:solidFill>
-                          <a:latin typeface="Calibri" pitchFamily="34" charset="0"/>
-                          <a:ea typeface="Calibri" pitchFamily="34" charset="-122"/>
-                          <a:cs typeface="Calibri" pitchFamily="34" charset="-120"/>
-                        </a:rPr>
-                        <a:t>Saltation</a:t>
-                      </a:r>
-                      <a:endParaRPr lang="en-US" sz="2200" dirty="0">
-                        <a:latin typeface="Calibri" charset="0"/>
-                        <a:ea typeface="Calibri" charset="0"/>
-                        <a:cs typeface="Calibri" charset="0"/>
-                      </a:endParaRPr>
-                    </a:p>
-                  </a:txBody>
-                  <a:tcPr marL="73152" marR="73152" marT="73152" marB="73152" anchor="ctr">
-                    <a:lnL w="12700" cap="flat" cmpd="sng" algn="ctr">
-                      <a:solidFill>
-                        <a:srgbClr val="BBBBBB"/>
-                      </a:solidFill>
-                      <a:prstDash val="solid"/>
-                      <a:round/>
-                      <a:headEnd type="none" w="med" len="med"/>
-                      <a:tailEnd type="none" w="med" len="med"/>
-                    </a:lnL>
-                    <a:lnR w="12700" cap="flat" cmpd="sng" algn="ctr">
-                      <a:solidFill>
-                        <a:srgbClr val="BBBBBB"/>
-                      </a:solidFill>
-                      <a:prstDash val="solid"/>
-                      <a:round/>
-                      <a:headEnd type="none" w="med" len="med"/>
-                      <a:tailEnd type="none" w="med" len="med"/>
-                    </a:lnR>
-                    <a:lnT w="12700" cap="flat" cmpd="sng" algn="ctr">
-                      <a:solidFill>
-                        <a:srgbClr val="BBBBBB"/>
-                      </a:solidFill>
-                      <a:prstDash val="solid"/>
-                      <a:round/>
-                      <a:headEnd type="none" w="med" len="med"/>
-                      <a:tailEnd type="none" w="med" len="med"/>
-                    </a:lnT>
-                    <a:lnB w="12700" cap="flat" cmpd="sng" algn="ctr">
-                      <a:solidFill>
-                        <a:srgbClr val="BBBBBB"/>
-                      </a:solidFill>
-                      <a:prstDash val="solid"/>
-                      <a:round/>
-                      <a:headEnd type="none" w="med" len="med"/>
-                      <a:tailEnd type="none" w="med" len="med"/>
-                    </a:lnB>
-                    <a:solidFill>
-                      <a:srgbClr val="F2F4F8"/>
-                    </a:solidFill>
-                  </a:tcPr>
-                </a:tc>
-                <a:tc>
-                  <a:txBody>
-                    <a:bodyPr/>
-                    <a:lstStyle/>
-                    <a:p>
-                      <a:pPr algn="ctr" indent="0" marL="0">
-                        <a:buNone/>
-                      </a:pPr>
-                      <a:r>
-                        <a:rPr lang="en-US" sz="2200" dirty="0">
-                          <a:solidFill>
-                            <a:srgbClr val="111111"/>
-                          </a:solidFill>
-                          <a:latin typeface="Calibri" pitchFamily="34" charset="0"/>
-                          <a:ea typeface="Calibri" pitchFamily="34" charset="-122"/>
-                          <a:cs typeface="Calibri" pitchFamily="34" charset="-120"/>
-                        </a:rPr>
-                        <a:t>La saltation</a:t>
+                        <a:t>Le transport</a:t>
                       </a:r>
                       <a:endParaRPr lang="en-US" sz="2200" dirty="0">
                         <a:latin typeface="Calibri" charset="0"/>
@@ -19654,7 +20421,7 @@
                           <a:ea typeface="Calibri" pitchFamily="34" charset="-122"/>
                           <a:cs typeface="Calibri" pitchFamily="34" charset="-120"/>
                         </a:rPr>
-                        <a:t>Drainage basin</a:t>
+                        <a:t>River load</a:t>
                       </a:r>
                       <a:endParaRPr lang="en-US" sz="2200" dirty="0">
                         <a:latin typeface="Calibri" charset="0"/>
@@ -19722,7 +20489,283 @@
                           <a:ea typeface="Calibri" pitchFamily="34" charset="-122"/>
                           <a:cs typeface="Calibri" pitchFamily="34" charset="-120"/>
                         </a:rPr>
-                        <a:t>Le bassin versant</a:t>
+                        <a:t>La charge du fleuve</a:t>
+                      </a:r>
+                      <a:endParaRPr lang="en-US" sz="2200" dirty="0">
+                        <a:latin typeface="Calibri" charset="0"/>
+                        <a:ea typeface="Calibri" charset="0"/>
+                        <a:cs typeface="Calibri" charset="0"/>
+                      </a:endParaRPr>
+                    </a:p>
+                  </a:txBody>
+                  <a:tcPr marL="73152" marR="73152" marT="73152" marB="73152" anchor="ctr">
+                    <a:lnL w="12700" cap="flat" cmpd="sng" algn="ctr">
+                      <a:solidFill>
+                        <a:srgbClr val="BBBBBB"/>
+                      </a:solidFill>
+                      <a:prstDash val="solid"/>
+                      <a:round/>
+                      <a:headEnd type="none" w="med" len="med"/>
+                      <a:tailEnd type="none" w="med" len="med"/>
+                    </a:lnL>
+                    <a:lnR w="12700" cap="flat" cmpd="sng" algn="ctr">
+                      <a:solidFill>
+                        <a:srgbClr val="BBBBBB"/>
+                      </a:solidFill>
+                      <a:prstDash val="solid"/>
+                      <a:round/>
+                      <a:headEnd type="none" w="med" len="med"/>
+                      <a:tailEnd type="none" w="med" len="med"/>
+                    </a:lnR>
+                    <a:lnT w="12700" cap="flat" cmpd="sng" algn="ctr">
+                      <a:solidFill>
+                        <a:srgbClr val="BBBBBB"/>
+                      </a:solidFill>
+                      <a:prstDash val="solid"/>
+                      <a:round/>
+                      <a:headEnd type="none" w="med" len="med"/>
+                      <a:tailEnd type="none" w="med" len="med"/>
+                    </a:lnT>
+                    <a:lnB w="12700" cap="flat" cmpd="sng" algn="ctr">
+                      <a:solidFill>
+                        <a:srgbClr val="BBBBBB"/>
+                      </a:solidFill>
+                      <a:prstDash val="solid"/>
+                      <a:round/>
+                      <a:headEnd type="none" w="med" len="med"/>
+                      <a:tailEnd type="none" w="med" len="med"/>
+                    </a:lnB>
+                    <a:solidFill>
+                      <a:srgbClr val="F2F4F8"/>
+                    </a:solidFill>
+                  </a:tcPr>
+                </a:tc>
+              </a:tr>
+              <a:tr h="0">
+                <a:tc>
+                  <a:txBody>
+                    <a:bodyPr/>
+                    <a:lstStyle/>
+                    <a:p>
+                      <a:pPr algn="ctr" indent="0" marL="0">
+                        <a:buNone/>
+                      </a:pPr>
+                      <a:r>
+                        <a:rPr lang="en-US" sz="2200" dirty="0">
+                          <a:solidFill>
+                            <a:srgbClr val="111111"/>
+                          </a:solidFill>
+                          <a:latin typeface="Calibri" pitchFamily="34" charset="0"/>
+                          <a:ea typeface="Calibri" pitchFamily="34" charset="-122"/>
+                          <a:cs typeface="Calibri" pitchFamily="34" charset="-120"/>
+                        </a:rPr>
+                        <a:t>River bank</a:t>
+                      </a:r>
+                      <a:endParaRPr lang="en-US" sz="2200" dirty="0">
+                        <a:latin typeface="Calibri" charset="0"/>
+                        <a:ea typeface="Calibri" charset="0"/>
+                        <a:cs typeface="Calibri" charset="0"/>
+                      </a:endParaRPr>
+                    </a:p>
+                  </a:txBody>
+                  <a:tcPr marL="73152" marR="73152" marT="73152" marB="73152" anchor="ctr">
+                    <a:lnL w="12700" cap="flat" cmpd="sng" algn="ctr">
+                      <a:solidFill>
+                        <a:srgbClr val="BBBBBB"/>
+                      </a:solidFill>
+                      <a:prstDash val="solid"/>
+                      <a:round/>
+                      <a:headEnd type="none" w="med" len="med"/>
+                      <a:tailEnd type="none" w="med" len="med"/>
+                    </a:lnL>
+                    <a:lnR w="12700" cap="flat" cmpd="sng" algn="ctr">
+                      <a:solidFill>
+                        <a:srgbClr val="BBBBBB"/>
+                      </a:solidFill>
+                      <a:prstDash val="solid"/>
+                      <a:round/>
+                      <a:headEnd type="none" w="med" len="med"/>
+                      <a:tailEnd type="none" w="med" len="med"/>
+                    </a:lnR>
+                    <a:lnT w="12700" cap="flat" cmpd="sng" algn="ctr">
+                      <a:solidFill>
+                        <a:srgbClr val="BBBBBB"/>
+                      </a:solidFill>
+                      <a:prstDash val="solid"/>
+                      <a:round/>
+                      <a:headEnd type="none" w="med" len="med"/>
+                      <a:tailEnd type="none" w="med" len="med"/>
+                    </a:lnT>
+                    <a:lnB w="12700" cap="flat" cmpd="sng" algn="ctr">
+                      <a:solidFill>
+                        <a:srgbClr val="BBBBBB"/>
+                      </a:solidFill>
+                      <a:prstDash val="solid"/>
+                      <a:round/>
+                      <a:headEnd type="none" w="med" len="med"/>
+                      <a:tailEnd type="none" w="med" len="med"/>
+                    </a:lnB>
+                    <a:solidFill>
+                      <a:srgbClr val="FFFFFF"/>
+                    </a:solidFill>
+                  </a:tcPr>
+                </a:tc>
+                <a:tc>
+                  <a:txBody>
+                    <a:bodyPr/>
+                    <a:lstStyle/>
+                    <a:p>
+                      <a:pPr algn="ctr" indent="0" marL="0">
+                        <a:buNone/>
+                      </a:pPr>
+                      <a:r>
+                        <a:rPr lang="en-US" sz="2200" dirty="0">
+                          <a:solidFill>
+                            <a:srgbClr val="111111"/>
+                          </a:solidFill>
+                          <a:latin typeface="Calibri" pitchFamily="34" charset="0"/>
+                          <a:ea typeface="Calibri" pitchFamily="34" charset="-122"/>
+                          <a:cs typeface="Calibri" pitchFamily="34" charset="-120"/>
+                        </a:rPr>
+                        <a:t>La berge</a:t>
+                      </a:r>
+                      <a:endParaRPr lang="en-US" sz="2200" dirty="0">
+                        <a:latin typeface="Calibri" charset="0"/>
+                        <a:ea typeface="Calibri" charset="0"/>
+                        <a:cs typeface="Calibri" charset="0"/>
+                      </a:endParaRPr>
+                    </a:p>
+                  </a:txBody>
+                  <a:tcPr marL="73152" marR="73152" marT="73152" marB="73152" anchor="ctr">
+                    <a:lnL w="12700" cap="flat" cmpd="sng" algn="ctr">
+                      <a:solidFill>
+                        <a:srgbClr val="BBBBBB"/>
+                      </a:solidFill>
+                      <a:prstDash val="solid"/>
+                      <a:round/>
+                      <a:headEnd type="none" w="med" len="med"/>
+                      <a:tailEnd type="none" w="med" len="med"/>
+                    </a:lnL>
+                    <a:lnR w="12700" cap="flat" cmpd="sng" algn="ctr">
+                      <a:solidFill>
+                        <a:srgbClr val="BBBBBB"/>
+                      </a:solidFill>
+                      <a:prstDash val="solid"/>
+                      <a:round/>
+                      <a:headEnd type="none" w="med" len="med"/>
+                      <a:tailEnd type="none" w="med" len="med"/>
+                    </a:lnR>
+                    <a:lnT w="12700" cap="flat" cmpd="sng" algn="ctr">
+                      <a:solidFill>
+                        <a:srgbClr val="BBBBBB"/>
+                      </a:solidFill>
+                      <a:prstDash val="solid"/>
+                      <a:round/>
+                      <a:headEnd type="none" w="med" len="med"/>
+                      <a:tailEnd type="none" w="med" len="med"/>
+                    </a:lnT>
+                    <a:lnB w="12700" cap="flat" cmpd="sng" algn="ctr">
+                      <a:solidFill>
+                        <a:srgbClr val="BBBBBB"/>
+                      </a:solidFill>
+                      <a:prstDash val="solid"/>
+                      <a:round/>
+                      <a:headEnd type="none" w="med" len="med"/>
+                      <a:tailEnd type="none" w="med" len="med"/>
+                    </a:lnB>
+                    <a:solidFill>
+                      <a:srgbClr val="FFFFFF"/>
+                    </a:solidFill>
+                  </a:tcPr>
+                </a:tc>
+              </a:tr>
+              <a:tr h="0">
+                <a:tc>
+                  <a:txBody>
+                    <a:bodyPr/>
+                    <a:lstStyle/>
+                    <a:p>
+                      <a:pPr algn="ctr" indent="0" marL="0">
+                        <a:buNone/>
+                      </a:pPr>
+                      <a:r>
+                        <a:rPr lang="en-US" sz="2200" dirty="0">
+                          <a:solidFill>
+                            <a:srgbClr val="111111"/>
+                          </a:solidFill>
+                          <a:latin typeface="Calibri" pitchFamily="34" charset="0"/>
+                          <a:ea typeface="Calibri" pitchFamily="34" charset="-122"/>
+                          <a:cs typeface="Calibri" pitchFamily="34" charset="-120"/>
+                        </a:rPr>
+                        <a:t>Sandbank</a:t>
+                      </a:r>
+                      <a:endParaRPr lang="en-US" sz="2200" dirty="0">
+                        <a:latin typeface="Calibri" charset="0"/>
+                        <a:ea typeface="Calibri" charset="0"/>
+                        <a:cs typeface="Calibri" charset="0"/>
+                      </a:endParaRPr>
+                    </a:p>
+                  </a:txBody>
+                  <a:tcPr marL="73152" marR="73152" marT="73152" marB="73152" anchor="ctr">
+                    <a:lnL w="12700" cap="flat" cmpd="sng" algn="ctr">
+                      <a:solidFill>
+                        <a:srgbClr val="BBBBBB"/>
+                      </a:solidFill>
+                      <a:prstDash val="solid"/>
+                      <a:round/>
+                      <a:headEnd type="none" w="med" len="med"/>
+                      <a:tailEnd type="none" w="med" len="med"/>
+                    </a:lnL>
+                    <a:lnR w="12700" cap="flat" cmpd="sng" algn="ctr">
+                      <a:solidFill>
+                        <a:srgbClr val="BBBBBB"/>
+                      </a:solidFill>
+                      <a:prstDash val="solid"/>
+                      <a:round/>
+                      <a:headEnd type="none" w="med" len="med"/>
+                      <a:tailEnd type="none" w="med" len="med"/>
+                    </a:lnR>
+                    <a:lnT w="12700" cap="flat" cmpd="sng" algn="ctr">
+                      <a:solidFill>
+                        <a:srgbClr val="BBBBBB"/>
+                      </a:solidFill>
+                      <a:prstDash val="solid"/>
+                      <a:round/>
+                      <a:headEnd type="none" w="med" len="med"/>
+                      <a:tailEnd type="none" w="med" len="med"/>
+                    </a:lnT>
+                    <a:lnB w="12700" cap="flat" cmpd="sng" algn="ctr">
+                      <a:solidFill>
+                        <a:srgbClr val="BBBBBB"/>
+                      </a:solidFill>
+                      <a:prstDash val="solid"/>
+                      <a:round/>
+                      <a:headEnd type="none" w="med" len="med"/>
+                      <a:tailEnd type="none" w="med" len="med"/>
+                    </a:lnB>
+                    <a:solidFill>
+                      <a:srgbClr val="F2F4F8"/>
+                    </a:solidFill>
+                  </a:tcPr>
+                </a:tc>
+                <a:tc>
+                  <a:txBody>
+                    <a:bodyPr/>
+                    <a:lstStyle/>
+                    <a:p>
+                      <a:pPr algn="ctr" indent="0" marL="0">
+                        <a:buNone/>
+                      </a:pPr>
+                      <a:r>
+                        <a:rPr lang="en-US" sz="2200" dirty="0">
+                          <a:solidFill>
+                            <a:srgbClr val="111111"/>
+                          </a:solidFill>
+                          <a:latin typeface="Calibri" pitchFamily="34" charset="0"/>
+                          <a:ea typeface="Calibri" pitchFamily="34" charset="-122"/>
+                          <a:cs typeface="Calibri" pitchFamily="34" charset="-120"/>
+                        </a:rPr>
+                        <a:t>Le banc de sable</a:t>
                       </a:r>
                       <a:endParaRPr lang="en-US" sz="2200" dirty="0">
                         <a:latin typeface="Calibri" charset="0"/>
@@ -19820,7 +20863,7 @@
             <a:pPr algn="ctr"/>
             <a:fld id="{F7021451-1387-4CA6-816F-3879F97B5CBC}" type="slidenum">
               <a:rPr b="1" lang="en-US"/>
-              <a:t>53</a:t>
+              <a:t>55</a:t>
             </a:fld>
             <a:endParaRPr lang="en-US"/>
           </a:p>
@@ -19834,9 +20877,9 @@
 </p:sld>
 </file>
 
-<file path=ppt/slides/slide54.xml><?xml version="1.0" encoding="utf-8"?>
+<file path=ppt/slides/slide56.xml><?xml version="1.0" encoding="utf-8"?>
 <p:sld xmlns:a="http://schemas.openxmlformats.org/drawingml/2006/main" xmlns:r="http://schemas.openxmlformats.org/officeDocument/2006/relationships" xmlns:p="http://schemas.openxmlformats.org/presentationml/2006/main">
-  <p:cSld name="Slide 54">
+  <p:cSld name="Slide 56">
     <p:spTree>
       <p:nvGrpSpPr>
         <p:cNvPr id="1" name=""/>
@@ -19931,7 +20974,7 @@
       </p:sp>
       <p:graphicFrame>
         <p:nvGraphicFramePr>
-          <p:cNvPr id="55" name="Table 0"/>
+          <p:cNvPr id="57" name="Table 0"/>
           <p:cNvGraphicFramePr>
             <a:graphicFrameLocks noGrp="1"/>
           </p:cNvGraphicFramePr>
@@ -20317,7 +21360,7 @@
                           <a:ea typeface="Calibri" pitchFamily="34" charset="-122"/>
                           <a:cs typeface="Calibri" pitchFamily="34" charset="-120"/>
                         </a:rPr>
-                        <a:t>Explain the processes of river erosion. Describe how rivers carry their load. Interpret the Hjulström graph and describe the river as a system.</a:t>
+                        <a:t>Describe the river as an open system. Explain the four processes of river erosion. Explain the four methods of transportation. Explain why and where a river deposits its load.</a:t>
                       </a:r>
                       <a:endParaRPr lang="en-US" sz="1600" dirty="0">
                         <a:latin typeface="Calibri" charset="0"/>
@@ -20455,7 +21498,7 @@
                           <a:ea typeface="Calibri" pitchFamily="34" charset="-122"/>
                           <a:cs typeface="Calibri" pitchFamily="34" charset="-120"/>
                         </a:rPr>
-                        <a:t>Learners are able to explain how rivers erode, carry and deposit material.</a:t>
+                        <a:t>Learners are able to explain how a river erodes, carries and deposits material, using the Benue as an example.</a:t>
                       </a:r>
                       <a:endParaRPr lang="en-US" sz="1600" dirty="0">
                         <a:latin typeface="Calibri" charset="0"/>
@@ -20553,7 +21596,7 @@
             <a:pPr algn="ctr"/>
             <a:fld id="{F7021451-1387-4CA6-816F-3879F97B5CBC}" type="slidenum">
               <a:rPr b="1" lang="en-US"/>
-              <a:t>54</a:t>
+              <a:t>56</a:t>
             </a:fld>
             <a:endParaRPr lang="en-US"/>
           </a:p>
@@ -20567,9 +21610,9 @@
 </p:sld>
 </file>
 
-<file path=ppt/slides/slide55.xml><?xml version="1.0" encoding="utf-8"?>
+<file path=ppt/slides/slide57.xml><?xml version="1.0" encoding="utf-8"?>
 <p:sld xmlns:a="http://schemas.openxmlformats.org/drawingml/2006/main" xmlns:r="http://schemas.openxmlformats.org/officeDocument/2006/relationships" xmlns:p="http://schemas.openxmlformats.org/presentationml/2006/main">
-  <p:cSld name="Slide 55">
+  <p:cSld name="Slide 57">
     <p:spTree>
       <p:nvGrpSpPr>
         <p:cNvPr id="1" name=""/>
@@ -20664,7 +21707,7 @@
       </p:sp>
       <p:graphicFrame>
         <p:nvGraphicFramePr>
-          <p:cNvPr id="56" name="Table 0"/>
+          <p:cNvPr id="58" name="Table 0"/>
           <p:cNvGraphicFramePr>
             <a:graphicFrameLocks noGrp="1"/>
           </p:cNvGraphicFramePr>
@@ -20774,7 +21817,7 @@
                           <a:ea typeface="Calibri" pitchFamily="34" charset="-122"/>
                           <a:cs typeface="Calibri" pitchFamily="34" charset="-120"/>
                         </a:rPr>
-                        <a:t>DEFINITIONS; Erosional Processes; Transportation; Deposition and the River as a System.</a:t>
+                        <a:t>DEFINITIONS; The River as a System; River Erosion; River Transportation; River Deposition.</a:t>
                       </a:r>
                       <a:endParaRPr lang="en-US" sz="1600" dirty="0">
                         <a:latin typeface="Calibri" charset="0"/>
@@ -21050,7 +22093,7 @@
                           <a:ea typeface="Calibri" pitchFamily="34" charset="-122"/>
                           <a:cs typeface="Calibri" pitchFamily="34" charset="-120"/>
                         </a:rPr>
-                        <a:t>Draw the long profile of a river and mark the upper, middle and lower courses.</a:t>
+                        <a:t>Name the three courses of a river.</a:t>
                       </a:r>
                       <a:endParaRPr lang="en-US" sz="1600" dirty="0">
                         <a:latin typeface="Calibri" charset="0"/>
@@ -21424,7 +22467,7 @@
             <a:pPr algn="ctr"/>
             <a:fld id="{F7021451-1387-4CA6-816F-3879F97B5CBC}" type="slidenum">
               <a:rPr b="1" lang="en-US"/>
-              <a:t>55</a:t>
+              <a:t>57</a:t>
             </a:fld>
             <a:endParaRPr lang="en-US"/>
           </a:p>
@@ -21438,9 +22481,9 @@
 </p:sld>
 </file>
 
-<file path=ppt/slides/slide56.xml><?xml version="1.0" encoding="utf-8"?>
+<file path=ppt/slides/slide58.xml><?xml version="1.0" encoding="utf-8"?>
 <p:sld xmlns:a="http://schemas.openxmlformats.org/drawingml/2006/main" xmlns:r="http://schemas.openxmlformats.org/officeDocument/2006/relationships" xmlns:p="http://schemas.openxmlformats.org/presentationml/2006/main">
-  <p:cSld name="Slide 56">
+  <p:cSld name="Slide 58">
     <p:spTree>
       <p:nvGrpSpPr>
         <p:cNvPr id="1" name=""/>
@@ -21617,7 +22660,7 @@
                 <a:ea typeface="Calibri" pitchFamily="34" charset="-122"/>
                 <a:cs typeface="Calibri" pitchFamily="34" charset="-120"/>
               </a:rPr>
-              <a:t>Activity 2 is an animation (GIF): it plays automatically in slide-show mode.</a:t>
+              <a:t>Activity 5 is an animation (GIF): it plays automatically in slide-show mode.</a:t>
             </a:r>
             <a:endParaRPr lang="en-US" sz="2000" dirty="0"/>
           </a:p>
@@ -21638,7 +22681,7 @@
                 <a:ea typeface="Calibri" pitchFamily="34" charset="-122"/>
                 <a:cs typeface="Calibri" pitchFamily="34" charset="-120"/>
               </a:rPr>
-              <a:t>Without the projector (Activity 1): write the four processes with one example each.</a:t>
+              <a:t>Without the projector (Activity 1): draw inputs, stores and outputs.</a:t>
             </a:r>
             <a:endParaRPr lang="en-US" sz="2000" dirty="0"/>
           </a:p>
@@ -21659,7 +22702,7 @@
                 <a:ea typeface="Calibri" pitchFamily="34" charset="-122"/>
                 <a:cs typeface="Calibri" pitchFamily="34" charset="-120"/>
               </a:rPr>
-              <a:t>Without the projector (Activity 2): shake sand and water in a bottle.</a:t>
+              <a:t>Without the projector (Activity 2): rub two stones together.</a:t>
             </a:r>
             <a:endParaRPr lang="en-US" sz="2000" dirty="0"/>
           </a:p>
@@ -21680,7 +22723,7 @@
                 <a:ea typeface="Calibri" pitchFamily="34" charset="-122"/>
                 <a:cs typeface="Calibri" pitchFamily="34" charset="-120"/>
               </a:rPr>
-              <a:t>Without the projector (Activity 3): compare dry clay and loose sand.</a:t>
+              <a:t>Without the projector (Activity 3): shake a bottle with water, sand and soil.</a:t>
             </a:r>
             <a:endParaRPr lang="en-US" sz="2000" dirty="0"/>
           </a:p>
@@ -21701,7 +22744,7 @@
                 <a:ea typeface="Calibri" pitchFamily="34" charset="-122"/>
                 <a:cs typeface="Calibri" pitchFamily="34" charset="-120"/>
               </a:rPr>
-              <a:t>Without the projector (Activity 4): describe sandbanks of the Benue in the dry season.</a:t>
+              <a:t>Without the projector (Activity 4): compare rainy and dry seasons.</a:t>
             </a:r>
             <a:endParaRPr lang="en-US" sz="2000" dirty="0"/>
           </a:p>
@@ -21722,7 +22765,7 @@
                 <a:ea typeface="Calibri" pitchFamily="34" charset="-122"/>
                 <a:cs typeface="Calibri" pitchFamily="34" charset="-120"/>
               </a:rPr>
-              <a:t>Without the projector (Activity 5): draw three boxes with arrows.</a:t>
+              <a:t>Without the projector (Activity 5): let the shaken bottle settle.</a:t>
             </a:r>
             <a:endParaRPr lang="en-US" sz="2000" dirty="0"/>
           </a:p>
@@ -21770,7 +22813,7 @@
             <a:pPr algn="ctr"/>
             <a:fld id="{F7021451-1387-4CA6-816F-3879F97B5CBC}" type="slidenum">
               <a:rPr b="1" lang="en-US"/>
-              <a:t>56</a:t>
+              <a:t>58</a:t>
             </a:fld>
             <a:endParaRPr lang="en-US"/>
           </a:p>
@@ -21784,9 +22827,9 @@
 </p:sld>
 </file>
 
-<file path=ppt/slides/slide57.xml><?xml version="1.0" encoding="utf-8"?>
+<file path=ppt/slides/slide59.xml><?xml version="1.0" encoding="utf-8"?>
 <p:sld xmlns:a="http://schemas.openxmlformats.org/drawingml/2006/main" xmlns:r="http://schemas.openxmlformats.org/officeDocument/2006/relationships" xmlns:p="http://schemas.openxmlformats.org/presentationml/2006/main">
-  <p:cSld name="Slide 57">
+  <p:cSld name="Slide 59">
     <p:spTree>
       <p:nvGrpSpPr>
         <p:cNvPr id="1" name=""/>
@@ -21942,7 +22985,7 @@
                 <a:ea typeface="Calibri" pitchFamily="34" charset="-122"/>
                 <a:cs typeface="Calibri" pitchFamily="34" charset="-120"/>
               </a:rPr>
-              <a:t>National Geography Syllabus, MINESEC/IGE/IP-SS, 2019 — Module 2 (Geomorphology).</a:t>
+              <a:t>Geography Syllabus for Sixth Forms (Lower and Upper Sixth), MINESEC, 2019 — Module 2 (Geomorphology).</a:t>
             </a:r>
             <a:endParaRPr lang="en-US" sz="1800" dirty="0"/>
           </a:p>
@@ -21963,7 +23006,7 @@
                 <a:ea typeface="Calibri" pitchFamily="34" charset="-122"/>
                 <a:cs typeface="Calibri" pitchFamily="34" charset="-120"/>
               </a:rPr>
-              <a:t>Photo, Activity 4: “Parana River Floodplain, Northern Argentina (NASA, International Space” by NASA's Marshall Space Flight Center, CC BY-NC 2.0, via nasa (https://www.flickr.com/photos/28634332@N05/5684050889)</a:t>
+              <a:t>Teacher's course notes: Mr KAMDEM E., Geomorphology (LSA), GBHS Garoua, 2026.</a:t>
             </a:r>
             <a:endParaRPr lang="en-US" sz="1800" dirty="0"/>
           </a:p>
@@ -21984,6 +23027,27 @@
                 <a:ea typeface="Calibri" pitchFamily="34" charset="-122"/>
                 <a:cs typeface="Calibri" pitchFamily="34" charset="-120"/>
               </a:rPr>
+              <a:t>Photo, Activity 4: “Parana River Floodplain, Northern Argentina (NASA, International Space” by NASA's Marshall Space Flight Center, CC BY-NC 2.0, via nasa (https://www.flickr.com/photos/28634332@N05/5684050889)</a:t>
+            </a:r>
+            <a:endParaRPr lang="en-US" sz="1800" dirty="0"/>
+          </a:p>
+          <a:p>
+            <a:pPr algn="l" marL="342900" indent="-342900">
+              <a:spcAft>
+                <a:spcPts val="800"/>
+              </a:spcAft>
+              <a:buSzPct val="100000"/>
+              <a:buChar char="•"/>
+            </a:pPr>
+            <a:r>
+              <a:rPr lang="en-US" sz="1800" dirty="0">
+                <a:solidFill>
+                  <a:srgbClr val="111111"/>
+                </a:solidFill>
+                <a:latin typeface="Calibri" pitchFamily="34" charset="0"/>
+                <a:ea typeface="Calibri" pitchFamily="34" charset="-122"/>
+                <a:cs typeface="Calibri" pitchFamily="34" charset="-120"/>
+              </a:rPr>
               <a:t>Diagrams and animations: drawn for this lesson (Geography Department).</a:t>
             </a:r>
             <a:endParaRPr lang="en-US" sz="1800" dirty="0"/>
@@ -22032,7 +23096,7 @@
             <a:pPr algn="ctr"/>
             <a:fld id="{F7021451-1387-4CA6-816F-3879F97B5CBC}" type="slidenum">
               <a:rPr b="1" lang="en-US"/>
-              <a:t>57</a:t>
+              <a:t>59</a:t>
             </a:fld>
             <a:endParaRPr lang="en-US"/>
           </a:p>
@@ -22450,7 +23514,7 @@
         <p:spPr>
           <a:xfrm>
             <a:off x="0" y="658368"/>
-            <a:ext cx="1463040" cy="5833872"/>
+            <a:ext cx="5120640" cy="5833872"/>
           </a:xfrm>
           <a:prstGeom prst="rect">
             <a:avLst/>
@@ -22465,8 +23529,8 @@
         </p:nvSpPr>
         <p:spPr>
           <a:xfrm>
-            <a:off x="1691640" y="1005840"/>
-            <a:ext cx="10180015" cy="731520"/>
+            <a:off x="5349240" y="1005840"/>
+            <a:ext cx="6522415" cy="731520"/>
           </a:xfrm>
           <a:prstGeom prst="rect">
             <a:avLst/>
@@ -22506,8 +23570,8 @@
         </p:nvSpPr>
         <p:spPr>
           <a:xfrm>
-            <a:off x="1691640" y="1783080"/>
-            <a:ext cx="10180015" cy="4663440"/>
+            <a:off x="5349240" y="1783080"/>
+            <a:ext cx="6522415" cy="4663440"/>
           </a:xfrm>
           <a:prstGeom prst="rect">
             <a:avLst/>
@@ -22556,7 +23620,7 @@
                 <a:ea typeface="Times New Roman" pitchFamily="34" charset="-122"/>
                 <a:cs typeface="Times New Roman" pitchFamily="34" charset="-120"/>
               </a:rPr>
-              <a:t>Explain the processes of river erosion.</a:t>
+              <a:t>Describe the river as an open system.</a:t>
             </a:r>
             <a:endParaRPr lang="en-US" sz="4000" dirty="0"/>
           </a:p>
@@ -22578,29 +23642,7 @@
                 <a:ea typeface="Times New Roman" pitchFamily="34" charset="-122"/>
                 <a:cs typeface="Times New Roman" pitchFamily="34" charset="-120"/>
               </a:rPr>
-              <a:t>Describe how rivers carry their load.</a:t>
-            </a:r>
-            <a:endParaRPr lang="en-US" sz="4000" dirty="0"/>
-          </a:p>
-          <a:p>
-            <a:pPr algn="l" marL="342900" indent="-342900">
-              <a:spcAft>
-                <a:spcPts val="800"/>
-              </a:spcAft>
-              <a:buSzPct val="100000"/>
-              <a:buFont typeface="+mj-lt"/>
-              <a:buAutoNum type="arabicPeriod" startAt="1"/>
-            </a:pPr>
-            <a:r>
-              <a:rPr lang="en-US" sz="4000" dirty="0">
-                <a:solidFill>
-                  <a:srgbClr val="111111"/>
-                </a:solidFill>
-                <a:latin typeface="Times New Roman" pitchFamily="34" charset="0"/>
-                <a:ea typeface="Times New Roman" pitchFamily="34" charset="-122"/>
-                <a:cs typeface="Times New Roman" pitchFamily="34" charset="-120"/>
-              </a:rPr>
-              <a:t>Interpret the Hjulström graph and describe the river as a system.</a:t>
+              <a:t>Explain the four processes of river erosion.</a:t>
             </a:r>
             <a:endParaRPr lang="en-US" sz="4000" dirty="0"/>
           </a:p>
@@ -22712,7 +23754,7 @@
                 <a:ea typeface="Calibri" pitchFamily="34" charset="-122"/>
                 <a:cs typeface="Calibri" pitchFamily="34" charset="-120"/>
               </a:rPr>
-              <a:t>PREVIOUS KNOWLEDGE</a:t>
+              <a:t>OBJECTIVES</a:t>
             </a:r>
             <a:endParaRPr lang="en-US" sz="1400" dirty="0"/>
           </a:p>
@@ -22777,7 +23819,7 @@
                 <a:ea typeface="Times New Roman" pitchFamily="34" charset="-122"/>
                 <a:cs typeface="Times New Roman" pitchFamily="34" charset="-120"/>
               </a:rPr>
-              <a:t>Previous Knowledge</a:t>
+              <a:t>Objectives (continued)</a:t>
             </a:r>
             <a:endParaRPr lang="en-US" sz="3600" dirty="0"/>
           </a:p>
@@ -22809,7 +23851,8 @@
                 <a:spcPts val="800"/>
               </a:spcAft>
               <a:buSzPct val="100000"/>
-              <a:buChar char="•"/>
+              <a:buFont typeface="+mj-lt"/>
+              <a:buAutoNum type="arabicPeriod" startAt="1"/>
             </a:pPr>
             <a:r>
               <a:rPr lang="en-US" sz="4000" dirty="0">
@@ -22820,7 +23863,7 @@
                 <a:ea typeface="Times New Roman" pitchFamily="34" charset="-122"/>
                 <a:cs typeface="Times New Roman" pitchFamily="34" charset="-120"/>
               </a:rPr>
-              <a:t>Denudation includes erosion, transport and deposition.</a:t>
+              <a:t>Explain the four methods of transportation.</a:t>
             </a:r>
             <a:endParaRPr lang="en-US" sz="4000" dirty="0"/>
           </a:p>
@@ -22830,7 +23873,8 @@
                 <a:spcPts val="800"/>
               </a:spcAft>
               <a:buSzPct val="100000"/>
-              <a:buChar char="•"/>
+              <a:buFont typeface="+mj-lt"/>
+              <a:buAutoNum type="arabicPeriod" startAt="1"/>
             </a:pPr>
             <a:r>
               <a:rPr lang="en-US" sz="4000" dirty="0">
@@ -22841,7 +23885,7 @@
                 <a:ea typeface="Times New Roman" pitchFamily="34" charset="-122"/>
                 <a:cs typeface="Times New Roman" pitchFamily="34" charset="-120"/>
               </a:rPr>
-              <a:t>Running water is the main agent of erosion.</a:t>
+              <a:t>Explain why and where a river deposits its load.</a:t>
             </a:r>
             <a:endParaRPr lang="en-US" sz="4000" dirty="0"/>
           </a:p>
@@ -22953,7 +23997,7 @@
                 <a:ea typeface="Calibri" pitchFamily="34" charset="-122"/>
                 <a:cs typeface="Calibri" pitchFamily="34" charset="-120"/>
               </a:rPr>
-              <a:t>REAL-LIFE SITUATION</a:t>
+              <a:t>PREVIOUS KNOWLEDGE</a:t>
             </a:r>
             <a:endParaRPr lang="en-US" sz="1400" dirty="0"/>
           </a:p>
@@ -23018,7 +24062,7 @@
                 <a:ea typeface="Times New Roman" pitchFamily="34" charset="-122"/>
                 <a:cs typeface="Times New Roman" pitchFamily="34" charset="-120"/>
               </a:rPr>
-              <a:t>Situation in Real Life</a:t>
+              <a:t>Previous Knowledge</a:t>
             </a:r>
             <a:endParaRPr lang="en-US" sz="3600" dirty="0"/>
           </a:p>
@@ -23045,11 +24089,12 @@
           <a:bodyPr wrap="square" lIns="0" tIns="0" rIns="0" bIns="0" rtlCol="0" anchor="t"/>
           <a:lstStyle/>
           <a:p>
-            <a:pPr algn="l" indent="0" marL="0">
+            <a:pPr algn="l" marL="342900" indent="-342900">
               <a:spcAft>
                 <a:spcPts val="800"/>
               </a:spcAft>
-              <a:buNone/>
+              <a:buSzPct val="100000"/>
+              <a:buChar char="•"/>
             </a:pPr>
             <a:r>
               <a:rPr lang="en-US" sz="4000" dirty="0">
@@ -23060,7 +24105,49 @@
                 <a:ea typeface="Times New Roman" pitchFamily="34" charset="-122"/>
                 <a:cs typeface="Times New Roman" pitchFamily="34" charset="-120"/>
               </a:rPr>
-              <a:t>In August, the Benue at Garoua is brown and fast and carries mud, sand and branches. In March, the water is clear and slow, and sandbanks appear.</a:t>
+              <a:t>Erosion removes weathered material.</a:t>
+            </a:r>
+            <a:endParaRPr lang="en-US" sz="4000" dirty="0"/>
+          </a:p>
+          <a:p>
+            <a:pPr algn="l" marL="342900" indent="-342900">
+              <a:spcAft>
+                <a:spcPts val="800"/>
+              </a:spcAft>
+              <a:buSzPct val="100000"/>
+              <a:buChar char="•"/>
+            </a:pPr>
+            <a:r>
+              <a:rPr lang="en-US" sz="4000" dirty="0">
+                <a:solidFill>
+                  <a:srgbClr val="111111"/>
+                </a:solidFill>
+                <a:latin typeface="Times New Roman" pitchFamily="34" charset="0"/>
+                <a:ea typeface="Times New Roman" pitchFamily="34" charset="-122"/>
+                <a:cs typeface="Times New Roman" pitchFamily="34" charset="-120"/>
+              </a:rPr>
+              <a:t>The Benue flows past Garoua.</a:t>
+            </a:r>
+            <a:endParaRPr lang="en-US" sz="4000" dirty="0"/>
+          </a:p>
+          <a:p>
+            <a:pPr algn="l" marL="342900" indent="-342900">
+              <a:spcAft>
+                <a:spcPts val="800"/>
+              </a:spcAft>
+              <a:buSzPct val="100000"/>
+              <a:buChar char="•"/>
+            </a:pPr>
+            <a:r>
+              <a:rPr lang="en-US" sz="4000" dirty="0">
+                <a:solidFill>
+                  <a:srgbClr val="111111"/>
+                </a:solidFill>
+                <a:latin typeface="Times New Roman" pitchFamily="34" charset="0"/>
+                <a:ea typeface="Times New Roman" pitchFamily="34" charset="-122"/>
+                <a:cs typeface="Times New Roman" pitchFamily="34" charset="-120"/>
+              </a:rPr>
+              <a:t>The Benue has sandbanks in the dry season.</a:t>
             </a:r>
             <a:endParaRPr lang="en-US" sz="4000" dirty="0"/>
           </a:p>
